--- a/results/presentation.pptx
+++ b/results/presentation.pptx
@@ -118,6 +118,1631 @@
     </a:lvl9pPr>
   </p:defaultTextStyle>
 </p:presentation>
+</file>
+
+<file path=ppt/notesMasters/notesMaster1.xml><?xml version="1.0" encoding="utf-8"?>
+<p:notesMaster xmlns:a="http://schemas.openxmlformats.org/drawingml/2006/main" xmlns:p="http://schemas.openxmlformats.org/presentationml/2006/main" xmlns:r="http://schemas.openxmlformats.org/officeDocument/2006/relationships">
+  <p:cSld>
+    <p:bg>
+      <p:bgRef idx="1001">
+        <a:schemeClr val="bg1"/>
+      </p:bgRef>
+    </p:bg>
+    <p:spTree>
+      <p:nvGrpSpPr>
+        <p:cNvPr id="1" name=""/>
+        <p:cNvGrpSpPr/>
+        <p:nvPr/>
+      </p:nvGrpSpPr>
+      <p:grpSpPr>
+        <a:xfrm>
+          <a:off x="0" y="0"/>
+          <a:ext cx="0" cy="0"/>
+          <a:chOff x="0" y="0"/>
+          <a:chExt cx="0" cy="0"/>
+        </a:xfrm>
+      </p:grpSpPr>
+      <p:sp>
+        <p:nvSpPr>
+          <p:cNvPr id="2" name="Header Placeholder 1"/>
+          <p:cNvSpPr>
+            <a:spLocks noGrp="1"/>
+          </p:cNvSpPr>
+          <p:nvPr>
+            <p:ph type="hdr" sz="quarter"/>
+          </p:nvPr>
+        </p:nvSpPr>
+        <p:spPr>
+          <a:xfrm>
+            <a:off x="0" y="0"/>
+            <a:ext cx="2971800" cy="457200"/>
+          </a:xfrm>
+          <a:prstGeom prst="rect">
+            <a:avLst/>
+          </a:prstGeom>
+        </p:spPr>
+        <p:txBody>
+          <a:bodyPr vert="horz" lIns="91440" tIns="45720" rIns="91440" bIns="45720" rtlCol="0"/>
+          <a:lstStyle>
+            <a:lvl1pPr algn="l">
+              <a:defRPr sz="1200"/>
+            </a:lvl1pPr>
+          </a:lstStyle>
+          <a:p>
+            <a:endParaRPr lang="en-US"/>
+          </a:p>
+        </p:txBody>
+      </p:sp>
+      <p:sp>
+        <p:nvSpPr>
+          <p:cNvPr id="3" name="Date Placeholder 2"/>
+          <p:cNvSpPr>
+            <a:spLocks noGrp="1"/>
+          </p:cNvSpPr>
+          <p:nvPr>
+            <p:ph type="dt" idx="1"/>
+          </p:nvPr>
+        </p:nvSpPr>
+        <p:spPr>
+          <a:xfrm>
+            <a:off x="3884613" y="0"/>
+            <a:ext cx="2971800" cy="457200"/>
+          </a:xfrm>
+          <a:prstGeom prst="rect">
+            <a:avLst/>
+          </a:prstGeom>
+        </p:spPr>
+        <p:txBody>
+          <a:bodyPr vert="horz" lIns="91440" tIns="45720" rIns="91440" bIns="45720" rtlCol="0"/>
+          <a:lstStyle>
+            <a:lvl1pPr algn="r">
+              <a:defRPr sz="1200"/>
+            </a:lvl1pPr>
+          </a:lstStyle>
+          <a:p>
+            <a:fld id="{0F89C1C7-3DCD-1040-A9CF-14679D8B5DDD}" type="datetimeFigureOut">
+              <a:rPr lang="en-US" smtClean="0"/>
+              <a:t>10/17/16</a:t>
+            </a:fld>
+            <a:endParaRPr lang="en-US"/>
+          </a:p>
+        </p:txBody>
+      </p:sp>
+      <p:sp>
+        <p:nvSpPr>
+          <p:cNvPr id="4" name="Slide Image Placeholder 3"/>
+          <p:cNvSpPr>
+            <a:spLocks noGrp="1" noRot="1" noChangeAspect="1"/>
+          </p:cNvSpPr>
+          <p:nvPr>
+            <p:ph type="sldImg" idx="2"/>
+          </p:nvPr>
+        </p:nvSpPr>
+        <p:spPr>
+          <a:xfrm>
+            <a:off x="1143000" y="685800"/>
+            <a:ext cx="4572000" cy="3429000"/>
+          </a:xfrm>
+          <a:prstGeom prst="rect">
+            <a:avLst/>
+          </a:prstGeom>
+          <a:noFill/>
+          <a:ln w="12700">
+            <a:solidFill>
+              <a:prstClr val="black"/>
+            </a:solidFill>
+          </a:ln>
+        </p:spPr>
+        <p:txBody>
+          <a:bodyPr vert="horz" lIns="91440" tIns="45720" rIns="91440" bIns="45720" rtlCol="0" anchor="ctr"/>
+          <a:lstStyle/>
+          <a:p>
+            <a:endParaRPr lang="en-US"/>
+          </a:p>
+        </p:txBody>
+      </p:sp>
+      <p:sp>
+        <p:nvSpPr>
+          <p:cNvPr id="5" name="Notes Placeholder 4"/>
+          <p:cNvSpPr>
+            <a:spLocks noGrp="1"/>
+          </p:cNvSpPr>
+          <p:nvPr>
+            <p:ph type="body" sz="quarter" idx="3"/>
+          </p:nvPr>
+        </p:nvSpPr>
+        <p:spPr>
+          <a:xfrm>
+            <a:off x="685800" y="4343400"/>
+            <a:ext cx="5486400" cy="4114800"/>
+          </a:xfrm>
+          <a:prstGeom prst="rect">
+            <a:avLst/>
+          </a:prstGeom>
+        </p:spPr>
+        <p:txBody>
+          <a:bodyPr vert="horz" lIns="91440" tIns="45720" rIns="91440" bIns="45720" rtlCol="0"/>
+          <a:lstStyle/>
+          <a:p>
+            <a:pPr lvl="0"/>
+            <a:r>
+              <a:rPr lang="en-US" smtClean="0"/>
+              <a:t>Click to edit Master text styles</a:t>
+            </a:r>
+          </a:p>
+          <a:p>
+            <a:pPr lvl="1"/>
+            <a:r>
+              <a:rPr lang="en-US" smtClean="0"/>
+              <a:t>Second level</a:t>
+            </a:r>
+          </a:p>
+          <a:p>
+            <a:pPr lvl="2"/>
+            <a:r>
+              <a:rPr lang="en-US" smtClean="0"/>
+              <a:t>Third level</a:t>
+            </a:r>
+          </a:p>
+          <a:p>
+            <a:pPr lvl="3"/>
+            <a:r>
+              <a:rPr lang="en-US" smtClean="0"/>
+              <a:t>Fourth level</a:t>
+            </a:r>
+          </a:p>
+          <a:p>
+            <a:pPr lvl="4"/>
+            <a:r>
+              <a:rPr lang="en-US" smtClean="0"/>
+              <a:t>Fifth level</a:t>
+            </a:r>
+            <a:endParaRPr lang="en-US"/>
+          </a:p>
+        </p:txBody>
+      </p:sp>
+      <p:sp>
+        <p:nvSpPr>
+          <p:cNvPr id="6" name="Footer Placeholder 5"/>
+          <p:cNvSpPr>
+            <a:spLocks noGrp="1"/>
+          </p:cNvSpPr>
+          <p:nvPr>
+            <p:ph type="ftr" sz="quarter" idx="4"/>
+          </p:nvPr>
+        </p:nvSpPr>
+        <p:spPr>
+          <a:xfrm>
+            <a:off x="0" y="8685213"/>
+            <a:ext cx="2971800" cy="457200"/>
+          </a:xfrm>
+          <a:prstGeom prst="rect">
+            <a:avLst/>
+          </a:prstGeom>
+        </p:spPr>
+        <p:txBody>
+          <a:bodyPr vert="horz" lIns="91440" tIns="45720" rIns="91440" bIns="45720" rtlCol="0" anchor="b"/>
+          <a:lstStyle>
+            <a:lvl1pPr algn="l">
+              <a:defRPr sz="1200"/>
+            </a:lvl1pPr>
+          </a:lstStyle>
+          <a:p>
+            <a:endParaRPr lang="en-US"/>
+          </a:p>
+        </p:txBody>
+      </p:sp>
+      <p:sp>
+        <p:nvSpPr>
+          <p:cNvPr id="7" name="Slide Number Placeholder 6"/>
+          <p:cNvSpPr>
+            <a:spLocks noGrp="1"/>
+          </p:cNvSpPr>
+          <p:nvPr>
+            <p:ph type="sldNum" sz="quarter" idx="5"/>
+          </p:nvPr>
+        </p:nvSpPr>
+        <p:spPr>
+          <a:xfrm>
+            <a:off x="3884613" y="8685213"/>
+            <a:ext cx="2971800" cy="457200"/>
+          </a:xfrm>
+          <a:prstGeom prst="rect">
+            <a:avLst/>
+          </a:prstGeom>
+        </p:spPr>
+        <p:txBody>
+          <a:bodyPr vert="horz" lIns="91440" tIns="45720" rIns="91440" bIns="45720" rtlCol="0" anchor="b"/>
+          <a:lstStyle>
+            <a:lvl1pPr algn="r">
+              <a:defRPr sz="1200"/>
+            </a:lvl1pPr>
+          </a:lstStyle>
+          <a:p>
+            <a:fld id="{BB5E49A5-4136-284D-997B-48E1D791AD67}" type="slidenum">
+              <a:rPr lang="en-US" smtClean="0"/>
+              <a:t>‹#›</a:t>
+            </a:fld>
+            <a:endParaRPr lang="en-US"/>
+          </a:p>
+        </p:txBody>
+      </p:sp>
+    </p:spTree>
+    <p:extLst>
+      <p:ext uri="{BB962C8B-B14F-4D97-AF65-F5344CB8AC3E}">
+        <p14:creationId xmlns:p14="http://schemas.microsoft.com/office/powerpoint/2010/main" val="2623252185"/>
+      </p:ext>
+    </p:extLst>
+  </p:cSld>
+  <p:clrMap bg1="lt1" tx1="dk1" bg2="lt2" tx2="dk2" accent1="accent1" accent2="accent2" accent3="accent3" accent4="accent4" accent5="accent5" accent6="accent6" hlink="hlink" folHlink="folHlink"/>
+  <p:notesStyle>
+    <a:lvl1pPr marL="0" algn="l" defTabSz="457200" rtl="0" eaLnBrk="1" latinLnBrk="0" hangingPunct="1">
+      <a:defRPr sz="1200" kern="1200">
+        <a:solidFill>
+          <a:schemeClr val="tx1"/>
+        </a:solidFill>
+        <a:latin typeface="+mn-lt"/>
+        <a:ea typeface="+mn-ea"/>
+        <a:cs typeface="+mn-cs"/>
+      </a:defRPr>
+    </a:lvl1pPr>
+    <a:lvl2pPr marL="457200" algn="l" defTabSz="457200" rtl="0" eaLnBrk="1" latinLnBrk="0" hangingPunct="1">
+      <a:defRPr sz="1200" kern="1200">
+        <a:solidFill>
+          <a:schemeClr val="tx1"/>
+        </a:solidFill>
+        <a:latin typeface="+mn-lt"/>
+        <a:ea typeface="+mn-ea"/>
+        <a:cs typeface="+mn-cs"/>
+      </a:defRPr>
+    </a:lvl2pPr>
+    <a:lvl3pPr marL="914400" algn="l" defTabSz="457200" rtl="0" eaLnBrk="1" latinLnBrk="0" hangingPunct="1">
+      <a:defRPr sz="1200" kern="1200">
+        <a:solidFill>
+          <a:schemeClr val="tx1"/>
+        </a:solidFill>
+        <a:latin typeface="+mn-lt"/>
+        <a:ea typeface="+mn-ea"/>
+        <a:cs typeface="+mn-cs"/>
+      </a:defRPr>
+    </a:lvl3pPr>
+    <a:lvl4pPr marL="1371600" algn="l" defTabSz="457200" rtl="0" eaLnBrk="1" latinLnBrk="0" hangingPunct="1">
+      <a:defRPr sz="1200" kern="1200">
+        <a:solidFill>
+          <a:schemeClr val="tx1"/>
+        </a:solidFill>
+        <a:latin typeface="+mn-lt"/>
+        <a:ea typeface="+mn-ea"/>
+        <a:cs typeface="+mn-cs"/>
+      </a:defRPr>
+    </a:lvl4pPr>
+    <a:lvl5pPr marL="1828800" algn="l" defTabSz="457200" rtl="0" eaLnBrk="1" latinLnBrk="0" hangingPunct="1">
+      <a:defRPr sz="1200" kern="1200">
+        <a:solidFill>
+          <a:schemeClr val="tx1"/>
+        </a:solidFill>
+        <a:latin typeface="+mn-lt"/>
+        <a:ea typeface="+mn-ea"/>
+        <a:cs typeface="+mn-cs"/>
+      </a:defRPr>
+    </a:lvl5pPr>
+    <a:lvl6pPr marL="2286000" algn="l" defTabSz="457200" rtl="0" eaLnBrk="1" latinLnBrk="0" hangingPunct="1">
+      <a:defRPr sz="1200" kern="1200">
+        <a:solidFill>
+          <a:schemeClr val="tx1"/>
+        </a:solidFill>
+        <a:latin typeface="+mn-lt"/>
+        <a:ea typeface="+mn-ea"/>
+        <a:cs typeface="+mn-cs"/>
+      </a:defRPr>
+    </a:lvl6pPr>
+    <a:lvl7pPr marL="2743200" algn="l" defTabSz="457200" rtl="0" eaLnBrk="1" latinLnBrk="0" hangingPunct="1">
+      <a:defRPr sz="1200" kern="1200">
+        <a:solidFill>
+          <a:schemeClr val="tx1"/>
+        </a:solidFill>
+        <a:latin typeface="+mn-lt"/>
+        <a:ea typeface="+mn-ea"/>
+        <a:cs typeface="+mn-cs"/>
+      </a:defRPr>
+    </a:lvl7pPr>
+    <a:lvl8pPr marL="3200400" algn="l" defTabSz="457200" rtl="0" eaLnBrk="1" latinLnBrk="0" hangingPunct="1">
+      <a:defRPr sz="1200" kern="1200">
+        <a:solidFill>
+          <a:schemeClr val="tx1"/>
+        </a:solidFill>
+        <a:latin typeface="+mn-lt"/>
+        <a:ea typeface="+mn-ea"/>
+        <a:cs typeface="+mn-cs"/>
+      </a:defRPr>
+    </a:lvl8pPr>
+    <a:lvl9pPr marL="3657600" algn="l" defTabSz="457200" rtl="0" eaLnBrk="1" latinLnBrk="0" hangingPunct="1">
+      <a:defRPr sz="1200" kern="1200">
+        <a:solidFill>
+          <a:schemeClr val="tx1"/>
+        </a:solidFill>
+        <a:latin typeface="+mn-lt"/>
+        <a:ea typeface="+mn-ea"/>
+        <a:cs typeface="+mn-cs"/>
+      </a:defRPr>
+    </a:lvl9pPr>
+  </p:notesStyle>
+</p:notesMaster>
+</file>
+
+<file path=ppt/notesSlides/notesSlide1.xml><?xml version="1.0" encoding="utf-8"?>
+<p:notes xmlns:a="http://schemas.openxmlformats.org/drawingml/2006/main" xmlns:p="http://schemas.openxmlformats.org/presentationml/2006/main" xmlns:r="http://schemas.openxmlformats.org/officeDocument/2006/relationships">
+  <p:cSld>
+    <p:spTree>
+      <p:nvGrpSpPr>
+        <p:cNvPr id="1" name=""/>
+        <p:cNvGrpSpPr/>
+        <p:nvPr/>
+      </p:nvGrpSpPr>
+      <p:grpSpPr>
+        <a:xfrm>
+          <a:off x="0" y="0"/>
+          <a:ext cx="0" cy="0"/>
+          <a:chOff x="0" y="0"/>
+          <a:chExt cx="0" cy="0"/>
+        </a:xfrm>
+      </p:grpSpPr>
+      <p:sp>
+        <p:nvSpPr>
+          <p:cNvPr id="2" name="Slide Image Placeholder 1"/>
+          <p:cNvSpPr>
+            <a:spLocks noGrp="1"/>
+          </p:cNvSpPr>
+          <p:nvPr>
+            <p:ph type="sldImg" idx="2"/>
+          </p:nvPr>
+        </p:nvSpPr>
+        <p:spPr/>
+      </p:sp>
+      <p:sp>
+        <p:nvSpPr>
+          <p:cNvPr id="3" name="Notes Placeholder 2"/>
+          <p:cNvSpPr>
+            <a:spLocks noGrp="1"/>
+          </p:cNvSpPr>
+          <p:nvPr>
+            <p:ph type="body" idx="3" sz="quarter"/>
+          </p:nvPr>
+        </p:nvSpPr>
+        <p:spPr/>
+        <p:txBody>
+          <a:bodyPr/>
+          <a:lstStyle/>
+          <a:p>
+            <a:r>
+              <a:t>[45s]</a:t>
+            </a:r>
+          </a:p>
+          <a:p>
+            <a:r>
+              <a:t>Good morning. My project asks one question: can AI-generated images replace photographs you never took, when you are reconstructing a 3D scene?</a:t>
+            </a:r>
+          </a:p>
+          <a:p>
+            <a:r>
+              <a:t>The short answer is yes, but only in a narrow window — and I spent most of the project working out where that window ends and why.</a:t>
+            </a:r>
+          </a:p>
+          <a:p>
+            <a:r>
+              <a:t>236 training runs, two scenes, and every number here is read straight out of the raw results files, not typed in by hand.</a:t>
+            </a:r>
+          </a:p>
+        </p:txBody>
+      </p:sp>
+      <p:sp>
+        <p:nvSpPr>
+          <p:cNvPr id="4" name="Slide Number Placeholder 3"/>
+          <p:cNvSpPr>
+            <a:spLocks noGrp="1"/>
+          </p:cNvSpPr>
+          <p:nvPr>
+            <p:ph type="sldNum" idx="5" sz="quarter"/>
+          </p:nvPr>
+        </p:nvSpPr>
+        <p:spPr/>
+      </p:sp>
+    </p:spTree>
+  </p:cSld>
+  <p:clrMapOvr>
+    <a:masterClrMapping/>
+  </p:clrMapOvr>
+</p:notes>
+</file>
+
+<file path=ppt/notesSlides/notesSlide10.xml><?xml version="1.0" encoding="utf-8"?>
+<p:notes xmlns:a="http://schemas.openxmlformats.org/drawingml/2006/main" xmlns:p="http://schemas.openxmlformats.org/presentationml/2006/main" xmlns:r="http://schemas.openxmlformats.org/officeDocument/2006/relationships">
+  <p:cSld>
+    <p:spTree>
+      <p:nvGrpSpPr>
+        <p:cNvPr id="1" name=""/>
+        <p:cNvGrpSpPr/>
+        <p:nvPr/>
+      </p:nvGrpSpPr>
+      <p:grpSpPr>
+        <a:xfrm>
+          <a:off x="0" y="0"/>
+          <a:ext cx="0" cy="0"/>
+          <a:chOff x="0" y="0"/>
+          <a:chExt cx="0" cy="0"/>
+        </a:xfrm>
+      </p:grpSpPr>
+      <p:sp>
+        <p:nvSpPr>
+          <p:cNvPr id="2" name="Slide Image Placeholder 1"/>
+          <p:cNvSpPr>
+            <a:spLocks noGrp="1"/>
+          </p:cNvSpPr>
+          <p:nvPr>
+            <p:ph type="sldImg" idx="2"/>
+          </p:nvPr>
+        </p:nvSpPr>
+        <p:spPr/>
+      </p:sp>
+      <p:sp>
+        <p:nvSpPr>
+          <p:cNvPr id="3" name="Notes Placeholder 2"/>
+          <p:cNvSpPr>
+            <a:spLocks noGrp="1"/>
+          </p:cNvSpPr>
+          <p:nvPr>
+            <p:ph type="body" idx="3" sz="quarter"/>
+          </p:nvPr>
+        </p:nvSpPr>
+        <p:spPr/>
+        <p:txBody>
+          <a:bodyPr/>
+          <a:lstStyle/>
+          <a:p>
+            <a:r>
+              <a:t>[55s]</a:t>
+            </a:r>
+          </a:p>
+          <a:p>
+            <a:r>
+              <a:t>First objection: maybe this is a quirk of Stable Diffusion 1.5.</a:t>
+            </a:r>
+          </a:p>
+          <a:p>
+            <a:r>
+              <a:t>So I swapped in Dreamshaper-8 — same architecture, same memory budget, but tuned for better photorealism.</a:t>
+            </a:r>
+          </a:p>
+          <a:p>
+            <a:r>
+              <a:t>It reverses in the same place. Positive at five, negative at twenty.</a:t>
+            </a:r>
+          </a:p>
+          <a:p>
+            <a:r>
+              <a:t>And here is the interesting part: the better-looking model is WORSE at every subset size. It even crosses over earlier.</a:t>
+            </a:r>
+          </a:p>
+          <a:p>
+            <a:r>
+              <a:t>A model tuned to make each image individually more convincing has no reason to be more consistent BETWEEN images. Which is the point — what a synthetic view contributes is coverage, not photorealism.</a:t>
+            </a:r>
+          </a:p>
+        </p:txBody>
+      </p:sp>
+      <p:sp>
+        <p:nvSpPr>
+          <p:cNvPr id="4" name="Slide Number Placeholder 3"/>
+          <p:cNvSpPr>
+            <a:spLocks noGrp="1"/>
+          </p:cNvSpPr>
+          <p:nvPr>
+            <p:ph type="sldNum" idx="5" sz="quarter"/>
+          </p:nvPr>
+        </p:nvSpPr>
+        <p:spPr/>
+      </p:sp>
+    </p:spTree>
+  </p:cSld>
+  <p:clrMapOvr>
+    <a:masterClrMapping/>
+  </p:clrMapOvr>
+</p:notes>
+</file>
+
+<file path=ppt/notesSlides/notesSlide11.xml><?xml version="1.0" encoding="utf-8"?>
+<p:notes xmlns:a="http://schemas.openxmlformats.org/drawingml/2006/main" xmlns:p="http://schemas.openxmlformats.org/presentationml/2006/main" xmlns:r="http://schemas.openxmlformats.org/officeDocument/2006/relationships">
+  <p:cSld>
+    <p:spTree>
+      <p:nvGrpSpPr>
+        <p:cNvPr id="1" name=""/>
+        <p:cNvGrpSpPr/>
+        <p:nvPr/>
+      </p:nvGrpSpPr>
+      <p:grpSpPr>
+        <a:xfrm>
+          <a:off x="0" y="0"/>
+          <a:ext cx="0" cy="0"/>
+          <a:chOff x="0" y="0"/>
+          <a:chExt cx="0" cy="0"/>
+        </a:xfrm>
+      </p:grpSpPr>
+      <p:sp>
+        <p:nvSpPr>
+          <p:cNvPr id="2" name="Slide Image Placeholder 1"/>
+          <p:cNvSpPr>
+            <a:spLocks noGrp="1"/>
+          </p:cNvSpPr>
+          <p:nvPr>
+            <p:ph type="sldImg" idx="2"/>
+          </p:nvPr>
+        </p:nvSpPr>
+        <p:spPr/>
+      </p:sp>
+      <p:sp>
+        <p:nvSpPr>
+          <p:cNvPr id="3" name="Notes Placeholder 2"/>
+          <p:cNvSpPr>
+            <a:spLocks noGrp="1"/>
+          </p:cNvSpPr>
+          <p:nvPr>
+            <p:ph type="body" idx="3" sz="quarter"/>
+          </p:nvPr>
+        </p:nvSpPr>
+        <p:spPr/>
+        <p:txBody>
+          <a:bodyPr/>
+          <a:lstStyle/>
+          <a:p>
+            <a:r>
+              <a:t>[70s]</a:t>
+            </a:r>
+          </a:p>
+          <a:p>
+            <a:r>
+              <a:t>Second and sharper prediction.</a:t>
+            </a:r>
+          </a:p>
+          <a:p>
+            <a:r>
+              <a:t>If the harm comes from inventing a camera, then something that helps the geometry WITHOUT inventing a camera should never turn negative.</a:t>
+            </a:r>
+          </a:p>
+          <a:p>
+            <a:r>
+              <a:t>Depth regularisation is exactly that. A depth network predicts a depth map for each real photograph, anchored to true scale against the sparse reconstruction points. No camera is invented, no pixel is fabricated.</a:t>
+            </a:r>
+          </a:p>
+          <a:p>
+            <a:r>
+              <a:t>It is positive at every subset size — including twenty, where outpainting loses 0.6.</a:t>
+            </a:r>
+          </a:p>
+          <a:p>
+            <a:r>
+              <a:t>Coverage crosses over. Constraint does not. The two differ in exactly one respect, and it is the one the theory says matters.</a:t>
+            </a:r>
+          </a:p>
+          <a:p>
+            <a:r>
+              <a:t>And they compound: together at five views they reach 0.714 dB, the best result in the study — because they repair different deficiencies.</a:t>
+            </a:r>
+          </a:p>
+        </p:txBody>
+      </p:sp>
+      <p:sp>
+        <p:nvSpPr>
+          <p:cNvPr id="4" name="Slide Number Placeholder 3"/>
+          <p:cNvSpPr>
+            <a:spLocks noGrp="1"/>
+          </p:cNvSpPr>
+          <p:nvPr>
+            <p:ph type="sldNum" idx="5" sz="quarter"/>
+          </p:nvPr>
+        </p:nvSpPr>
+        <p:spPr/>
+      </p:sp>
+    </p:spTree>
+  </p:cSld>
+  <p:clrMapOvr>
+    <a:masterClrMapping/>
+  </p:clrMapOvr>
+</p:notes>
+</file>
+
+<file path=ppt/notesSlides/notesSlide12.xml><?xml version="1.0" encoding="utf-8"?>
+<p:notes xmlns:a="http://schemas.openxmlformats.org/drawingml/2006/main" xmlns:p="http://schemas.openxmlformats.org/presentationml/2006/main" xmlns:r="http://schemas.openxmlformats.org/officeDocument/2006/relationships">
+  <p:cSld>
+    <p:spTree>
+      <p:nvGrpSpPr>
+        <p:cNvPr id="1" name=""/>
+        <p:cNvGrpSpPr/>
+        <p:nvPr/>
+      </p:nvGrpSpPr>
+      <p:grpSpPr>
+        <a:xfrm>
+          <a:off x="0" y="0"/>
+          <a:ext cx="0" cy="0"/>
+          <a:chOff x="0" y="0"/>
+          <a:chExt cx="0" cy="0"/>
+        </a:xfrm>
+      </p:grpSpPr>
+      <p:sp>
+        <p:nvSpPr>
+          <p:cNvPr id="2" name="Slide Image Placeholder 1"/>
+          <p:cNvSpPr>
+            <a:spLocks noGrp="1"/>
+          </p:cNvSpPr>
+          <p:nvPr>
+            <p:ph type="sldImg" idx="2"/>
+          </p:nvPr>
+        </p:nvSpPr>
+        <p:spPr/>
+      </p:sp>
+      <p:sp>
+        <p:nvSpPr>
+          <p:cNvPr id="3" name="Notes Placeholder 2"/>
+          <p:cNvSpPr>
+            <a:spLocks noGrp="1"/>
+          </p:cNvSpPr>
+          <p:nvPr>
+            <p:ph type="body" idx="3" sz="quarter"/>
+          </p:nvPr>
+        </p:nvSpPr>
+        <p:spPr/>
+        <p:txBody>
+          <a:bodyPr/>
+          <a:lstStyle/>
+          <a:p>
+            <a:r>
+              <a:t>[50s]</a:t>
+            </a:r>
+          </a:p>
+          <a:p>
+            <a:r>
+              <a:t>So, four things.</a:t>
+            </a:r>
+          </a:p>
+          <a:p>
+            <a:r>
+              <a:t>Augmentation is not free coverage. It helps only in the single digits.</a:t>
+            </a:r>
+          </a:p>
+          <a:p>
+            <a:r>
+              <a:t>The mechanism is pose novelty — four controls rule out image quality, hole content, warping artifacts, and mere repetition.</a:t>
+            </a:r>
+          </a:p>
+          <a:p>
+            <a:r>
+              <a:t>Constraint beats invention.</a:t>
+            </a:r>
+          </a:p>
+          <a:p>
+            <a:r>
+              <a:t>And the two are separable, which is why combining them beats either alone.</a:t>
+            </a:r>
+          </a:p>
+          <a:p>
+            <a:r>
+              <a:t>Practically: below about ten real views, use it. Above that, go and take more photographs.</a:t>
+            </a:r>
+          </a:p>
+        </p:txBody>
+      </p:sp>
+      <p:sp>
+        <p:nvSpPr>
+          <p:cNvPr id="4" name="Slide Number Placeholder 3"/>
+          <p:cNvSpPr>
+            <a:spLocks noGrp="1"/>
+          </p:cNvSpPr>
+          <p:nvPr>
+            <p:ph type="sldNum" idx="5" sz="quarter"/>
+          </p:nvPr>
+        </p:nvSpPr>
+        <p:spPr/>
+      </p:sp>
+    </p:spTree>
+  </p:cSld>
+  <p:clrMapOvr>
+    <a:masterClrMapping/>
+  </p:clrMapOvr>
+</p:notes>
+</file>
+
+<file path=ppt/notesSlides/notesSlide13.xml><?xml version="1.0" encoding="utf-8"?>
+<p:notes xmlns:a="http://schemas.openxmlformats.org/drawingml/2006/main" xmlns:p="http://schemas.openxmlformats.org/presentationml/2006/main" xmlns:r="http://schemas.openxmlformats.org/officeDocument/2006/relationships">
+  <p:cSld>
+    <p:spTree>
+      <p:nvGrpSpPr>
+        <p:cNvPr id="1" name=""/>
+        <p:cNvGrpSpPr/>
+        <p:nvPr/>
+      </p:nvGrpSpPr>
+      <p:grpSpPr>
+        <a:xfrm>
+          <a:off x="0" y="0"/>
+          <a:ext cx="0" cy="0"/>
+          <a:chOff x="0" y="0"/>
+          <a:chExt cx="0" cy="0"/>
+        </a:xfrm>
+      </p:grpSpPr>
+      <p:sp>
+        <p:nvSpPr>
+          <p:cNvPr id="2" name="Slide Image Placeholder 1"/>
+          <p:cNvSpPr>
+            <a:spLocks noGrp="1"/>
+          </p:cNvSpPr>
+          <p:nvPr>
+            <p:ph type="sldImg" idx="2"/>
+          </p:nvPr>
+        </p:nvSpPr>
+        <p:spPr/>
+      </p:sp>
+      <p:sp>
+        <p:nvSpPr>
+          <p:cNvPr id="3" name="Notes Placeholder 2"/>
+          <p:cNvSpPr>
+            <a:spLocks noGrp="1"/>
+          </p:cNvSpPr>
+          <p:nvPr>
+            <p:ph type="body" idx="3" sz="quarter"/>
+          </p:nvPr>
+        </p:nvSpPr>
+        <p:spPr/>
+        <p:txBody>
+          <a:bodyPr/>
+          <a:lstStyle/>
+          <a:p>
+            <a:r>
+              <a:t>[60s]</a:t>
+            </a:r>
+          </a:p>
+          <a:p>
+            <a:r>
+              <a:t>The honest limits.</a:t>
+            </a:r>
+          </a:p>
+          <a:p>
+            <a:r>
+              <a:t>The biggest one is training length. I train for 7,000 iterations. At 30,000 the benefit disappears entirely.</a:t>
+            </a:r>
+          </a:p>
+          <a:p>
+            <a:r>
+              <a:t>But — and this is the point — the plain baselines get WORSE at 30,000 too. With five photos, long training memorises them instead of learning the scene. So 30,000 is not better converged, it is over-trained. Early stopping is the correct setting for few-shot, and the gain is conditional on it.</a:t>
+            </a:r>
+          </a:p>
+          <a:p>
+            <a:r>
+              <a:t>Three seeds is a consistency check, not a significance test. Both diffusion checkpoints share an architecture, because SDXL and FLUX do not fit in four gigabytes.</a:t>
+            </a:r>
+          </a:p>
+        </p:txBody>
+      </p:sp>
+      <p:sp>
+        <p:nvSpPr>
+          <p:cNvPr id="4" name="Slide Number Placeholder 3"/>
+          <p:cNvSpPr>
+            <a:spLocks noGrp="1"/>
+          </p:cNvSpPr>
+          <p:nvPr>
+            <p:ph type="sldNum" idx="5" sz="quarter"/>
+          </p:nvPr>
+        </p:nvSpPr>
+        <p:spPr/>
+      </p:sp>
+    </p:spTree>
+  </p:cSld>
+  <p:clrMapOvr>
+    <a:masterClrMapping/>
+  </p:clrMapOvr>
+</p:notes>
+</file>
+
+<file path=ppt/notesSlides/notesSlide14.xml><?xml version="1.0" encoding="utf-8"?>
+<p:notes xmlns:a="http://schemas.openxmlformats.org/drawingml/2006/main" xmlns:p="http://schemas.openxmlformats.org/presentationml/2006/main" xmlns:r="http://schemas.openxmlformats.org/officeDocument/2006/relationships">
+  <p:cSld>
+    <p:spTree>
+      <p:nvGrpSpPr>
+        <p:cNvPr id="1" name=""/>
+        <p:cNvGrpSpPr/>
+        <p:nvPr/>
+      </p:nvGrpSpPr>
+      <p:grpSpPr>
+        <a:xfrm>
+          <a:off x="0" y="0"/>
+          <a:ext cx="0" cy="0"/>
+          <a:chOff x="0" y="0"/>
+          <a:chExt cx="0" cy="0"/>
+        </a:xfrm>
+      </p:grpSpPr>
+      <p:sp>
+        <p:nvSpPr>
+          <p:cNvPr id="2" name="Slide Image Placeholder 1"/>
+          <p:cNvSpPr>
+            <a:spLocks noGrp="1"/>
+          </p:cNvSpPr>
+          <p:nvPr>
+            <p:ph type="sldImg" idx="2"/>
+          </p:nvPr>
+        </p:nvSpPr>
+        <p:spPr/>
+      </p:sp>
+      <p:sp>
+        <p:nvSpPr>
+          <p:cNvPr id="3" name="Notes Placeholder 2"/>
+          <p:cNvSpPr>
+            <a:spLocks noGrp="1"/>
+          </p:cNvSpPr>
+          <p:nvPr>
+            <p:ph type="body" idx="3" sz="quarter"/>
+          </p:nvPr>
+        </p:nvSpPr>
+        <p:spPr/>
+        <p:txBody>
+          <a:bodyPr/>
+          <a:lstStyle/>
+          <a:p>
+            <a:r>
+              <a:t>[35s]</a:t>
+            </a:r>
+          </a:p>
+          <a:p>
+            <a:r>
+              <a:t>To close.</a:t>
+            </a:r>
+          </a:p>
+          <a:p>
+            <a:r>
+              <a:t>Augmentation buys coverage and pays for it in consistency. Whether that trade is worth taking depends entirely on how scarce your real photographs are.</a:t>
+            </a:r>
+          </a:p>
+          <a:p>
+            <a:r>
+              <a:t>At five views, worth it. By twenty, the same treatment is actively harmful.</a:t>
+            </a:r>
+          </a:p>
+          <a:p>
+            <a:r>
+              <a:t>Thank you — happy to take questions.</a:t>
+            </a:r>
+          </a:p>
+        </p:txBody>
+      </p:sp>
+      <p:sp>
+        <p:nvSpPr>
+          <p:cNvPr id="4" name="Slide Number Placeholder 3"/>
+          <p:cNvSpPr>
+            <a:spLocks noGrp="1"/>
+          </p:cNvSpPr>
+          <p:nvPr>
+            <p:ph type="sldNum" idx="5" sz="quarter"/>
+          </p:nvPr>
+        </p:nvSpPr>
+        <p:spPr/>
+      </p:sp>
+    </p:spTree>
+  </p:cSld>
+  <p:clrMapOvr>
+    <a:masterClrMapping/>
+  </p:clrMapOvr>
+</p:notes>
+</file>
+
+<file path=ppt/notesSlides/notesSlide2.xml><?xml version="1.0" encoding="utf-8"?>
+<p:notes xmlns:a="http://schemas.openxmlformats.org/drawingml/2006/main" xmlns:p="http://schemas.openxmlformats.org/presentationml/2006/main" xmlns:r="http://schemas.openxmlformats.org/officeDocument/2006/relationships">
+  <p:cSld>
+    <p:spTree>
+      <p:nvGrpSpPr>
+        <p:cNvPr id="1" name=""/>
+        <p:cNvGrpSpPr/>
+        <p:nvPr/>
+      </p:nvGrpSpPr>
+      <p:grpSpPr>
+        <a:xfrm>
+          <a:off x="0" y="0"/>
+          <a:ext cx="0" cy="0"/>
+          <a:chOff x="0" y="0"/>
+          <a:chExt cx="0" cy="0"/>
+        </a:xfrm>
+      </p:grpSpPr>
+      <p:sp>
+        <p:nvSpPr>
+          <p:cNvPr id="2" name="Slide Image Placeholder 1"/>
+          <p:cNvSpPr>
+            <a:spLocks noGrp="1"/>
+          </p:cNvSpPr>
+          <p:nvPr>
+            <p:ph type="sldImg" idx="2"/>
+          </p:nvPr>
+        </p:nvSpPr>
+        <p:spPr/>
+      </p:sp>
+      <p:sp>
+        <p:nvSpPr>
+          <p:cNvPr id="3" name="Notes Placeholder 2"/>
+          <p:cNvSpPr>
+            <a:spLocks noGrp="1"/>
+          </p:cNvSpPr>
+          <p:nvPr>
+            <p:ph type="body" idx="3" sz="quarter"/>
+          </p:nvPr>
+        </p:nvSpPr>
+        <p:spPr/>
+        <p:txBody>
+          <a:bodyPr/>
+          <a:lstStyle/>
+          <a:p>
+            <a:r>
+              <a:t>[60s]</a:t>
+            </a:r>
+          </a:p>
+          <a:p>
+            <a:r>
+              <a:t>Gaussian Splatting reconstructs a 3D scene from photographs. Given enough of them it is excellent — 25.2 dB on this outdoor scene from 219 photos.</a:t>
+            </a:r>
+          </a:p>
+          <a:p>
+            <a:r>
+              <a:t>Cut it to five photos and it collapses to 15.2. That is a ten decibel gap.</a:t>
+            </a:r>
+          </a:p>
+          <a:p>
+            <a:r>
+              <a:t>Photographs are expensive to collect. A diffusion model generates images for free. So the question is whether free images can buy back that gap.</a:t>
+            </a:r>
+          </a:p>
+        </p:txBody>
+      </p:sp>
+      <p:sp>
+        <p:nvSpPr>
+          <p:cNvPr id="4" name="Slide Number Placeholder 3"/>
+          <p:cNvSpPr>
+            <a:spLocks noGrp="1"/>
+          </p:cNvSpPr>
+          <p:nvPr>
+            <p:ph type="sldNum" idx="5" sz="quarter"/>
+          </p:nvPr>
+        </p:nvSpPr>
+        <p:spPr/>
+      </p:sp>
+    </p:spTree>
+  </p:cSld>
+  <p:clrMapOvr>
+    <a:masterClrMapping/>
+  </p:clrMapOvr>
+</p:notes>
+</file>
+
+<file path=ppt/notesSlides/notesSlide3.xml><?xml version="1.0" encoding="utf-8"?>
+<p:notes xmlns:a="http://schemas.openxmlformats.org/drawingml/2006/main" xmlns:p="http://schemas.openxmlformats.org/presentationml/2006/main" xmlns:r="http://schemas.openxmlformats.org/officeDocument/2006/relationships">
+  <p:cSld>
+    <p:spTree>
+      <p:nvGrpSpPr>
+        <p:cNvPr id="1" name=""/>
+        <p:cNvGrpSpPr/>
+        <p:nvPr/>
+      </p:nvGrpSpPr>
+      <p:grpSpPr>
+        <a:xfrm>
+          <a:off x="0" y="0"/>
+          <a:ext cx="0" cy="0"/>
+          <a:chOff x="0" y="0"/>
+          <a:chExt cx="0" cy="0"/>
+        </a:xfrm>
+      </p:grpSpPr>
+      <p:sp>
+        <p:nvSpPr>
+          <p:cNvPr id="2" name="Slide Image Placeholder 1"/>
+          <p:cNvSpPr>
+            <a:spLocks noGrp="1"/>
+          </p:cNvSpPr>
+          <p:nvPr>
+            <p:ph type="sldImg" idx="2"/>
+          </p:nvPr>
+        </p:nvSpPr>
+        <p:spPr/>
+      </p:sp>
+      <p:sp>
+        <p:nvSpPr>
+          <p:cNvPr id="3" name="Notes Placeholder 2"/>
+          <p:cNvSpPr>
+            <a:spLocks noGrp="1"/>
+          </p:cNvSpPr>
+          <p:nvPr>
+            <p:ph type="body" idx="3" sz="quarter"/>
+          </p:nvPr>
+        </p:nvSpPr>
+        <p:spPr/>
+        <p:txBody>
+          <a:bodyPr/>
+          <a:lstStyle/>
+          <a:p>
+            <a:r>
+              <a:t>[40s]</a:t>
+            </a:r>
+          </a:p>
+          <a:p>
+            <a:r>
+              <a:t>This is the same held-out camera reconstructed from 5, 10, 20 and 219 photos.</a:t>
+            </a:r>
+          </a:p>
+          <a:p>
+            <a:r>
+              <a:t>The important thing is what fails at five views. The shape of the truck is broadly right. What costs the ten decibels is the haze, the floaters, and the surfaces the optimiser had no second view to pin down.</a:t>
+            </a:r>
+          </a:p>
+          <a:p>
+            <a:r>
+              <a:t>So the deficit is coverage, not detail. That matters later.</a:t>
+            </a:r>
+          </a:p>
+        </p:txBody>
+      </p:sp>
+      <p:sp>
+        <p:nvSpPr>
+          <p:cNvPr id="4" name="Slide Number Placeholder 3"/>
+          <p:cNvSpPr>
+            <a:spLocks noGrp="1"/>
+          </p:cNvSpPr>
+          <p:nvPr>
+            <p:ph type="sldNum" idx="5" sz="quarter"/>
+          </p:nvPr>
+        </p:nvSpPr>
+        <p:spPr/>
+      </p:sp>
+    </p:spTree>
+  </p:cSld>
+  <p:clrMapOvr>
+    <a:masterClrMapping/>
+  </p:clrMapOvr>
+</p:notes>
+</file>
+
+<file path=ppt/notesSlides/notesSlide4.xml><?xml version="1.0" encoding="utf-8"?>
+<p:notes xmlns:a="http://schemas.openxmlformats.org/drawingml/2006/main" xmlns:p="http://schemas.openxmlformats.org/presentationml/2006/main" xmlns:r="http://schemas.openxmlformats.org/officeDocument/2006/relationships">
+  <p:cSld>
+    <p:spTree>
+      <p:nvGrpSpPr>
+        <p:cNvPr id="1" name=""/>
+        <p:cNvGrpSpPr/>
+        <p:nvPr/>
+      </p:nvGrpSpPr>
+      <p:grpSpPr>
+        <a:xfrm>
+          <a:off x="0" y="0"/>
+          <a:ext cx="0" cy="0"/>
+          <a:chOff x="0" y="0"/>
+          <a:chExt cx="0" cy="0"/>
+        </a:xfrm>
+      </p:grpSpPr>
+      <p:sp>
+        <p:nvSpPr>
+          <p:cNvPr id="2" name="Slide Image Placeholder 1"/>
+          <p:cNvSpPr>
+            <a:spLocks noGrp="1"/>
+          </p:cNvSpPr>
+          <p:nvPr>
+            <p:ph type="sldImg" idx="2"/>
+          </p:nvPr>
+        </p:nvSpPr>
+        <p:spPr/>
+      </p:sp>
+      <p:sp>
+        <p:nvSpPr>
+          <p:cNvPr id="3" name="Notes Placeholder 2"/>
+          <p:cNvSpPr>
+            <a:spLocks noGrp="1"/>
+          </p:cNvSpPr>
+          <p:nvPr>
+            <p:ph type="body" idx="3" sz="quarter"/>
+          </p:nvPr>
+        </p:nvSpPr>
+        <p:spPr/>
+        <p:txBody>
+          <a:bodyPr/>
+          <a:lstStyle/>
+          <a:p>
+            <a:r>
+              <a:t>[60s]</a:t>
+            </a:r>
+          </a:p>
+          <a:p>
+            <a:r>
+              <a:t>I tested three strategies.</a:t>
+            </a:r>
+          </a:p>
+          <a:p>
+            <a:r>
+              <a:t>Inpainting masks part of a real photo and refills it. Same camera, same framing — no new geometry at all. It is the control, really.</a:t>
+            </a:r>
+          </a:p>
+          <a:p>
+            <a:r>
+              <a:t>Outpainting keeps the lens and enlarges the frame. The camera does not move; it just sees wider. That supplies peripheral content.</a:t>
+            </a:r>
+          </a:p>
+          <a:p>
+            <a:r>
+              <a:t>Pose-guided is the ambitious one. Estimate depth, warp the image to a new camera position I choose, and let diffusion fill the holes. It is the only one that invents a genuinely new viewpoint.</a:t>
+            </a:r>
+          </a:p>
+          <a:p>
+            <a:r>
+              <a:t>Each is generated at four ratios, three subset sizes, three seeds.</a:t>
+            </a:r>
+          </a:p>
+        </p:txBody>
+      </p:sp>
+      <p:sp>
+        <p:nvSpPr>
+          <p:cNvPr id="4" name="Slide Number Placeholder 3"/>
+          <p:cNvSpPr>
+            <a:spLocks noGrp="1"/>
+          </p:cNvSpPr>
+          <p:nvPr>
+            <p:ph type="sldNum" idx="5" sz="quarter"/>
+          </p:nvPr>
+        </p:nvSpPr>
+        <p:spPr/>
+      </p:sp>
+    </p:spTree>
+  </p:cSld>
+  <p:clrMapOvr>
+    <a:masterClrMapping/>
+  </p:clrMapOvr>
+</p:notes>
+</file>
+
+<file path=ppt/notesSlides/notesSlide5.xml><?xml version="1.0" encoding="utf-8"?>
+<p:notes xmlns:a="http://schemas.openxmlformats.org/drawingml/2006/main" xmlns:p="http://schemas.openxmlformats.org/presentationml/2006/main" xmlns:r="http://schemas.openxmlformats.org/officeDocument/2006/relationships">
+  <p:cSld>
+    <p:spTree>
+      <p:nvGrpSpPr>
+        <p:cNvPr id="1" name=""/>
+        <p:cNvGrpSpPr/>
+        <p:nvPr/>
+      </p:nvGrpSpPr>
+      <p:grpSpPr>
+        <a:xfrm>
+          <a:off x="0" y="0"/>
+          <a:ext cx="0" cy="0"/>
+          <a:chOff x="0" y="0"/>
+          <a:chExt cx="0" cy="0"/>
+        </a:xfrm>
+      </p:grpSpPr>
+      <p:sp>
+        <p:nvSpPr>
+          <p:cNvPr id="2" name="Slide Image Placeholder 1"/>
+          <p:cNvSpPr>
+            <a:spLocks noGrp="1"/>
+          </p:cNvSpPr>
+          <p:nvPr>
+            <p:ph type="sldImg" idx="2"/>
+          </p:nvPr>
+        </p:nvSpPr>
+        <p:spPr/>
+      </p:sp>
+      <p:sp>
+        <p:nvSpPr>
+          <p:cNvPr id="3" name="Notes Placeholder 2"/>
+          <p:cNvSpPr>
+            <a:spLocks noGrp="1"/>
+          </p:cNvSpPr>
+          <p:nvPr>
+            <p:ph type="body" idx="3" sz="quarter"/>
+          </p:nvPr>
+        </p:nvSpPr>
+        <p:spPr/>
+        <p:txBody>
+          <a:bodyPr/>
+          <a:lstStyle/>
+          <a:p>
+            <a:r>
+              <a:t>[55s]</a:t>
+            </a:r>
+          </a:p>
+          <a:p>
+            <a:r>
+              <a:t>The effects here are small, so the measurement has to be careful.</a:t>
+            </a:r>
+          </a:p>
+          <a:p>
+            <a:r>
+              <a:t>Every run of a scene is scored against byte-identical held-out images — I verify that by hash across all 236 runs.</a:t>
+            </a:r>
+          </a:p>
+          <a:p>
+            <a:r>
+              <a:t>Every augmented run is compared against its own seed's baseline. Which five photos you happen to draw matters enormously, and pairing cancels it.</a:t>
+            </a:r>
+          </a:p>
+          <a:p>
+            <a:r>
+              <a:t>And I measured the noise floor: the identical configuration run three times varies by 0.039 dB. So a 0.2 dB effect is real and a 0.03 dB effect is not.</a:t>
+            </a:r>
+          </a:p>
+        </p:txBody>
+      </p:sp>
+      <p:sp>
+        <p:nvSpPr>
+          <p:cNvPr id="4" name="Slide Number Placeholder 3"/>
+          <p:cNvSpPr>
+            <a:spLocks noGrp="1"/>
+          </p:cNvSpPr>
+          <p:nvPr>
+            <p:ph type="sldNum" idx="5" sz="quarter"/>
+          </p:nvPr>
+        </p:nvSpPr>
+        <p:spPr/>
+      </p:sp>
+    </p:spTree>
+  </p:cSld>
+  <p:clrMapOvr>
+    <a:masterClrMapping/>
+  </p:clrMapOvr>
+</p:notes>
+</file>
+
+<file path=ppt/notesSlides/notesSlide6.xml><?xml version="1.0" encoding="utf-8"?>
+<p:notes xmlns:a="http://schemas.openxmlformats.org/drawingml/2006/main" xmlns:p="http://schemas.openxmlformats.org/presentationml/2006/main" xmlns:r="http://schemas.openxmlformats.org/officeDocument/2006/relationships">
+  <p:cSld>
+    <p:spTree>
+      <p:nvGrpSpPr>
+        <p:cNvPr id="1" name=""/>
+        <p:cNvGrpSpPr/>
+        <p:nvPr/>
+      </p:nvGrpSpPr>
+      <p:grpSpPr>
+        <a:xfrm>
+          <a:off x="0" y="0"/>
+          <a:ext cx="0" cy="0"/>
+          <a:chOff x="0" y="0"/>
+          <a:chExt cx="0" cy="0"/>
+        </a:xfrm>
+      </p:grpSpPr>
+      <p:sp>
+        <p:nvSpPr>
+          <p:cNvPr id="2" name="Slide Image Placeholder 1"/>
+          <p:cNvSpPr>
+            <a:spLocks noGrp="1"/>
+          </p:cNvSpPr>
+          <p:nvPr>
+            <p:ph type="sldImg" idx="2"/>
+          </p:nvPr>
+        </p:nvSpPr>
+        <p:spPr/>
+      </p:sp>
+      <p:sp>
+        <p:nvSpPr>
+          <p:cNvPr id="3" name="Notes Placeholder 2"/>
+          <p:cNvSpPr>
+            <a:spLocks noGrp="1"/>
+          </p:cNvSpPr>
+          <p:nvPr>
+            <p:ph type="body" idx="3" sz="quarter"/>
+          </p:nvPr>
+        </p:nvSpPr>
+        <p:spPr/>
+        <p:txBody>
+          <a:bodyPr/>
+          <a:lstStyle/>
+          <a:p>
+            <a:r>
+              <a:t>[75s]</a:t>
+            </a:r>
+          </a:p>
+          <a:p>
+            <a:r>
+              <a:t>This is the main result.</a:t>
+            </a:r>
+          </a:p>
+          <a:p>
+            <a:r>
+              <a:t>Outpainting at the 200 percent ratio. At five real views it gains 0.285 dB. At ten it is zero. At twenty it LOSES 0.618.</a:t>
+            </a:r>
+          </a:p>
+          <a:p>
+            <a:r>
+              <a:t>The treatment is identical. The only thing that changed is how many real photographs it was added to.</a:t>
+            </a:r>
+          </a:p>
+          <a:p>
+            <a:r>
+              <a:t>PAUSE HERE. Let them look at the sign change.</a:t>
+            </a:r>
+          </a:p>
+          <a:p>
+            <a:r>
+              <a:t>For scale: five more real photographs are worth 1.9 dB. Augmentation buys you about a seventh of one photograph, and only while photographs are scarce.</a:t>
+            </a:r>
+          </a:p>
+        </p:txBody>
+      </p:sp>
+      <p:sp>
+        <p:nvSpPr>
+          <p:cNvPr id="4" name="Slide Number Placeholder 3"/>
+          <p:cNvSpPr>
+            <a:spLocks noGrp="1"/>
+          </p:cNvSpPr>
+          <p:nvPr>
+            <p:ph type="sldNum" idx="5" sz="quarter"/>
+          </p:nvPr>
+        </p:nvSpPr>
+        <p:spPr/>
+      </p:sp>
+    </p:spTree>
+  </p:cSld>
+  <p:clrMapOvr>
+    <a:masterClrMapping/>
+  </p:clrMapOvr>
+</p:notes>
+</file>
+
+<file path=ppt/notesSlides/notesSlide7.xml><?xml version="1.0" encoding="utf-8"?>
+<p:notes xmlns:a="http://schemas.openxmlformats.org/drawingml/2006/main" xmlns:p="http://schemas.openxmlformats.org/presentationml/2006/main" xmlns:r="http://schemas.openxmlformats.org/officeDocument/2006/relationships">
+  <p:cSld>
+    <p:spTree>
+      <p:nvGrpSpPr>
+        <p:cNvPr id="1" name=""/>
+        <p:cNvGrpSpPr/>
+        <p:nvPr/>
+      </p:nvGrpSpPr>
+      <p:grpSpPr>
+        <a:xfrm>
+          <a:off x="0" y="0"/>
+          <a:ext cx="0" cy="0"/>
+          <a:chOff x="0" y="0"/>
+          <a:chExt cx="0" cy="0"/>
+        </a:xfrm>
+      </p:grpSpPr>
+      <p:sp>
+        <p:nvSpPr>
+          <p:cNvPr id="2" name="Slide Image Placeholder 1"/>
+          <p:cNvSpPr>
+            <a:spLocks noGrp="1"/>
+          </p:cNvSpPr>
+          <p:nvPr>
+            <p:ph type="sldImg" idx="2"/>
+          </p:nvPr>
+        </p:nvSpPr>
+        <p:spPr/>
+      </p:sp>
+      <p:sp>
+        <p:nvSpPr>
+          <p:cNvPr id="3" name="Notes Placeholder 2"/>
+          <p:cNvSpPr>
+            <a:spLocks noGrp="1"/>
+          </p:cNvSpPr>
+          <p:nvPr>
+            <p:ph type="body" idx="3" sz="quarter"/>
+          </p:nvPr>
+        </p:nvSpPr>
+        <p:spPr/>
+        <p:txBody>
+          <a:bodyPr/>
+          <a:lstStyle/>
+          <a:p>
+            <a:r>
+              <a:t>[40s]</a:t>
+            </a:r>
+          </a:p>
+          <a:p>
+            <a:r>
+              <a:t>The same thing visually. Left pair is five views, right pair is twenty.</a:t>
+            </a:r>
+          </a:p>
+          <a:p>
+            <a:r>
+              <a:t>One caution on this figure: per-view effects scatter several dB either side of the average. So I picked the views closest to the mean effect and printed the per-view number on each. Three arbitrary views can contradict the finding they are supposed to illustrate.</a:t>
+            </a:r>
+          </a:p>
+        </p:txBody>
+      </p:sp>
+      <p:sp>
+        <p:nvSpPr>
+          <p:cNvPr id="4" name="Slide Number Placeholder 3"/>
+          <p:cNvSpPr>
+            <a:spLocks noGrp="1"/>
+          </p:cNvSpPr>
+          <p:nvPr>
+            <p:ph type="sldNum" idx="5" sz="quarter"/>
+          </p:nvPr>
+        </p:nvSpPr>
+        <p:spPr/>
+      </p:sp>
+    </p:spTree>
+  </p:cSld>
+  <p:clrMapOvr>
+    <a:masterClrMapping/>
+  </p:clrMapOvr>
+</p:notes>
+</file>
+
+<file path=ppt/notesSlides/notesSlide8.xml><?xml version="1.0" encoding="utf-8"?>
+<p:notes xmlns:a="http://schemas.openxmlformats.org/drawingml/2006/main" xmlns:p="http://schemas.openxmlformats.org/presentationml/2006/main" xmlns:r="http://schemas.openxmlformats.org/officeDocument/2006/relationships">
+  <p:cSld>
+    <p:spTree>
+      <p:nvGrpSpPr>
+        <p:cNvPr id="1" name=""/>
+        <p:cNvGrpSpPr/>
+        <p:nvPr/>
+      </p:nvGrpSpPr>
+      <p:grpSpPr>
+        <a:xfrm>
+          <a:off x="0" y="0"/>
+          <a:ext cx="0" cy="0"/>
+          <a:chOff x="0" y="0"/>
+          <a:chExt cx="0" cy="0"/>
+        </a:xfrm>
+      </p:grpSpPr>
+      <p:sp>
+        <p:nvSpPr>
+          <p:cNvPr id="2" name="Slide Image Placeholder 1"/>
+          <p:cNvSpPr>
+            <a:spLocks noGrp="1"/>
+          </p:cNvSpPr>
+          <p:nvPr>
+            <p:ph type="sldImg" idx="2"/>
+          </p:nvPr>
+        </p:nvSpPr>
+        <p:spPr/>
+      </p:sp>
+      <p:sp>
+        <p:nvSpPr>
+          <p:cNvPr id="3" name="Notes Placeholder 2"/>
+          <p:cNvSpPr>
+            <a:spLocks noGrp="1"/>
+          </p:cNvSpPr>
+          <p:nvPr>
+            <p:ph type="body" idx="3" sz="quarter"/>
+          </p:nvPr>
+        </p:nvSpPr>
+        <p:spPr/>
+        <p:txBody>
+          <a:bodyPr/>
+          <a:lstStyle/>
+          <a:p>
+            <a:r>
+              <a:t>[45s]</a:t>
+            </a:r>
+          </a:p>
+          <a:p>
+            <a:r>
+              <a:t>The obvious worry is that this is one scene's quirk. So I repeated the sweep on an indoor room from a different dataset — different capture geometry, different scale.</a:t>
+            </a:r>
+          </a:p>
+          <a:p>
+            <a:r>
+              <a:t>Same sign flip. And indoors the effect is stronger at five views.</a:t>
+            </a:r>
+          </a:p>
+          <a:p>
+            <a:r>
+              <a:t>Note the third number: the baselines scatter 0.52 dB between seeds indoors, against 0.07 outdoors. Which five views you draw matters far more in a room. Without the paired design I could not have resolved the effect at all.</a:t>
+            </a:r>
+          </a:p>
+        </p:txBody>
+      </p:sp>
+      <p:sp>
+        <p:nvSpPr>
+          <p:cNvPr id="4" name="Slide Number Placeholder 3"/>
+          <p:cNvSpPr>
+            <a:spLocks noGrp="1"/>
+          </p:cNvSpPr>
+          <p:nvPr>
+            <p:ph type="sldNum" idx="5" sz="quarter"/>
+          </p:nvPr>
+        </p:nvSpPr>
+        <p:spPr/>
+      </p:sp>
+    </p:spTree>
+  </p:cSld>
+  <p:clrMapOvr>
+    <a:masterClrMapping/>
+  </p:clrMapOvr>
+</p:notes>
+</file>
+
+<file path=ppt/notesSlides/notesSlide9.xml><?xml version="1.0" encoding="utf-8"?>
+<p:notes xmlns:a="http://schemas.openxmlformats.org/drawingml/2006/main" xmlns:p="http://schemas.openxmlformats.org/presentationml/2006/main" xmlns:r="http://schemas.openxmlformats.org/officeDocument/2006/relationships">
+  <p:cSld>
+    <p:spTree>
+      <p:nvGrpSpPr>
+        <p:cNvPr id="1" name=""/>
+        <p:cNvGrpSpPr/>
+        <p:nvPr/>
+      </p:nvGrpSpPr>
+      <p:grpSpPr>
+        <a:xfrm>
+          <a:off x="0" y="0"/>
+          <a:ext cx="0" cy="0"/>
+          <a:chOff x="0" y="0"/>
+          <a:chExt cx="0" cy="0"/>
+        </a:xfrm>
+      </p:grpSpPr>
+      <p:sp>
+        <p:nvSpPr>
+          <p:cNvPr id="2" name="Slide Image Placeholder 1"/>
+          <p:cNvSpPr>
+            <a:spLocks noGrp="1"/>
+          </p:cNvSpPr>
+          <p:nvPr>
+            <p:ph type="sldImg" idx="2"/>
+          </p:nvPr>
+        </p:nvSpPr>
+        <p:spPr/>
+      </p:sp>
+      <p:sp>
+        <p:nvSpPr>
+          <p:cNvPr id="3" name="Notes Placeholder 2"/>
+          <p:cNvSpPr>
+            <a:spLocks noGrp="1"/>
+          </p:cNvSpPr>
+          <p:nvPr>
+            <p:ph type="body" idx="3" sz="quarter"/>
+          </p:nvPr>
+        </p:nvSpPr>
+        <p:spPr/>
+        <p:txBody>
+          <a:bodyPr/>
+          <a:lstStyle/>
+          <a:p>
+            <a:r>
+              <a:t>[65s]</a:t>
+            </a:r>
+          </a:p>
+          <a:p>
+            <a:r>
+              <a:t>Here is why the sign flips.</a:t>
+            </a:r>
+          </a:p>
+          <a:p>
+            <a:r>
+              <a:t>Every synthetic view gives you two things at once. Coverage — some part of the scene no real camera saw. And inconsistency — it is invented, so it disagrees with the real photographs.</a:t>
+            </a:r>
+          </a:p>
+          <a:p>
+            <a:r>
+              <a:t>Coverage DECAYS as you add real views. You have already seen that area.</a:t>
+            </a:r>
+          </a:p>
+          <a:p>
+            <a:r>
+              <a:t>Inconsistency does NOT decay. A contradiction is just as harmful at twenty views as at five. Arguably worse, because now it contradicts a better-determined geometry.</a:t>
+            </a:r>
+          </a:p>
+          <a:p>
+            <a:r>
+              <a:t>A shrinking benefit plus a constant cost gives you a sign change. That is the whole mechanism.</a:t>
+            </a:r>
+          </a:p>
+          <a:p>
+            <a:r>
+              <a:t>But that is just a story. So I made it predict things that could fail.</a:t>
+            </a:r>
+          </a:p>
+        </p:txBody>
+      </p:sp>
+      <p:sp>
+        <p:nvSpPr>
+          <p:cNvPr id="4" name="Slide Number Placeholder 3"/>
+          <p:cNvSpPr>
+            <a:spLocks noGrp="1"/>
+          </p:cNvSpPr>
+          <p:nvPr>
+            <p:ph type="sldNum" idx="5" sz="quarter"/>
+          </p:nvPr>
+        </p:nvSpPr>
+        <p:spPr/>
+      </p:sp>
+    </p:spTree>
+  </p:cSld>
+  <p:clrMapOvr>
+    <a:masterClrMapping/>
+  </p:clrMapOvr>
+</p:notes>
 </file>
 
 <file path=ppt/slideLayouts/slideLayout1.xml><?xml version="1.0" encoding="utf-8"?>
@@ -7075,4 +8700,324 @@
   </a:objectDefaults>
   <a:extraClrSchemeLst/>
 </a:theme>
+</file>
+
+<file path=ppt/theme/theme2.xml><?xml version="1.0" encoding="utf-8"?>
+<a:theme xmlns:a="http://schemas.openxmlformats.org/drawingml/2006/main" name="Office Theme">
+  <a:themeElements>
+    <a:clrScheme name="Office">
+      <a:dk1>
+        <a:sysClr val="windowText" lastClr="000000"/>
+      </a:dk1>
+      <a:lt1>
+        <a:sysClr val="window" lastClr="FFFFFF"/>
+      </a:lt1>
+      <a:dk2>
+        <a:srgbClr val="1F497D"/>
+      </a:dk2>
+      <a:lt2>
+        <a:srgbClr val="EEECE1"/>
+      </a:lt2>
+      <a:accent1>
+        <a:srgbClr val="4F81BD"/>
+      </a:accent1>
+      <a:accent2>
+        <a:srgbClr val="C0504D"/>
+      </a:accent2>
+      <a:accent3>
+        <a:srgbClr val="9BBB59"/>
+      </a:accent3>
+      <a:accent4>
+        <a:srgbClr val="8064A2"/>
+      </a:accent4>
+      <a:accent5>
+        <a:srgbClr val="4BACC6"/>
+      </a:accent5>
+      <a:accent6>
+        <a:srgbClr val="F79646"/>
+      </a:accent6>
+      <a:hlink>
+        <a:srgbClr val="0000FF"/>
+      </a:hlink>
+      <a:folHlink>
+        <a:srgbClr val="800080"/>
+      </a:folHlink>
+    </a:clrScheme>
+    <a:fontScheme name="Office">
+      <a:majorFont>
+        <a:latin typeface="Calibri"/>
+        <a:ea typeface=""/>
+        <a:cs typeface=""/>
+        <a:font script="Jpan" typeface="ＭＳ Ｐゴシック"/>
+        <a:font script="Hang" typeface="맑은 고딕"/>
+        <a:font script="Hans" typeface="宋体"/>
+        <a:font script="Hant" typeface="新細明體"/>
+        <a:font script="Arab" typeface="Times New Roman"/>
+        <a:font script="Hebr" typeface="Times New Roman"/>
+        <a:font script="Thai" typeface="Angsana New"/>
+        <a:font script="Ethi" typeface="Nyala"/>
+        <a:font script="Beng" typeface="Vrinda"/>
+        <a:font script="Gujr" typeface="Shruti"/>
+        <a:font script="Khmr" typeface="MoolBoran"/>
+        <a:font script="Knda" typeface="Tunga"/>
+        <a:font script="Guru" typeface="Raavi"/>
+        <a:font script="Cans" typeface="Euphemia"/>
+        <a:font script="Cher" typeface="Plantagenet Cherokee"/>
+        <a:font script="Yiii" typeface="Microsoft Yi Baiti"/>
+        <a:font script="Tibt" typeface="Microsoft Himalaya"/>
+        <a:font script="Thaa" typeface="MV Boli"/>
+        <a:font script="Deva" typeface="Mangal"/>
+        <a:font script="Telu" typeface="Gautami"/>
+        <a:font script="Taml" typeface="Latha"/>
+        <a:font script="Syrc" typeface="Estrangelo Edessa"/>
+        <a:font script="Orya" typeface="Kalinga"/>
+        <a:font script="Mlym" typeface="Kartika"/>
+        <a:font script="Laoo" typeface="DokChampa"/>
+        <a:font script="Sinh" typeface="Iskoola Pota"/>
+        <a:font script="Mong" typeface="Mongolian Baiti"/>
+        <a:font script="Viet" typeface="Times New Roman"/>
+        <a:font script="Uigh" typeface="Microsoft Uighur"/>
+        <a:font script="Geor" typeface="Sylfaen"/>
+      </a:majorFont>
+      <a:minorFont>
+        <a:latin typeface="Calibri"/>
+        <a:ea typeface=""/>
+        <a:cs typeface=""/>
+        <a:font script="Jpan" typeface="ＭＳ Ｐゴシック"/>
+        <a:font script="Hang" typeface="맑은 고딕"/>
+        <a:font script="Hans" typeface="宋体"/>
+        <a:font script="Hant" typeface="新細明體"/>
+        <a:font script="Arab" typeface="Arial"/>
+        <a:font script="Hebr" typeface="Arial"/>
+        <a:font script="Thai" typeface="Cordia New"/>
+        <a:font script="Ethi" typeface="Nyala"/>
+        <a:font script="Beng" typeface="Vrinda"/>
+        <a:font script="Gujr" typeface="Shruti"/>
+        <a:font script="Khmr" typeface="DaunPenh"/>
+        <a:font script="Knda" typeface="Tunga"/>
+        <a:font script="Guru" typeface="Raavi"/>
+        <a:font script="Cans" typeface="Euphemia"/>
+        <a:font script="Cher" typeface="Plantagenet Cherokee"/>
+        <a:font script="Yiii" typeface="Microsoft Yi Baiti"/>
+        <a:font script="Tibt" typeface="Microsoft Himalaya"/>
+        <a:font script="Thaa" typeface="MV Boli"/>
+        <a:font script="Deva" typeface="Mangal"/>
+        <a:font script="Telu" typeface="Gautami"/>
+        <a:font script="Taml" typeface="Latha"/>
+        <a:font script="Syrc" typeface="Estrangelo Edessa"/>
+        <a:font script="Orya" typeface="Kalinga"/>
+        <a:font script="Mlym" typeface="Kartika"/>
+        <a:font script="Laoo" typeface="DokChampa"/>
+        <a:font script="Sinh" typeface="Iskoola Pota"/>
+        <a:font script="Mong" typeface="Mongolian Baiti"/>
+        <a:font script="Viet" typeface="Arial"/>
+        <a:font script="Uigh" typeface="Microsoft Uighur"/>
+        <a:font script="Geor" typeface="Sylfaen"/>
+      </a:minorFont>
+    </a:fontScheme>
+    <a:fmtScheme name="Office">
+      <a:fillStyleLst>
+        <a:solidFill>
+          <a:schemeClr val="phClr"/>
+        </a:solidFill>
+        <a:gradFill rotWithShape="1">
+          <a:gsLst>
+            <a:gs pos="0">
+              <a:schemeClr val="phClr">
+                <a:tint val="50000"/>
+                <a:satMod val="300000"/>
+              </a:schemeClr>
+            </a:gs>
+            <a:gs pos="35000">
+              <a:schemeClr val="phClr">
+                <a:tint val="37000"/>
+                <a:satMod val="300000"/>
+              </a:schemeClr>
+            </a:gs>
+            <a:gs pos="100000">
+              <a:schemeClr val="phClr">
+                <a:tint val="15000"/>
+                <a:satMod val="350000"/>
+              </a:schemeClr>
+            </a:gs>
+          </a:gsLst>
+          <a:lin ang="16200000" scaled="1"/>
+        </a:gradFill>
+        <a:gradFill rotWithShape="1">
+          <a:gsLst>
+            <a:gs pos="0">
+              <a:schemeClr val="phClr">
+                <a:tint val="100000"/>
+                <a:shade val="100000"/>
+                <a:satMod val="130000"/>
+              </a:schemeClr>
+            </a:gs>
+            <a:gs pos="100000">
+              <a:schemeClr val="phClr">
+                <a:tint val="50000"/>
+                <a:shade val="100000"/>
+                <a:satMod val="350000"/>
+              </a:schemeClr>
+            </a:gs>
+          </a:gsLst>
+          <a:lin ang="16200000" scaled="0"/>
+        </a:gradFill>
+      </a:fillStyleLst>
+      <a:lnStyleLst>
+        <a:ln w="9525" cap="flat" cmpd="sng" algn="ctr">
+          <a:solidFill>
+            <a:schemeClr val="phClr">
+              <a:shade val="95000"/>
+              <a:satMod val="105000"/>
+            </a:schemeClr>
+          </a:solidFill>
+          <a:prstDash val="solid"/>
+        </a:ln>
+        <a:ln w="25400" cap="flat" cmpd="sng" algn="ctr">
+          <a:solidFill>
+            <a:schemeClr val="phClr"/>
+          </a:solidFill>
+          <a:prstDash val="solid"/>
+        </a:ln>
+        <a:ln w="38100" cap="flat" cmpd="sng" algn="ctr">
+          <a:solidFill>
+            <a:schemeClr val="phClr"/>
+          </a:solidFill>
+          <a:prstDash val="solid"/>
+        </a:ln>
+      </a:lnStyleLst>
+      <a:effectStyleLst>
+        <a:effectStyle>
+          <a:effectLst>
+            <a:outerShdw blurRad="40000" dist="20000" dir="5400000" rotWithShape="0">
+              <a:srgbClr val="000000">
+                <a:alpha val="38000"/>
+              </a:srgbClr>
+            </a:outerShdw>
+          </a:effectLst>
+        </a:effectStyle>
+        <a:effectStyle>
+          <a:effectLst>
+            <a:outerShdw blurRad="40000" dist="23000" dir="5400000" rotWithShape="0">
+              <a:srgbClr val="000000">
+                <a:alpha val="35000"/>
+              </a:srgbClr>
+            </a:outerShdw>
+          </a:effectLst>
+        </a:effectStyle>
+        <a:effectStyle>
+          <a:effectLst>
+            <a:outerShdw blurRad="40000" dist="23000" dir="5400000" rotWithShape="0">
+              <a:srgbClr val="000000">
+                <a:alpha val="35000"/>
+              </a:srgbClr>
+            </a:outerShdw>
+          </a:effectLst>
+          <a:scene3d>
+            <a:camera prst="orthographicFront">
+              <a:rot lat="0" lon="0" rev="0"/>
+            </a:camera>
+            <a:lightRig rig="threePt" dir="t">
+              <a:rot lat="0" lon="0" rev="1200000"/>
+            </a:lightRig>
+          </a:scene3d>
+          <a:sp3d>
+            <a:bevelT w="63500" h="25400"/>
+          </a:sp3d>
+        </a:effectStyle>
+      </a:effectStyleLst>
+      <a:bgFillStyleLst>
+        <a:solidFill>
+          <a:schemeClr val="phClr"/>
+        </a:solidFill>
+        <a:gradFill rotWithShape="1">
+          <a:gsLst>
+            <a:gs pos="0">
+              <a:schemeClr val="phClr">
+                <a:tint val="40000"/>
+                <a:satMod val="350000"/>
+              </a:schemeClr>
+            </a:gs>
+            <a:gs pos="40000">
+              <a:schemeClr val="phClr">
+                <a:tint val="45000"/>
+                <a:shade val="99000"/>
+                <a:satMod val="350000"/>
+              </a:schemeClr>
+            </a:gs>
+            <a:gs pos="100000">
+              <a:schemeClr val="phClr">
+                <a:shade val="20000"/>
+                <a:satMod val="255000"/>
+              </a:schemeClr>
+            </a:gs>
+          </a:gsLst>
+          <a:path path="circle">
+            <a:fillToRect l="50000" t="-80000" r="50000" b="180000"/>
+          </a:path>
+        </a:gradFill>
+        <a:gradFill rotWithShape="1">
+          <a:gsLst>
+            <a:gs pos="0">
+              <a:schemeClr val="phClr">
+                <a:tint val="80000"/>
+                <a:satMod val="300000"/>
+              </a:schemeClr>
+            </a:gs>
+            <a:gs pos="100000">
+              <a:schemeClr val="phClr">
+                <a:shade val="30000"/>
+                <a:satMod val="200000"/>
+              </a:schemeClr>
+            </a:gs>
+          </a:gsLst>
+          <a:path path="circle">
+            <a:fillToRect l="50000" t="50000" r="50000" b="50000"/>
+          </a:path>
+        </a:gradFill>
+      </a:bgFillStyleLst>
+    </a:fmtScheme>
+  </a:themeElements>
+  <a:objectDefaults>
+    <a:spDef>
+      <a:spPr/>
+      <a:bodyPr/>
+      <a:lstStyle/>
+      <a:style>
+        <a:lnRef idx="1">
+          <a:schemeClr val="accent1"/>
+        </a:lnRef>
+        <a:fillRef idx="3">
+          <a:schemeClr val="accent1"/>
+        </a:fillRef>
+        <a:effectRef idx="2">
+          <a:schemeClr val="accent1"/>
+        </a:effectRef>
+        <a:fontRef idx="minor">
+          <a:schemeClr val="lt1"/>
+        </a:fontRef>
+      </a:style>
+    </a:spDef>
+    <a:lnDef>
+      <a:spPr/>
+      <a:bodyPr/>
+      <a:lstStyle/>
+      <a:style>
+        <a:lnRef idx="2">
+          <a:schemeClr val="accent1"/>
+        </a:lnRef>
+        <a:fillRef idx="0">
+          <a:schemeClr val="accent1"/>
+        </a:fillRef>
+        <a:effectRef idx="1">
+          <a:schemeClr val="accent1"/>
+        </a:effectRef>
+        <a:fontRef idx="minor">
+          <a:schemeClr val="tx1"/>
+        </a:fontRef>
+      </a:style>
+    </a:lnDef>
+  </a:objectDefaults>
+  <a:extraClrSchemeLst/>
+</a:theme>
 </file>
--- a/results/presentation.pptx
+++ b/results/presentation.pptx
@@ -695,7 +695,7 @@
           <a:lstStyle/>
           <a:p>
             <a:r>
-              <a:t>[70s]</a:t>
+              <a:t>[92s]</a:t>
             </a:r>
           </a:p>
           <a:p>
@@ -726,6 +726,11 @@
           <a:p>
             <a:r>
               <a:t>And they compound: together at five views they reach 0.714 dB, the best result in the study — because they repair different deficiencies.</a:t>
+            </a:r>
+          </a:p>
+          <a:p>
+            <a:r>
+              <a:t>One more thing, and it is the strongest evidence I have. Train to thirty thousand iterations and the outpainting gain dies — minus 0.078, nothing. The depth prior at the same length is still plus 0.208, and the two together plus 0.469. Fabricated pixels lose their value to longer training. A geometric constraint does not.</a:t>
             </a:r>
           </a:p>
         </p:txBody>
@@ -895,7 +900,7 @@
           <a:lstStyle/>
           <a:p>
             <a:r>
-              <a:t>[60s]</a:t>
+              <a:t>[88s]</a:t>
             </a:r>
           </a:p>
           <a:p>
@@ -905,12 +910,17 @@
           </a:p>
           <a:p>
             <a:r>
-              <a:t>The biggest one is training length. I train for 7,000 iterations. At 30,000 the benefit disappears entirely.</a:t>
-            </a:r>
-          </a:p>
-          <a:p>
-            <a:r>
-              <a:t>But — and this is the point — the plain baselines get WORSE at 30,000 too. With five photos, long training memorises them instead of learning the scene. So 30,000 is not better converged, it is over-trained. Early stopping is the correct setting for few-shot, and the gain is conditional on it.</a:t>
+              <a:t>The biggest one is training length. I train for 7,000 iterations. I measured three points — the gain decays from plus 0.285, to plus 0.045 at fifteen thousand, to minus 0.078 at thirty thousand.</a:t>
+            </a:r>
+          </a:p>
+          <a:p>
+            <a:r>
+              <a:t>But — and this is the point — the plain baselines do not improve either. Flat from seven to fifteen thousand, and lower by thirty. With five photos, long training memorises them instead of learning the scene. So 30,000 is not better converged, it is over-trained, and 7,000 is a fair operating point. The augmentation gain is still conditional on early stopping — the depth prior is not.</a:t>
+            </a:r>
+          </a:p>
+          <a:p>
+            <a:r>
+              <a:t>Two things run against my own claim. At twenty views the prior is only plus 0.130 after long training, inside the noise. And the compounding is single-scene: on the indoor scene the two are additive, not super-additive.</a:t>
             </a:r>
           </a:p>
           <a:p>
@@ -4820,7 +4830,7 @@
                   <a:srgbClr val="16202A"/>
                 </a:solidFill>
               </a:rPr>
-              <a:t>236</a:t>
+              <a:t>242</a:t>
             </a:r>
           </a:p>
           <a:p>
@@ -5879,7 +5889,7 @@
                   <a:srgbClr val="16202A"/>
                 </a:solidFill>
               </a:rPr>
-              <a:t>•  Constraint beats invention. A depth prior is positive at every subset size and compounds with augmentation; anything that invents a camera eventually reverses sign.</a:t>
+              <a:t>•  Constraint beats invention. A depth prior is positive at every subset size and compounds with augmentation; anything that invents a camera eventually reverses sign. It also outlasts it: at 30,000 iterations outpainting is worth -0.078 dB and the prior still +0.208.</a:t>
             </a:r>
           </a:p>
           <a:p>
@@ -6016,7 +6026,7 @@
                   <a:srgbClr val="16202A"/>
                 </a:solidFill>
               </a:rPr>
-              <a:t>•  The 7,000-iteration setting is load-bearing. At 30,000 the benefit does not survive — outpainting at k = 5 falls from +0.285 to -0.078 dB, while the harm at k = 20 persists. The plain baselines fall too (15.20 → 15.04), so 30,000 is past this regime's optimum, not better converged. Early stopping is correct here, but the gain is conditional on it.</a:t>
+              <a:t>•  The 7,000-iteration setting is load-bearing. The benefit decays monotonically with training length — outpainting at k = 5 goes +0.285 → +0.045 → -0.078 dB at 7k, 15k and 30k. The baseline is flat from 7k to 15k (15.20 → 15.22) and lower by 30k (15.04), so the setting is not mis-chosen: 30,000 is past this regime's optimum, not better converged. The augmentation gain is conditional on early stopping; the depth prior is not.</a:t>
             </a:r>
           </a:p>
           <a:p>
@@ -6076,7 +6086,7 @@
                   <a:srgbClr val="16202A"/>
                 </a:solidFill>
               </a:rPr>
-              <a:t>•  The depth prior was tested on one scene, at one ratio. Whether its immunity to the crossover survives indoors is untested.</a:t>
+              <a:t>•  The depth prior's compounding is single-scene. It reproduces on drjohnson as a gain, but the interaction there is +0.075 ± 0.672 dB — additive, not super-additive. And at k = 20 after 30,000 iterations it is +0.130 dB, no longer clear of the noise floor.</a:t>
             </a:r>
           </a:p>
         </p:txBody>
@@ -6213,7 +6223,7 @@
                   <a:srgbClr val="5C6E78"/>
                 </a:solidFill>
               </a:rPr>
-              <a:t>236 runs · 2 scenes · every held-out set hash-verified identical within its scene · code and full report in the repository.</a:t>
+              <a:t>242 runs · 2 scenes · every held-out set hash-verified identical within its scene · code and full report in the repository.</a:t>
             </a:r>
           </a:p>
         </p:txBody>
@@ -7003,7 +7013,7 @@
                   <a:srgbClr val="16202A"/>
                 </a:solidFill>
               </a:rPr>
-              <a:t>•  Frozen held-out split. Every run of a scene is scored against byte-identical test images — verified by hash across all 236 runs.</a:t>
+              <a:t>•  Frozen held-out split. Every run of a scene is scored against byte-identical test images — verified by hash across all 242 runs.</a:t>
             </a:r>
           </a:p>
           <a:p>

--- a/results/presentation.pptx
+++ b/results/presentation.pptx
@@ -19,6 +19,11 @@
     <p:sldId id="267" r:id="rId18"/>
     <p:sldId id="268" r:id="rId19"/>
     <p:sldId id="269" r:id="rId20"/>
+    <p:sldId id="270" r:id="rId21"/>
+    <p:sldId id="271" r:id="rId22"/>
+    <p:sldId id="272" r:id="rId23"/>
+    <p:sldId id="273" r:id="rId24"/>
+    <p:sldId id="274" r:id="rId25"/>
   </p:sldIdLst>
   <p:sldSz cx="12191695" cy="6858000" type="screen4x3"/>
   <p:notesSz cx="6858000" cy="9144000"/>
@@ -515,22 +520,22 @@
           <a:lstStyle/>
           <a:p>
             <a:r>
-              <a:t>[45s]</a:t>
-            </a:r>
-          </a:p>
-          <a:p>
-            <a:r>
-              <a:t>Good morning. My project asks one question: can AI-generated images replace photographs you never took, when you are reconstructing a 3D scene?</a:t>
-            </a:r>
-          </a:p>
-          <a:p>
-            <a:r>
-              <a:t>The short answer is yes, but only in a narrow window — and I spent most of the project working out where that window ends and why.</a:t>
-            </a:r>
-          </a:p>
-          <a:p>
-            <a:r>
-              <a:t>236 training runs, two scenes, and every number here is read straight out of the raw results files, not typed in by hand.</a:t>
+              <a:t>[22s]</a:t>
+            </a:r>
+          </a:p>
+          <a:p>
+            <a:r>
+              <a:t>Quick map of the next fifteen minutes.</a:t>
+            </a:r>
+          </a:p>
+          <a:p>
+            <a:r>
+              <a:t>The problem, then the method and the pipeline, then the grid I ran. Then the result, which is a sign change. Then why it happens, and the controls that rule out the alternatives. A prediction I tested. And the limits.</a:t>
+            </a:r>
+          </a:p>
+          <a:p>
+            <a:r>
+              <a:t>The one thing to carry through: the same treatment can help or harm, and which one it does depends on how many real photographs you already have.</a:t>
             </a:r>
           </a:p>
         </p:txBody>
@@ -600,32 +605,17 @@
           <a:lstStyle/>
           <a:p>
             <a:r>
-              <a:t>[55s]</a:t>
-            </a:r>
-          </a:p>
-          <a:p>
-            <a:r>
-              <a:t>First objection: maybe this is a quirk of Stable Diffusion 1.5.</a:t>
-            </a:r>
-          </a:p>
-          <a:p>
-            <a:r>
-              <a:t>So I swapped in Dreamshaper-8 — same architecture, same memory budget, but tuned for better photorealism.</a:t>
-            </a:r>
-          </a:p>
-          <a:p>
-            <a:r>
-              <a:t>It reverses in the same place. Positive at five, negative at twenty.</a:t>
-            </a:r>
-          </a:p>
-          <a:p>
-            <a:r>
-              <a:t>And here is the interesting part: the better-looking model is WORSE at every subset size. It even crosses over earlier.</a:t>
-            </a:r>
-          </a:p>
-          <a:p>
-            <a:r>
-              <a:t>A model tuned to make each image individually more convincing has no reason to be more consistent BETWEEN images. Which is the point — what a synthetic view contributes is coverage, not photorealism.</a:t>
+              <a:t>[40s]</a:t>
+            </a:r>
+          </a:p>
+          <a:p>
+            <a:r>
+              <a:t>The same thing visually. Left pair is five views, right pair is twenty.</a:t>
+            </a:r>
+          </a:p>
+          <a:p>
+            <a:r>
+              <a:t>One caution on this figure: per-view effects scatter several dB either side of the average. So I picked the views closest to the mean effect and printed the per-view number on each. Three arbitrary views can contradict the finding they are supposed to illustrate.</a:t>
             </a:r>
           </a:p>
         </p:txBody>
@@ -695,42 +685,32 @@
           <a:lstStyle/>
           <a:p>
             <a:r>
-              <a:t>[92s]</a:t>
-            </a:r>
-          </a:p>
-          <a:p>
-            <a:r>
-              <a:t>Second and sharper prediction.</a:t>
-            </a:r>
-          </a:p>
-          <a:p>
-            <a:r>
-              <a:t>If the harm comes from inventing a camera, then something that helps the geometry WITHOUT inventing a camera should never turn negative.</a:t>
-            </a:r>
-          </a:p>
-          <a:p>
-            <a:r>
-              <a:t>Depth regularisation is exactly that. A depth network predicts a depth map for each real photograph, anchored to true scale against the sparse reconstruction points. No camera is invented, no pixel is fabricated.</a:t>
-            </a:r>
-          </a:p>
-          <a:p>
-            <a:r>
-              <a:t>It is positive at every subset size — including twenty, where outpainting loses 0.6.</a:t>
-            </a:r>
-          </a:p>
-          <a:p>
-            <a:r>
-              <a:t>Coverage crosses over. Constraint does not. The two differ in exactly one respect, and it is the one the theory says matters.</a:t>
-            </a:r>
-          </a:p>
-          <a:p>
-            <a:r>
-              <a:t>And they compound: together at five views they reach 0.714 dB, the best result in the study — because they repair different deficiencies.</a:t>
-            </a:r>
-          </a:p>
-          <a:p>
-            <a:r>
-              <a:t>One more thing, and it is the strongest evidence I have. Train to thirty thousand iterations and the outpainting gain dies — minus 0.078, nothing. The depth prior at the same length is still plus 0.208, and the two together plus 0.469. Fabricated pixels lose their value to longer training. A geometric constraint does not.</a:t>
+              <a:t>[52s]</a:t>
+            </a:r>
+          </a:p>
+          <a:p>
+            <a:r>
+              <a:t>Here is the whole grid filled in. Green helps, red harms.</a:t>
+            </a:r>
+          </a:p>
+          <a:p>
+            <a:r>
+              <a:t>Read the middle row — outpainting — left to right across the three panels. Green at five views. Neutral at ten. Red at twenty.</a:t>
+            </a:r>
+          </a:p>
+          <a:p>
+            <a:r>
+              <a:t>That is the finding. Same treatment, same ratio, opposite sign.</a:t>
+            </a:r>
+          </a:p>
+          <a:p>
+            <a:r>
+              <a:t>The top row, inpainting, is flat everywhere — it reuses the camera pose exactly. The bottom row, pose-guided, is red everywhere and gets darker as k grows — it invents a whole new camera.</a:t>
+            </a:r>
+          </a:p>
+          <a:p>
+            <a:r>
+              <a:t>Colour is clipped at plus or minus one decibel, otherwise pose-guided's magnitude washes the crossover out.</a:t>
             </a:r>
           </a:p>
         </p:txBody>
@@ -800,37 +780,22 @@
           <a:lstStyle/>
           <a:p>
             <a:r>
-              <a:t>[50s]</a:t>
-            </a:r>
-          </a:p>
-          <a:p>
-            <a:r>
-              <a:t>So, four things.</a:t>
-            </a:r>
-          </a:p>
-          <a:p>
-            <a:r>
-              <a:t>Augmentation is not free coverage. It helps only in the single digits.</a:t>
-            </a:r>
-          </a:p>
-          <a:p>
-            <a:r>
-              <a:t>The mechanism is pose novelty — four controls rule out image quality, hole content, warping artifacts, and mere repetition.</a:t>
-            </a:r>
-          </a:p>
-          <a:p>
-            <a:r>
-              <a:t>Constraint beats invention.</a:t>
-            </a:r>
-          </a:p>
-          <a:p>
-            <a:r>
-              <a:t>And the two are separable, which is why combining them beats either alone.</a:t>
-            </a:r>
-          </a:p>
-          <a:p>
-            <a:r>
-              <a:t>Practically: below about ten real views, use it. Above that, go and take more photographs.</a:t>
+              <a:t>[45s]</a:t>
+            </a:r>
+          </a:p>
+          <a:p>
+            <a:r>
+              <a:t>The obvious worry is that this is one scene's quirk. So I repeated the sweep on an indoor room from a different dataset — different capture geometry, different scale.</a:t>
+            </a:r>
+          </a:p>
+          <a:p>
+            <a:r>
+              <a:t>Same sign flip. And indoors the effect is stronger at five views.</a:t>
+            </a:r>
+          </a:p>
+          <a:p>
+            <a:r>
+              <a:t>Note the third number: the baselines scatter 0.52 dB between seeds indoors, against 0.07 outdoors. Which five views you draw matters far more in a room. Without the paired design I could not have resolved the effect at all.</a:t>
             </a:r>
           </a:p>
         </p:txBody>
@@ -900,32 +865,37 @@
           <a:lstStyle/>
           <a:p>
             <a:r>
-              <a:t>[88s]</a:t>
-            </a:r>
-          </a:p>
-          <a:p>
-            <a:r>
-              <a:t>The honest limits.</a:t>
-            </a:r>
-          </a:p>
-          <a:p>
-            <a:r>
-              <a:t>The biggest one is training length. I train for 7,000 iterations. I measured three points — the gain decays from plus 0.285, to plus 0.045 at fifteen thousand, to minus 0.078 at thirty thousand.</a:t>
-            </a:r>
-          </a:p>
-          <a:p>
-            <a:r>
-              <a:t>But — and this is the point — the plain baselines do not improve either. Flat from seven to fifteen thousand, and lower by thirty. With five photos, long training memorises them instead of learning the scene. So 30,000 is not better converged, it is over-trained, and 7,000 is a fair operating point. The augmentation gain is still conditional on early stopping — the depth prior is not.</a:t>
-            </a:r>
-          </a:p>
-          <a:p>
-            <a:r>
-              <a:t>Two things run against my own claim. At twenty views the prior is only plus 0.130 after long training, inside the noise. And the compounding is single-scene: on the indoor scene the two are additive, not super-additive.</a:t>
-            </a:r>
-          </a:p>
-          <a:p>
-            <a:r>
-              <a:t>Three seeds is a consistency check, not a significance test. Both diffusion checkpoints share an architecture, because SDXL and FLUX do not fit in four gigabytes.</a:t>
+              <a:t>[65s]</a:t>
+            </a:r>
+          </a:p>
+          <a:p>
+            <a:r>
+              <a:t>Here is why the sign flips.</a:t>
+            </a:r>
+          </a:p>
+          <a:p>
+            <a:r>
+              <a:t>Every synthetic view gives you two things at once. Coverage — some part of the scene no real camera saw. And inconsistency — it is invented, so it disagrees with the real photographs.</a:t>
+            </a:r>
+          </a:p>
+          <a:p>
+            <a:r>
+              <a:t>Coverage DECAYS as you add real views. You have already seen that area.</a:t>
+            </a:r>
+          </a:p>
+          <a:p>
+            <a:r>
+              <a:t>Inconsistency does NOT decay. A contradiction is just as harmful at twenty views as at five. Arguably worse, because now it contradicts a better-determined geometry.</a:t>
+            </a:r>
+          </a:p>
+          <a:p>
+            <a:r>
+              <a:t>A shrinking benefit plus a constant cost gives you a sign change. That is the whole mechanism.</a:t>
+            </a:r>
+          </a:p>
+          <a:p>
+            <a:r>
+              <a:t>But that is just a story. So I made it predict things that could fail.</a:t>
             </a:r>
           </a:p>
         </p:txBody>
@@ -995,6 +965,401 @@
           <a:lstStyle/>
           <a:p>
             <a:r>
+              <a:t>[55s]</a:t>
+            </a:r>
+          </a:p>
+          <a:p>
+            <a:r>
+              <a:t>First objection: maybe this is a quirk of Stable Diffusion 1.5.</a:t>
+            </a:r>
+          </a:p>
+          <a:p>
+            <a:r>
+              <a:t>So I swapped in Dreamshaper-8 — same architecture, same memory budget, but tuned for better photorealism.</a:t>
+            </a:r>
+          </a:p>
+          <a:p>
+            <a:r>
+              <a:t>It reverses in the same place. Positive at five, negative at twenty.</a:t>
+            </a:r>
+          </a:p>
+          <a:p>
+            <a:r>
+              <a:t>And here is the interesting part: the better-looking model is WORSE at every subset size. It even crosses over earlier.</a:t>
+            </a:r>
+          </a:p>
+          <a:p>
+            <a:r>
+              <a:t>A model tuned to make each image individually more convincing has no reason to be more consistent BETWEEN images. Which is the point — what a synthetic view contributes is coverage, not photorealism.</a:t>
+            </a:r>
+          </a:p>
+        </p:txBody>
+      </p:sp>
+      <p:sp>
+        <p:nvSpPr>
+          <p:cNvPr id="4" name="Slide Number Placeholder 3"/>
+          <p:cNvSpPr>
+            <a:spLocks noGrp="1"/>
+          </p:cNvSpPr>
+          <p:nvPr>
+            <p:ph type="sldNum" idx="5" sz="quarter"/>
+          </p:nvPr>
+        </p:nvSpPr>
+        <p:spPr/>
+      </p:sp>
+    </p:spTree>
+  </p:cSld>
+  <p:clrMapOvr>
+    <a:masterClrMapping/>
+  </p:clrMapOvr>
+</p:notes>
+</file>
+
+<file path=ppt/notesSlides/notesSlide15.xml><?xml version="1.0" encoding="utf-8"?>
+<p:notes xmlns:a="http://schemas.openxmlformats.org/drawingml/2006/main" xmlns:p="http://schemas.openxmlformats.org/presentationml/2006/main" xmlns:r="http://schemas.openxmlformats.org/officeDocument/2006/relationships">
+  <p:cSld>
+    <p:spTree>
+      <p:nvGrpSpPr>
+        <p:cNvPr id="1" name=""/>
+        <p:cNvGrpSpPr/>
+        <p:nvPr/>
+      </p:nvGrpSpPr>
+      <p:grpSpPr>
+        <a:xfrm>
+          <a:off x="0" y="0"/>
+          <a:ext cx="0" cy="0"/>
+          <a:chOff x="0" y="0"/>
+          <a:chExt cx="0" cy="0"/>
+        </a:xfrm>
+      </p:grpSpPr>
+      <p:sp>
+        <p:nvSpPr>
+          <p:cNvPr id="2" name="Slide Image Placeholder 1"/>
+          <p:cNvSpPr>
+            <a:spLocks noGrp="1"/>
+          </p:cNvSpPr>
+          <p:nvPr>
+            <p:ph type="sldImg" idx="2"/>
+          </p:nvPr>
+        </p:nvSpPr>
+        <p:spPr/>
+      </p:sp>
+      <p:sp>
+        <p:nvSpPr>
+          <p:cNvPr id="3" name="Notes Placeholder 2"/>
+          <p:cNvSpPr>
+            <a:spLocks noGrp="1"/>
+          </p:cNvSpPr>
+          <p:nvPr>
+            <p:ph type="body" idx="3" sz="quarter"/>
+          </p:nvPr>
+        </p:nvSpPr>
+        <p:spPr/>
+        <p:txBody>
+          <a:bodyPr/>
+          <a:lstStyle/>
+          <a:p>
+            <a:r>
+              <a:t>[92s]</a:t>
+            </a:r>
+          </a:p>
+          <a:p>
+            <a:r>
+              <a:t>Second and sharper prediction.</a:t>
+            </a:r>
+          </a:p>
+          <a:p>
+            <a:r>
+              <a:t>If the harm comes from inventing a camera, then something that helps the geometry WITHOUT inventing a camera should never turn negative.</a:t>
+            </a:r>
+          </a:p>
+          <a:p>
+            <a:r>
+              <a:t>Depth regularisation is exactly that. A depth network predicts a depth map for each real photograph, anchored to true scale against the sparse reconstruction points. No camera is invented, no pixel is fabricated.</a:t>
+            </a:r>
+          </a:p>
+          <a:p>
+            <a:r>
+              <a:t>It is positive at every subset size — including twenty, where outpainting loses 0.6.</a:t>
+            </a:r>
+          </a:p>
+          <a:p>
+            <a:r>
+              <a:t>Coverage crosses over. Constraint does not. The two differ in exactly one respect, and it is the one the theory says matters.</a:t>
+            </a:r>
+          </a:p>
+          <a:p>
+            <a:r>
+              <a:t>And they compound: together at five views they reach 0.714 dB, the best result in the study — because they repair different deficiencies.</a:t>
+            </a:r>
+          </a:p>
+          <a:p>
+            <a:r>
+              <a:t>One more thing, and it is the strongest evidence I have. Train to thirty thousand iterations and the outpainting gain dies — minus 0.078, nothing. The depth prior at the same length is still plus 0.208, and the two together plus 0.469. Fabricated pixels lose their value to longer training. A geometric constraint does not.</a:t>
+            </a:r>
+          </a:p>
+        </p:txBody>
+      </p:sp>
+      <p:sp>
+        <p:nvSpPr>
+          <p:cNvPr id="4" name="Slide Number Placeholder 3"/>
+          <p:cNvSpPr>
+            <a:spLocks noGrp="1"/>
+          </p:cNvSpPr>
+          <p:nvPr>
+            <p:ph type="sldNum" idx="5" sz="quarter"/>
+          </p:nvPr>
+        </p:nvSpPr>
+        <p:spPr/>
+      </p:sp>
+    </p:spTree>
+  </p:cSld>
+  <p:clrMapOvr>
+    <a:masterClrMapping/>
+  </p:clrMapOvr>
+</p:notes>
+</file>
+
+<file path=ppt/notesSlides/notesSlide16.xml><?xml version="1.0" encoding="utf-8"?>
+<p:notes xmlns:a="http://schemas.openxmlformats.org/drawingml/2006/main" xmlns:p="http://schemas.openxmlformats.org/presentationml/2006/main" xmlns:r="http://schemas.openxmlformats.org/officeDocument/2006/relationships">
+  <p:cSld>
+    <p:spTree>
+      <p:nvGrpSpPr>
+        <p:cNvPr id="1" name=""/>
+        <p:cNvGrpSpPr/>
+        <p:nvPr/>
+      </p:nvGrpSpPr>
+      <p:grpSpPr>
+        <a:xfrm>
+          <a:off x="0" y="0"/>
+          <a:ext cx="0" cy="0"/>
+          <a:chOff x="0" y="0"/>
+          <a:chExt cx="0" cy="0"/>
+        </a:xfrm>
+      </p:grpSpPr>
+      <p:sp>
+        <p:nvSpPr>
+          <p:cNvPr id="2" name="Slide Image Placeholder 1"/>
+          <p:cNvSpPr>
+            <a:spLocks noGrp="1"/>
+          </p:cNvSpPr>
+          <p:nvPr>
+            <p:ph type="sldImg" idx="2"/>
+          </p:nvPr>
+        </p:nvSpPr>
+        <p:spPr/>
+      </p:sp>
+      <p:sp>
+        <p:nvSpPr>
+          <p:cNvPr id="3" name="Notes Placeholder 2"/>
+          <p:cNvSpPr>
+            <a:spLocks noGrp="1"/>
+          </p:cNvSpPr>
+          <p:nvPr>
+            <p:ph type="body" idx="3" sz="quarter"/>
+          </p:nvPr>
+        </p:nvSpPr>
+        <p:spPr/>
+        <p:txBody>
+          <a:bodyPr/>
+          <a:lstStyle/>
+          <a:p>
+            <a:r>
+              <a:t>[50s]</a:t>
+            </a:r>
+          </a:p>
+          <a:p>
+            <a:r>
+              <a:t>So, four things.</a:t>
+            </a:r>
+          </a:p>
+          <a:p>
+            <a:r>
+              <a:t>Augmentation is not free coverage. It helps only in the single digits.</a:t>
+            </a:r>
+          </a:p>
+          <a:p>
+            <a:r>
+              <a:t>The mechanism is pose novelty — four controls rule out image quality, hole content, warping artifacts, and mere repetition.</a:t>
+            </a:r>
+          </a:p>
+          <a:p>
+            <a:r>
+              <a:t>Constraint beats invention.</a:t>
+            </a:r>
+          </a:p>
+          <a:p>
+            <a:r>
+              <a:t>And the two are separable, which is why combining them beats either alone.</a:t>
+            </a:r>
+          </a:p>
+          <a:p>
+            <a:r>
+              <a:t>Practically: below about ten real views, use it. Above that, go and take more photographs.</a:t>
+            </a:r>
+          </a:p>
+        </p:txBody>
+      </p:sp>
+      <p:sp>
+        <p:nvSpPr>
+          <p:cNvPr id="4" name="Slide Number Placeholder 3"/>
+          <p:cNvSpPr>
+            <a:spLocks noGrp="1"/>
+          </p:cNvSpPr>
+          <p:nvPr>
+            <p:ph type="sldNum" idx="5" sz="quarter"/>
+          </p:nvPr>
+        </p:nvSpPr>
+        <p:spPr/>
+      </p:sp>
+    </p:spTree>
+  </p:cSld>
+  <p:clrMapOvr>
+    <a:masterClrMapping/>
+  </p:clrMapOvr>
+</p:notes>
+</file>
+
+<file path=ppt/notesSlides/notesSlide17.xml><?xml version="1.0" encoding="utf-8"?>
+<p:notes xmlns:a="http://schemas.openxmlformats.org/drawingml/2006/main" xmlns:p="http://schemas.openxmlformats.org/presentationml/2006/main" xmlns:r="http://schemas.openxmlformats.org/officeDocument/2006/relationships">
+  <p:cSld>
+    <p:spTree>
+      <p:nvGrpSpPr>
+        <p:cNvPr id="1" name=""/>
+        <p:cNvGrpSpPr/>
+        <p:nvPr/>
+      </p:nvGrpSpPr>
+      <p:grpSpPr>
+        <a:xfrm>
+          <a:off x="0" y="0"/>
+          <a:ext cx="0" cy="0"/>
+          <a:chOff x="0" y="0"/>
+          <a:chExt cx="0" cy="0"/>
+        </a:xfrm>
+      </p:grpSpPr>
+      <p:sp>
+        <p:nvSpPr>
+          <p:cNvPr id="2" name="Slide Image Placeholder 1"/>
+          <p:cNvSpPr>
+            <a:spLocks noGrp="1"/>
+          </p:cNvSpPr>
+          <p:nvPr>
+            <p:ph type="sldImg" idx="2"/>
+          </p:nvPr>
+        </p:nvSpPr>
+        <p:spPr/>
+      </p:sp>
+      <p:sp>
+        <p:nvSpPr>
+          <p:cNvPr id="3" name="Notes Placeholder 2"/>
+          <p:cNvSpPr>
+            <a:spLocks noGrp="1"/>
+          </p:cNvSpPr>
+          <p:nvPr>
+            <p:ph type="body" idx="3" sz="quarter"/>
+          </p:nvPr>
+        </p:nvSpPr>
+        <p:spPr/>
+        <p:txBody>
+          <a:bodyPr/>
+          <a:lstStyle/>
+          <a:p>
+            <a:r>
+              <a:t>[88s]</a:t>
+            </a:r>
+          </a:p>
+          <a:p>
+            <a:r>
+              <a:t>The honest limits.</a:t>
+            </a:r>
+          </a:p>
+          <a:p>
+            <a:r>
+              <a:t>The biggest one is training length. I train for 7,000 iterations. I measured three points — the gain decays from plus 0.285, to plus 0.045 at fifteen thousand, to minus 0.078 at thirty thousand.</a:t>
+            </a:r>
+          </a:p>
+          <a:p>
+            <a:r>
+              <a:t>But — and this is the point — the plain baselines do not improve either. Flat from seven to fifteen thousand, and lower by thirty. With five photos, long training memorises them instead of learning the scene. So 30,000 is not better converged, it is over-trained, and 7,000 is a fair operating point. The augmentation gain is still conditional on early stopping — the depth prior is not.</a:t>
+            </a:r>
+          </a:p>
+          <a:p>
+            <a:r>
+              <a:t>Two things run against my own claim. At twenty views the prior is only plus 0.130 after long training, inside the noise. And the compounding is single-scene: on the indoor scene the two are additive, not super-additive.</a:t>
+            </a:r>
+          </a:p>
+          <a:p>
+            <a:r>
+              <a:t>Three seeds is a consistency check, not a significance test. Both diffusion checkpoints share an architecture, because SDXL and FLUX do not fit in four gigabytes.</a:t>
+            </a:r>
+          </a:p>
+        </p:txBody>
+      </p:sp>
+      <p:sp>
+        <p:nvSpPr>
+          <p:cNvPr id="4" name="Slide Number Placeholder 3"/>
+          <p:cNvSpPr>
+            <a:spLocks noGrp="1"/>
+          </p:cNvSpPr>
+          <p:nvPr>
+            <p:ph type="sldNum" idx="5" sz="quarter"/>
+          </p:nvPr>
+        </p:nvSpPr>
+        <p:spPr/>
+      </p:sp>
+    </p:spTree>
+  </p:cSld>
+  <p:clrMapOvr>
+    <a:masterClrMapping/>
+  </p:clrMapOvr>
+</p:notes>
+</file>
+
+<file path=ppt/notesSlides/notesSlide18.xml><?xml version="1.0" encoding="utf-8"?>
+<p:notes xmlns:a="http://schemas.openxmlformats.org/drawingml/2006/main" xmlns:p="http://schemas.openxmlformats.org/presentationml/2006/main" xmlns:r="http://schemas.openxmlformats.org/officeDocument/2006/relationships">
+  <p:cSld>
+    <p:spTree>
+      <p:nvGrpSpPr>
+        <p:cNvPr id="1" name=""/>
+        <p:cNvGrpSpPr/>
+        <p:nvPr/>
+      </p:nvGrpSpPr>
+      <p:grpSpPr>
+        <a:xfrm>
+          <a:off x="0" y="0"/>
+          <a:ext cx="0" cy="0"/>
+          <a:chOff x="0" y="0"/>
+          <a:chExt cx="0" cy="0"/>
+        </a:xfrm>
+      </p:grpSpPr>
+      <p:sp>
+        <p:nvSpPr>
+          <p:cNvPr id="2" name="Slide Image Placeholder 1"/>
+          <p:cNvSpPr>
+            <a:spLocks noGrp="1"/>
+          </p:cNvSpPr>
+          <p:nvPr>
+            <p:ph type="sldImg" idx="2"/>
+          </p:nvPr>
+        </p:nvSpPr>
+        <p:spPr/>
+      </p:sp>
+      <p:sp>
+        <p:nvSpPr>
+          <p:cNvPr id="3" name="Notes Placeholder 2"/>
+          <p:cNvSpPr>
+            <a:spLocks noGrp="1"/>
+          </p:cNvSpPr>
+          <p:nvPr>
+            <p:ph type="body" idx="3" sz="quarter"/>
+          </p:nvPr>
+        </p:nvSpPr>
+        <p:spPr/>
+        <p:txBody>
+          <a:bodyPr/>
+          <a:lstStyle/>
+          <a:p>
+            <a:r>
               <a:t>[35s]</a:t>
             </a:r>
           </a:p>
@@ -1011,6 +1376,81 @@
           <a:p>
             <a:r>
               <a:t>At five views, worth it. By twenty, the same treatment is actively harmful.</a:t>
+            </a:r>
+          </a:p>
+          <a:p>
+            <a:r>
+              <a:t>Thank you — happy to take questions.</a:t>
+            </a:r>
+          </a:p>
+        </p:txBody>
+      </p:sp>
+      <p:sp>
+        <p:nvSpPr>
+          <p:cNvPr id="4" name="Slide Number Placeholder 3"/>
+          <p:cNvSpPr>
+            <a:spLocks noGrp="1"/>
+          </p:cNvSpPr>
+          <p:nvPr>
+            <p:ph type="sldNum" idx="5" sz="quarter"/>
+          </p:nvPr>
+        </p:nvSpPr>
+        <p:spPr/>
+      </p:sp>
+    </p:spTree>
+  </p:cSld>
+  <p:clrMapOvr>
+    <a:masterClrMapping/>
+  </p:clrMapOvr>
+</p:notes>
+</file>
+
+<file path=ppt/notesSlides/notesSlide19.xml><?xml version="1.0" encoding="utf-8"?>
+<p:notes xmlns:a="http://schemas.openxmlformats.org/drawingml/2006/main" xmlns:p="http://schemas.openxmlformats.org/presentationml/2006/main" xmlns:r="http://schemas.openxmlformats.org/officeDocument/2006/relationships">
+  <p:cSld>
+    <p:spTree>
+      <p:nvGrpSpPr>
+        <p:cNvPr id="1" name=""/>
+        <p:cNvGrpSpPr/>
+        <p:nvPr/>
+      </p:nvGrpSpPr>
+      <p:grpSpPr>
+        <a:xfrm>
+          <a:off x="0" y="0"/>
+          <a:ext cx="0" cy="0"/>
+          <a:chOff x="0" y="0"/>
+          <a:chExt cx="0" cy="0"/>
+        </a:xfrm>
+      </p:grpSpPr>
+      <p:sp>
+        <p:nvSpPr>
+          <p:cNvPr id="2" name="Slide Image Placeholder 1"/>
+          <p:cNvSpPr>
+            <a:spLocks noGrp="1"/>
+          </p:cNvSpPr>
+          <p:nvPr>
+            <p:ph type="sldImg" idx="2"/>
+          </p:nvPr>
+        </p:nvSpPr>
+        <p:spPr/>
+      </p:sp>
+      <p:sp>
+        <p:nvSpPr>
+          <p:cNvPr id="3" name="Notes Placeholder 2"/>
+          <p:cNvSpPr>
+            <a:spLocks noGrp="1"/>
+          </p:cNvSpPr>
+          <p:nvPr>
+            <p:ph type="body" idx="3" sz="quarter"/>
+          </p:nvPr>
+        </p:nvSpPr>
+        <p:spPr/>
+        <p:txBody>
+          <a:bodyPr/>
+          <a:lstStyle/>
+          <a:p>
+            <a:r>
+              <a:t>[12s]</a:t>
             </a:r>
           </a:p>
           <a:p>
@@ -1085,22 +1525,22 @@
           <a:lstStyle/>
           <a:p>
             <a:r>
-              <a:t>[60s]</a:t>
-            </a:r>
-          </a:p>
-          <a:p>
-            <a:r>
-              <a:t>Gaussian Splatting reconstructs a 3D scene from photographs. Given enough of them it is excellent — 25.2 dB on this outdoor scene from 219 photos.</a:t>
-            </a:r>
-          </a:p>
-          <a:p>
-            <a:r>
-              <a:t>Cut it to five photos and it collapses to 15.2. That is a ten decibel gap.</a:t>
-            </a:r>
-          </a:p>
-          <a:p>
-            <a:r>
-              <a:t>Photographs are expensive to collect. A diffusion model generates images for free. So the question is whether free images can buy back that gap.</a:t>
+              <a:t>[45s]</a:t>
+            </a:r>
+          </a:p>
+          <a:p>
+            <a:r>
+              <a:t>Good morning. My project asks one question: can AI-generated images replace photographs you never took, when you are reconstructing a 3D scene?</a:t>
+            </a:r>
+          </a:p>
+          <a:p>
+            <a:r>
+              <a:t>The short answer is yes, but only in a narrow window — and I spent most of the project working out where that window ends and why.</a:t>
+            </a:r>
+          </a:p>
+          <a:p>
+            <a:r>
+              <a:t>236 training runs, two scenes, and every number here is read straight out of the raw results files, not typed in by hand.</a:t>
             </a:r>
           </a:p>
         </p:txBody>
@@ -1170,22 +1610,22 @@
           <a:lstStyle/>
           <a:p>
             <a:r>
-              <a:t>[40s]</a:t>
-            </a:r>
-          </a:p>
-          <a:p>
-            <a:r>
-              <a:t>This is the same held-out camera reconstructed from 5, 10, 20 and 219 photos.</a:t>
-            </a:r>
-          </a:p>
-          <a:p>
-            <a:r>
-              <a:t>The important thing is what fails at five views. The shape of the truck is broadly right. What costs the ten decibels is the haze, the floaters, and the surfaces the optimiser had no second view to pin down.</a:t>
-            </a:r>
-          </a:p>
-          <a:p>
-            <a:r>
-              <a:t>So the deficit is coverage, not detail. That matters later.</a:t>
+              <a:t>[60s]</a:t>
+            </a:r>
+          </a:p>
+          <a:p>
+            <a:r>
+              <a:t>Gaussian Splatting reconstructs a 3D scene from photographs. Given enough of them it is excellent — 25.2 dB on this outdoor scene from 219 photos.</a:t>
+            </a:r>
+          </a:p>
+          <a:p>
+            <a:r>
+              <a:t>Cut it to five photos and it collapses to 15.2. That is a ten decibel gap.</a:t>
+            </a:r>
+          </a:p>
+          <a:p>
+            <a:r>
+              <a:t>Photographs are expensive to collect. A diffusion model generates images for free. So the question is whether free images can buy back that gap.</a:t>
             </a:r>
           </a:p>
         </p:txBody>
@@ -1255,32 +1695,22 @@
           <a:lstStyle/>
           <a:p>
             <a:r>
-              <a:t>[60s]</a:t>
-            </a:r>
-          </a:p>
-          <a:p>
-            <a:r>
-              <a:t>I tested three strategies.</a:t>
-            </a:r>
-          </a:p>
-          <a:p>
-            <a:r>
-              <a:t>Inpainting masks part of a real photo and refills it. Same camera, same framing — no new geometry at all. It is the control, really.</a:t>
-            </a:r>
-          </a:p>
-          <a:p>
-            <a:r>
-              <a:t>Outpainting keeps the lens and enlarges the frame. The camera does not move; it just sees wider. That supplies peripheral content.</a:t>
-            </a:r>
-          </a:p>
-          <a:p>
-            <a:r>
-              <a:t>Pose-guided is the ambitious one. Estimate depth, warp the image to a new camera position I choose, and let diffusion fill the holes. It is the only one that invents a genuinely new viewpoint.</a:t>
-            </a:r>
-          </a:p>
-          <a:p>
-            <a:r>
-              <a:t>Each is generated at four ratios, three subset sizes, three seeds.</a:t>
+              <a:t>[40s]</a:t>
+            </a:r>
+          </a:p>
+          <a:p>
+            <a:r>
+              <a:t>This is the same held-out camera reconstructed from 5, 10, 20 and 219 photos.</a:t>
+            </a:r>
+          </a:p>
+          <a:p>
+            <a:r>
+              <a:t>The important thing is what fails at five views. The shape of the truck is broadly right. What costs the ten decibels is the haze, the floaters, and the surfaces the optimiser had no second view to pin down.</a:t>
+            </a:r>
+          </a:p>
+          <a:p>
+            <a:r>
+              <a:t>So the deficit is coverage, not detail. That matters later.</a:t>
             </a:r>
           </a:p>
         </p:txBody>
@@ -1350,27 +1780,32 @@
           <a:lstStyle/>
           <a:p>
             <a:r>
-              <a:t>[55s]</a:t>
-            </a:r>
-          </a:p>
-          <a:p>
-            <a:r>
-              <a:t>The effects here are small, so the measurement has to be careful.</a:t>
-            </a:r>
-          </a:p>
-          <a:p>
-            <a:r>
-              <a:t>Every run of a scene is scored against byte-identical held-out images — I verify that by hash across all 236 runs.</a:t>
-            </a:r>
-          </a:p>
-          <a:p>
-            <a:r>
-              <a:t>Every augmented run is compared against its own seed's baseline. Which five photos you happen to draw matters enormously, and pairing cancels it.</a:t>
-            </a:r>
-          </a:p>
-          <a:p>
-            <a:r>
-              <a:t>And I measured the noise floor: the identical configuration run three times varies by 0.039 dB. So a 0.2 dB effect is real and a 0.03 dB effect is not.</a:t>
+              <a:t>[60s]</a:t>
+            </a:r>
+          </a:p>
+          <a:p>
+            <a:r>
+              <a:t>I tested three strategies.</a:t>
+            </a:r>
+          </a:p>
+          <a:p>
+            <a:r>
+              <a:t>Inpainting masks part of a real photo and refills it. Same camera, same framing — no new geometry at all. It is the control, really.</a:t>
+            </a:r>
+          </a:p>
+          <a:p>
+            <a:r>
+              <a:t>Outpainting keeps the lens and enlarges the frame. The camera does not move; it just sees wider. That supplies peripheral content.</a:t>
+            </a:r>
+          </a:p>
+          <a:p>
+            <a:r>
+              <a:t>Pose-guided is the ambitious one. Estimate depth, warp the image to a new camera position I choose, and let diffusion fill the holes. It is the only one that invents a genuinely new viewpoint.</a:t>
+            </a:r>
+          </a:p>
+          <a:p>
+            <a:r>
+              <a:t>Each is generated at four ratios, three subset sizes, three seeds.</a:t>
             </a:r>
           </a:p>
         </p:txBody>
@@ -1440,32 +1875,32 @@
           <a:lstStyle/>
           <a:p>
             <a:r>
-              <a:t>[75s]</a:t>
-            </a:r>
-          </a:p>
-          <a:p>
-            <a:r>
-              <a:t>This is the main result.</a:t>
-            </a:r>
-          </a:p>
-          <a:p>
-            <a:r>
-              <a:t>Outpainting at the 200 percent ratio. At five real views it gains 0.285 dB. At ten it is zero. At twenty it LOSES 0.618.</a:t>
-            </a:r>
-          </a:p>
-          <a:p>
-            <a:r>
-              <a:t>The treatment is identical. The only thing that changed is how many real photographs it was added to.</a:t>
-            </a:r>
-          </a:p>
-          <a:p>
-            <a:r>
-              <a:t>PAUSE HERE. Let them look at the sign change.</a:t>
-            </a:r>
-          </a:p>
-          <a:p>
-            <a:r>
-              <a:t>For scale: five more real photographs are worth 1.9 dB. Augmentation buys you about a seventh of one photograph, and only while photographs are scarce.</a:t>
+              <a:t>[48s]</a:t>
+            </a:r>
+          </a:p>
+          <a:p>
+            <a:r>
+              <a:t>This is one condition, start to finish.</a:t>
+            </a:r>
+          </a:p>
+          <a:p>
+            <a:r>
+              <a:t>Two hundred and nineteen photographs go through COLMAP for camera poses and sparse points. Then the split, and this is the important box: thirty-two photographs are held out and never trained on, in any run, verified by hash.</a:t>
+            </a:r>
+          </a:p>
+          <a:p>
+            <a:r>
+              <a:t>From the training pool I select k views by farthest-point sampling — five, ten or twenty.</a:t>
+            </a:r>
+          </a:p>
+          <a:p>
+            <a:r>
+              <a:t>Then the fork. The top lane trains on those k real images. The bottom lane sends them through diffusion augmentation first, and trains on k real plus n synthetic.</a:t>
+            </a:r>
+          </a:p>
+          <a:p>
+            <a:r>
+              <a:t>Both lanes hit the same trainer for the same seven thousand iterations and are scored on the same thirty-two held-out photographs. The only thing that differs between the arms is what went into training.</a:t>
             </a:r>
           </a:p>
         </p:txBody>
@@ -1535,17 +1970,27 @@
           <a:lstStyle/>
           <a:p>
             <a:r>
-              <a:t>[40s]</a:t>
-            </a:r>
-          </a:p>
-          <a:p>
-            <a:r>
-              <a:t>The same thing visually. Left pair is five views, right pair is twenty.</a:t>
-            </a:r>
-          </a:p>
-          <a:p>
-            <a:r>
-              <a:t>One caution on this figure: per-view effects scatter several dB either side of the average. So I picked the views closest to the mean effect and printed the per-view number on each. Three arbitrary views can contradict the finding they are supposed to illustrate.</a:t>
+              <a:t>[38s]</a:t>
+            </a:r>
+          </a:p>
+          <a:p>
+            <a:r>
+              <a:t>And this is the grid.</a:t>
+            </a:r>
+          </a:p>
+          <a:p>
+            <a:r>
+              <a:t>Three strategies, four synthetic ratios, three subset sizes, three seeds. A hundred and eight augmented runs, plus baselines, controls and a full-data ceiling.</a:t>
+            </a:r>
+          </a:p>
+          <a:p>
+            <a:r>
+              <a:t>Each tick in a cell is one training run.</a:t>
+            </a:r>
+          </a:p>
+          <a:p>
+            <a:r>
+              <a:t>The critical detail is the pairing. Every augmented cell is compared against the baseline built from the SAME seed's subset — so the luck of which five views got drawn cancels out, instead of being counted as an effect of augmentation.</a:t>
             </a:r>
           </a:p>
         </p:txBody>
@@ -1615,22 +2060,27 @@
           <a:lstStyle/>
           <a:p>
             <a:r>
-              <a:t>[45s]</a:t>
-            </a:r>
-          </a:p>
-          <a:p>
-            <a:r>
-              <a:t>The obvious worry is that this is one scene's quirk. So I repeated the sweep on an indoor room from a different dataset — different capture geometry, different scale.</a:t>
-            </a:r>
-          </a:p>
-          <a:p>
-            <a:r>
-              <a:t>Same sign flip. And indoors the effect is stronger at five views.</a:t>
-            </a:r>
-          </a:p>
-          <a:p>
-            <a:r>
-              <a:t>Note the third number: the baselines scatter 0.52 dB between seeds indoors, against 0.07 outdoors. Which five views you draw matters far more in a room. Without the paired design I could not have resolved the effect at all.</a:t>
+              <a:t>[55s]</a:t>
+            </a:r>
+          </a:p>
+          <a:p>
+            <a:r>
+              <a:t>The effects here are small, so the measurement has to be careful.</a:t>
+            </a:r>
+          </a:p>
+          <a:p>
+            <a:r>
+              <a:t>Every run of a scene is scored against byte-identical held-out images — I verify that by hash across all 236 runs.</a:t>
+            </a:r>
+          </a:p>
+          <a:p>
+            <a:r>
+              <a:t>Every augmented run is compared against its own seed's baseline. Which five photos you happen to draw matters enormously, and pairing cancels it.</a:t>
+            </a:r>
+          </a:p>
+          <a:p>
+            <a:r>
+              <a:t>And I measured the noise floor: the identical configuration run three times varies by 0.039 dB. So a 0.2 dB effect is real and a 0.03 dB effect is not.</a:t>
             </a:r>
           </a:p>
         </p:txBody>
@@ -1700,37 +2150,32 @@
           <a:lstStyle/>
           <a:p>
             <a:r>
-              <a:t>[65s]</a:t>
-            </a:r>
-          </a:p>
-          <a:p>
-            <a:r>
-              <a:t>Here is why the sign flips.</a:t>
-            </a:r>
-          </a:p>
-          <a:p>
-            <a:r>
-              <a:t>Every synthetic view gives you two things at once. Coverage — some part of the scene no real camera saw. And inconsistency — it is invented, so it disagrees with the real photographs.</a:t>
-            </a:r>
-          </a:p>
-          <a:p>
-            <a:r>
-              <a:t>Coverage DECAYS as you add real views. You have already seen that area.</a:t>
-            </a:r>
-          </a:p>
-          <a:p>
-            <a:r>
-              <a:t>Inconsistency does NOT decay. A contradiction is just as harmful at twenty views as at five. Arguably worse, because now it contradicts a better-determined geometry.</a:t>
-            </a:r>
-          </a:p>
-          <a:p>
-            <a:r>
-              <a:t>A shrinking benefit plus a constant cost gives you a sign change. That is the whole mechanism.</a:t>
-            </a:r>
-          </a:p>
-          <a:p>
-            <a:r>
-              <a:t>But that is just a story. So I made it predict things that could fail.</a:t>
+              <a:t>[75s]</a:t>
+            </a:r>
+          </a:p>
+          <a:p>
+            <a:r>
+              <a:t>This is the main result.</a:t>
+            </a:r>
+          </a:p>
+          <a:p>
+            <a:r>
+              <a:t>Outpainting at the 200 percent ratio. At five real views it gains 0.285 dB. At ten it is zero. At twenty it LOSES 0.618.</a:t>
+            </a:r>
+          </a:p>
+          <a:p>
+            <a:r>
+              <a:t>The treatment is identical. The only thing that changed is how many real photographs it was added to.</a:t>
+            </a:r>
+          </a:p>
+          <a:p>
+            <a:r>
+              <a:t>PAUSE HERE. Let them look at the sign change.</a:t>
+            </a:r>
+          </a:p>
+          <a:p>
+            <a:r>
+              <a:t>For scale: five more real photographs are worth 1.9 dB. Augmentation buys you about a seventh of one photograph, and only while photographs are scarce.</a:t>
             </a:r>
           </a:p>
         </p:txBody>
@@ -4764,7 +5209,7 @@
                   <a:srgbClr val="0B6E7F"/>
                 </a:solidFill>
               </a:rPr>
-              <a:t>UNIVERSITÀ DEGLI STUDI DI GENOVA · ROBOTICS</a:t>
+              <a:t>UNIVERSITÀ DEGLI STUDI DI GENOVA · DIBRIS · VIRTUAL REALITY FOR ROBOTICS</a:t>
             </a:r>
           </a:p>
         </p:txBody>
@@ -4797,7 +5242,7 @@
                   <a:srgbClr val="16202A"/>
                 </a:solidFill>
               </a:rPr>
-              <a:t>When does a generated photographhelp a 3D reconstruction?</a:t>
+              <a:t>Few-Shot Gaussian Splatting withDiffusion-Based Data Augmentation</a:t>
             </a:r>
           </a:p>
         </p:txBody>
@@ -4810,7 +5255,7 @@
         </p:nvSpPr>
         <p:spPr>
           <a:xfrm>
-            <a:off x="658368" y="2029968"/>
+            <a:off x="658368" y="2350008"/>
             <a:ext cx="2547289" cy="1828800"/>
           </a:xfrm>
           <a:prstGeom prst="rect">
@@ -4853,7 +5298,7 @@
         </p:nvSpPr>
         <p:spPr>
           <a:xfrm>
-            <a:off x="3434257" y="2029968"/>
+            <a:off x="3434257" y="2350008"/>
             <a:ext cx="2547289" cy="1828800"/>
           </a:xfrm>
           <a:prstGeom prst="rect">
@@ -4896,7 +5341,7 @@
         </p:nvSpPr>
         <p:spPr>
           <a:xfrm>
-            <a:off x="6210146" y="2029968"/>
+            <a:off x="6210146" y="2350008"/>
             <a:ext cx="2547289" cy="1828800"/>
           </a:xfrm>
           <a:prstGeom prst="rect">
@@ -4939,7 +5384,7 @@
         </p:nvSpPr>
         <p:spPr>
           <a:xfrm>
-            <a:off x="8986035" y="2029968"/>
+            <a:off x="8986035" y="2350008"/>
             <a:ext cx="2547289" cy="1828800"/>
           </a:xfrm>
           <a:prstGeom prst="rect">
@@ -4982,8 +5427,8 @@
         </p:nvSpPr>
         <p:spPr>
           <a:xfrm>
-            <a:off x="658368" y="3995928"/>
-            <a:ext cx="10874959" cy="2404872"/>
+            <a:off x="658368" y="4315968"/>
+            <a:ext cx="10874959" cy="2084832"/>
           </a:xfrm>
           <a:prstGeom prst="rect">
             <a:avLst/>
@@ -5007,7 +5452,7 @@
                   <a:srgbClr val="5C6E78"/>
                 </a:solidFill>
               </a:rPr>
-              <a:t>Few-shot Gaussian Splatting with diffusion-based data augmentation — and the boundary where augmentation stops helping and starts destroying.</a:t>
+              <a:t>When does a generated photograph help a 3D reconstruction — and when does it start destroying one?</a:t>
             </a:r>
           </a:p>
           <a:p>
@@ -5022,7 +5467,7 @@
                   <a:srgbClr val="5C6E78"/>
                 </a:solidFill>
               </a:rPr>
-              <a:t>Mohamed Eyad</a:t>
+              <a:t>Mohamed Eyad · Advisors: Prof. Fabio Solari, Prof. Manuela Chessa</a:t>
             </a:r>
           </a:p>
         </p:txBody>
@@ -5036,6 +5481,695 @@
 </file>
 
 <file path=ppt/slides/slide10.xml><?xml version="1.0" encoding="utf-8"?>
+<p:sld xmlns:a="http://schemas.openxmlformats.org/drawingml/2006/main" xmlns:p="http://schemas.openxmlformats.org/presentationml/2006/main" xmlns:r="http://schemas.openxmlformats.org/officeDocument/2006/relationships">
+  <p:cSld>
+    <p:spTree>
+      <p:nvGrpSpPr>
+        <p:cNvPr id="1" name=""/>
+        <p:cNvGrpSpPr/>
+        <p:nvPr/>
+      </p:nvGrpSpPr>
+      <p:grpSpPr/>
+      <p:sp>
+        <p:nvSpPr>
+          <p:cNvPr id="2" name="TextBox 1"/>
+          <p:cNvSpPr txBox="1"/>
+          <p:nvPr/>
+        </p:nvSpPr>
+        <p:spPr>
+          <a:xfrm>
+            <a:off x="658368" y="502920"/>
+            <a:ext cx="10874959" cy="292608"/>
+          </a:xfrm>
+          <a:prstGeom prst="rect">
+            <a:avLst/>
+          </a:prstGeom>
+          <a:noFill/>
+        </p:spPr>
+        <p:txBody>
+          <a:bodyPr wrap="square">
+            <a:spAutoFit/>
+          </a:bodyPr>
+          <a:lstStyle/>
+          <a:p>
+            <a:r>
+              <a:rPr sz="1100" b="1">
+                <a:solidFill>
+                  <a:srgbClr val="0B6E7F"/>
+                </a:solidFill>
+              </a:rPr>
+              <a:t>RESULT · WHAT IT LOOKS LIKE</a:t>
+            </a:r>
+          </a:p>
+        </p:txBody>
+      </p:sp>
+      <p:pic>
+        <p:nvPicPr>
+          <p:cNvPr id="3" name="Picture 2" descr="image.jpg"/>
+          <p:cNvPicPr>
+            <a:picLocks noChangeAspect="1"/>
+          </p:cNvPicPr>
+          <p:nvPr/>
+        </p:nvPicPr>
+        <p:blipFill>
+          <a:blip r:embed="rId2"/>
+          <a:stretch>
+            <a:fillRect/>
+          </a:stretch>
+        </p:blipFill>
+        <p:spPr>
+          <a:xfrm>
+            <a:off x="658368" y="886968"/>
+            <a:ext cx="10874959" cy="4164470"/>
+          </a:xfrm>
+          <a:prstGeom prst="rect">
+            <a:avLst/>
+          </a:prstGeom>
+        </p:spPr>
+      </p:pic>
+    </p:spTree>
+  </p:cSld>
+  <p:clrMapOvr>
+    <a:masterClrMapping/>
+  </p:clrMapOvr>
+</p:sld>
+</file>
+
+<file path=ppt/slides/slide11.xml><?xml version="1.0" encoding="utf-8"?>
+<p:sld xmlns:a="http://schemas.openxmlformats.org/drawingml/2006/main" xmlns:p="http://schemas.openxmlformats.org/presentationml/2006/main" xmlns:r="http://schemas.openxmlformats.org/officeDocument/2006/relationships">
+  <p:cSld>
+    <p:spTree>
+      <p:nvGrpSpPr>
+        <p:cNvPr id="1" name=""/>
+        <p:cNvGrpSpPr/>
+        <p:nvPr/>
+      </p:nvGrpSpPr>
+      <p:grpSpPr/>
+      <p:sp>
+        <p:nvSpPr>
+          <p:cNvPr id="2" name="TextBox 1"/>
+          <p:cNvSpPr txBox="1"/>
+          <p:nvPr/>
+        </p:nvSpPr>
+        <p:spPr>
+          <a:xfrm>
+            <a:off x="658368" y="502920"/>
+            <a:ext cx="10874959" cy="292608"/>
+          </a:xfrm>
+          <a:prstGeom prst="rect">
+            <a:avLst/>
+          </a:prstGeom>
+          <a:noFill/>
+        </p:spPr>
+        <p:txBody>
+          <a:bodyPr wrap="square">
+            <a:spAutoFit/>
+          </a:bodyPr>
+          <a:lstStyle/>
+          <a:p>
+            <a:r>
+              <a:rPr sz="1100" b="1">
+                <a:solidFill>
+                  <a:srgbClr val="0B6E7F"/>
+                </a:solidFill>
+              </a:rPr>
+              <a:t>RESULT · THE WHOLE GRID</a:t>
+            </a:r>
+          </a:p>
+        </p:txBody>
+      </p:sp>
+      <p:sp>
+        <p:nvSpPr>
+          <p:cNvPr id="3" name="TextBox 2"/>
+          <p:cNvSpPr txBox="1"/>
+          <p:nvPr/>
+        </p:nvSpPr>
+        <p:spPr>
+          <a:xfrm>
+            <a:off x="658368" y="886968"/>
+            <a:ext cx="10874959" cy="914400"/>
+          </a:xfrm>
+          <a:prstGeom prst="rect">
+            <a:avLst/>
+          </a:prstGeom>
+          <a:noFill/>
+        </p:spPr>
+        <p:txBody>
+          <a:bodyPr wrap="square">
+            <a:spAutoFit/>
+          </a:bodyPr>
+          <a:lstStyle/>
+          <a:p>
+            <a:r>
+              <a:rPr sz="2600" b="1">
+                <a:solidFill>
+                  <a:srgbClr val="16202A"/>
+                </a:solidFill>
+              </a:rPr>
+              <a:t>Every cell, in one picture</a:t>
+            </a:r>
+          </a:p>
+        </p:txBody>
+      </p:sp>
+      <p:pic>
+        <p:nvPicPr>
+          <p:cNvPr id="4" name="Picture 3" descr="image.jpg"/>
+          <p:cNvPicPr>
+            <a:picLocks noChangeAspect="1"/>
+          </p:cNvPicPr>
+          <p:nvPr/>
+        </p:nvPicPr>
+        <p:blipFill>
+          <a:blip r:embed="rId2"/>
+          <a:stretch>
+            <a:fillRect/>
+          </a:stretch>
+        </p:blipFill>
+        <p:spPr>
+          <a:xfrm>
+            <a:off x="658368" y="1755648"/>
+            <a:ext cx="10874959" cy="3783341"/>
+          </a:xfrm>
+          <a:prstGeom prst="rect">
+            <a:avLst/>
+          </a:prstGeom>
+        </p:spPr>
+      </p:pic>
+    </p:spTree>
+  </p:cSld>
+  <p:clrMapOvr>
+    <a:masterClrMapping/>
+  </p:clrMapOvr>
+</p:sld>
+</file>
+
+<file path=ppt/slides/slide12.xml><?xml version="1.0" encoding="utf-8"?>
+<p:sld xmlns:a="http://schemas.openxmlformats.org/drawingml/2006/main" xmlns:p="http://schemas.openxmlformats.org/presentationml/2006/main" xmlns:r="http://schemas.openxmlformats.org/officeDocument/2006/relationships">
+  <p:cSld>
+    <p:spTree>
+      <p:nvGrpSpPr>
+        <p:cNvPr id="1" name=""/>
+        <p:cNvGrpSpPr/>
+        <p:nvPr/>
+      </p:nvGrpSpPr>
+      <p:grpSpPr/>
+      <p:sp>
+        <p:nvSpPr>
+          <p:cNvPr id="2" name="TextBox 1"/>
+          <p:cNvSpPr txBox="1"/>
+          <p:nvPr/>
+        </p:nvSpPr>
+        <p:spPr>
+          <a:xfrm>
+            <a:off x="658368" y="502920"/>
+            <a:ext cx="10874959" cy="292608"/>
+          </a:xfrm>
+          <a:prstGeom prst="rect">
+            <a:avLst/>
+          </a:prstGeom>
+          <a:noFill/>
+        </p:spPr>
+        <p:txBody>
+          <a:bodyPr wrap="square">
+            <a:spAutoFit/>
+          </a:bodyPr>
+          <a:lstStyle/>
+          <a:p>
+            <a:r>
+              <a:rPr sz="1100" b="1">
+                <a:solidFill>
+                  <a:srgbClr val="0B6E7F"/>
+                </a:solidFill>
+              </a:rPr>
+              <a:t>GENERALISATION</a:t>
+            </a:r>
+          </a:p>
+        </p:txBody>
+      </p:sp>
+      <p:sp>
+        <p:nvSpPr>
+          <p:cNvPr id="3" name="TextBox 2"/>
+          <p:cNvSpPr txBox="1"/>
+          <p:nvPr/>
+        </p:nvSpPr>
+        <p:spPr>
+          <a:xfrm>
+            <a:off x="658368" y="886968"/>
+            <a:ext cx="10874959" cy="914400"/>
+          </a:xfrm>
+          <a:prstGeom prst="rect">
+            <a:avLst/>
+          </a:prstGeom>
+          <a:noFill/>
+        </p:spPr>
+        <p:txBody>
+          <a:bodyPr wrap="square">
+            <a:spAutoFit/>
+          </a:bodyPr>
+          <a:lstStyle/>
+          <a:p>
+            <a:r>
+              <a:rPr sz="2600" b="1">
+                <a:solidFill>
+                  <a:srgbClr val="16202A"/>
+                </a:solidFill>
+              </a:rPr>
+              <a:t>It reproduces indoors</a:t>
+            </a:r>
+          </a:p>
+        </p:txBody>
+      </p:sp>
+      <p:sp>
+        <p:nvSpPr>
+          <p:cNvPr id="4" name="TextBox 3"/>
+          <p:cNvSpPr txBox="1"/>
+          <p:nvPr/>
+        </p:nvSpPr>
+        <p:spPr>
+          <a:xfrm>
+            <a:off x="658368" y="1755648"/>
+            <a:ext cx="3472586" cy="1828800"/>
+          </a:xfrm>
+          <a:prstGeom prst="rect">
+            <a:avLst/>
+          </a:prstGeom>
+          <a:noFill/>
+        </p:spPr>
+        <p:txBody>
+          <a:bodyPr wrap="square">
+            <a:spAutoFit/>
+          </a:bodyPr>
+          <a:lstStyle/>
+          <a:p>
+            <a:r>
+              <a:rPr sz="3000" b="1">
+                <a:solidFill>
+                  <a:srgbClr val="16202A"/>
+                </a:solidFill>
+              </a:rPr>
+              <a:t>+0.989</a:t>
+            </a:r>
+          </a:p>
+          <a:p>
+            <a:r>
+              <a:rPr sz="1200">
+                <a:solidFill>
+                  <a:srgbClr val="5C6E78"/>
+                </a:solidFill>
+              </a:rPr>
+              <a:t>dB at k = 5 — stronger than outdoors</a:t>
+            </a:r>
+          </a:p>
+        </p:txBody>
+      </p:sp>
+      <p:sp>
+        <p:nvSpPr>
+          <p:cNvPr id="5" name="TextBox 4"/>
+          <p:cNvSpPr txBox="1"/>
+          <p:nvPr/>
+        </p:nvSpPr>
+        <p:spPr>
+          <a:xfrm>
+            <a:off x="4359554" y="1755648"/>
+            <a:ext cx="3472586" cy="1828800"/>
+          </a:xfrm>
+          <a:prstGeom prst="rect">
+            <a:avLst/>
+          </a:prstGeom>
+          <a:noFill/>
+        </p:spPr>
+        <p:txBody>
+          <a:bodyPr wrap="square">
+            <a:spAutoFit/>
+          </a:bodyPr>
+          <a:lstStyle/>
+          <a:p>
+            <a:r>
+              <a:rPr sz="3000" b="1">
+                <a:solidFill>
+                  <a:srgbClr val="16202A"/>
+                </a:solidFill>
+              </a:rPr>
+              <a:t>-0.242</a:t>
+            </a:r>
+          </a:p>
+          <a:p>
+            <a:r>
+              <a:rPr sz="1200">
+                <a:solidFill>
+                  <a:srgbClr val="5C6E78"/>
+                </a:solidFill>
+              </a:rPr>
+              <a:t>dB at k = 20 — the sign flip repeats</a:t>
+            </a:r>
+          </a:p>
+        </p:txBody>
+      </p:sp>
+      <p:sp>
+        <p:nvSpPr>
+          <p:cNvPr id="6" name="TextBox 5"/>
+          <p:cNvSpPr txBox="1"/>
+          <p:nvPr/>
+        </p:nvSpPr>
+        <p:spPr>
+          <a:xfrm>
+            <a:off x="8060740" y="1755648"/>
+            <a:ext cx="3472586" cy="1828800"/>
+          </a:xfrm>
+          <a:prstGeom prst="rect">
+            <a:avLst/>
+          </a:prstGeom>
+          <a:noFill/>
+        </p:spPr>
+        <p:txBody>
+          <a:bodyPr wrap="square">
+            <a:spAutoFit/>
+          </a:bodyPr>
+          <a:lstStyle/>
+          <a:p>
+            <a:r>
+              <a:rPr sz="3000" b="1">
+                <a:solidFill>
+                  <a:srgbClr val="16202A"/>
+                </a:solidFill>
+              </a:rPr>
+              <a:t>1.68</a:t>
+            </a:r>
+          </a:p>
+          <a:p>
+            <a:r>
+              <a:rPr sz="1200">
+                <a:solidFill>
+                  <a:srgbClr val="5C6E78"/>
+                </a:solidFill>
+              </a:rPr>
+              <a:t>dB baseline scatter between seeds — which five views you draw matters far more in a room</a:t>
+            </a:r>
+          </a:p>
+        </p:txBody>
+      </p:sp>
+      <p:sp>
+        <p:nvSpPr>
+          <p:cNvPr id="7" name="TextBox 6"/>
+          <p:cNvSpPr txBox="1"/>
+          <p:nvPr/>
+        </p:nvSpPr>
+        <p:spPr>
+          <a:xfrm>
+            <a:off x="658368" y="3721608"/>
+            <a:ext cx="10874959" cy="2679192"/>
+          </a:xfrm>
+          <a:prstGeom prst="rect">
+            <a:avLst/>
+          </a:prstGeom>
+          <a:noFill/>
+        </p:spPr>
+        <p:txBody>
+          <a:bodyPr wrap="square">
+            <a:spAutoFit/>
+          </a:bodyPr>
+          <a:lstStyle/>
+          <a:p>
+            <a:pPr>
+              <a:spcAft>
+                <a:spcPts val="1000"/>
+              </a:spcAft>
+            </a:pPr>
+            <a:r>
+              <a:rPr sz="1600">
+                <a:solidFill>
+                  <a:srgbClr val="16202A"/>
+                </a:solidFill>
+              </a:rPr>
+              <a:t>34 further runs repeat the outpainting sweep on drjohnson (Deep Blending, 230 views, an indoor room) — a different capture regime, a different scene scale.</a:t>
+            </a:r>
+          </a:p>
+          <a:p>
+            <a:pPr>
+              <a:spcAft>
+                <a:spcPts val="1000"/>
+              </a:spcAft>
+            </a:pPr>
+            <a:r>
+              <a:rPr sz="1400">
+                <a:solidFill>
+                  <a:srgbClr val="16202A"/>
+                </a:solidFill>
+              </a:rPr>
+              <a:t>Indoors all three metrics move together, where on truck outpainting bought PSNR while SSIM stayed flat. Agreement across three metrics with different failure modes is much harder to get by chance than agreement in one.</a:t>
+            </a:r>
+          </a:p>
+        </p:txBody>
+      </p:sp>
+    </p:spTree>
+  </p:cSld>
+  <p:clrMapOvr>
+    <a:masterClrMapping/>
+  </p:clrMapOvr>
+</p:sld>
+</file>
+
+<file path=ppt/slides/slide13.xml><?xml version="1.0" encoding="utf-8"?>
+<p:sld xmlns:a="http://schemas.openxmlformats.org/drawingml/2006/main" xmlns:p="http://schemas.openxmlformats.org/presentationml/2006/main" xmlns:r="http://schemas.openxmlformats.org/officeDocument/2006/relationships">
+  <p:cSld>
+    <p:spTree>
+      <p:nvGrpSpPr>
+        <p:cNvPr id="1" name=""/>
+        <p:cNvGrpSpPr/>
+        <p:nvPr/>
+      </p:nvGrpSpPr>
+      <p:grpSpPr/>
+      <p:sp>
+        <p:nvSpPr>
+          <p:cNvPr id="2" name="TextBox 1"/>
+          <p:cNvSpPr txBox="1"/>
+          <p:nvPr/>
+        </p:nvSpPr>
+        <p:spPr>
+          <a:xfrm>
+            <a:off x="658368" y="502920"/>
+            <a:ext cx="10874959" cy="292608"/>
+          </a:xfrm>
+          <a:prstGeom prst="rect">
+            <a:avLst/>
+          </a:prstGeom>
+          <a:noFill/>
+        </p:spPr>
+        <p:txBody>
+          <a:bodyPr wrap="square">
+            <a:spAutoFit/>
+          </a:bodyPr>
+          <a:lstStyle/>
+          <a:p>
+            <a:r>
+              <a:rPr sz="1100" b="1">
+                <a:solidFill>
+                  <a:srgbClr val="0B6E7F"/>
+                </a:solidFill>
+              </a:rPr>
+              <a:t>EXPLANATION</a:t>
+            </a:r>
+          </a:p>
+        </p:txBody>
+      </p:sp>
+      <p:sp>
+        <p:nvSpPr>
+          <p:cNvPr id="3" name="TextBox 2"/>
+          <p:cNvSpPr txBox="1"/>
+          <p:nvPr/>
+        </p:nvSpPr>
+        <p:spPr>
+          <a:xfrm>
+            <a:off x="658368" y="886968"/>
+            <a:ext cx="10874959" cy="914400"/>
+          </a:xfrm>
+          <a:prstGeom prst="rect">
+            <a:avLst/>
+          </a:prstGeom>
+          <a:noFill/>
+        </p:spPr>
+        <p:txBody>
+          <a:bodyPr wrap="square">
+            <a:spAutoFit/>
+          </a:bodyPr>
+          <a:lstStyle/>
+          <a:p>
+            <a:r>
+              <a:rPr sz="2600" b="1">
+                <a:solidFill>
+                  <a:srgbClr val="16202A"/>
+                </a:solidFill>
+              </a:rPr>
+              <a:t>Two terms, one decaying and one constant</a:t>
+            </a:r>
+          </a:p>
+        </p:txBody>
+      </p:sp>
+      <p:sp>
+        <p:nvSpPr>
+          <p:cNvPr id="4" name="TextBox 3"/>
+          <p:cNvSpPr txBox="1"/>
+          <p:nvPr/>
+        </p:nvSpPr>
+        <p:spPr>
+          <a:xfrm>
+            <a:off x="658368" y="1755648"/>
+            <a:ext cx="5323179" cy="1828800"/>
+          </a:xfrm>
+          <a:prstGeom prst="rect">
+            <a:avLst/>
+          </a:prstGeom>
+          <a:noFill/>
+        </p:spPr>
+        <p:txBody>
+          <a:bodyPr wrap="square">
+            <a:spAutoFit/>
+          </a:bodyPr>
+          <a:lstStyle/>
+          <a:p/>
+          <a:p>
+            <a:r>
+              <a:rPr sz="1500" b="1">
+                <a:solidFill>
+                  <a:srgbClr val="16202A"/>
+                </a:solidFill>
+              </a:rPr>
+              <a:t>Coverage — decays</a:t>
+            </a:r>
+          </a:p>
+          <a:p>
+            <a:r>
+              <a:rPr sz="1200">
+                <a:solidFill>
+                  <a:srgbClr val="5C6E78"/>
+                </a:solidFill>
+              </a:rPr>
+              <a:t>A synthetic view supplies scene content no real camera saw. That is worth a lot at five views and very little at twenty: the per-view value of a real photograph falls by an order of magnitude across the same range.</a:t>
+            </a:r>
+          </a:p>
+        </p:txBody>
+      </p:sp>
+      <p:sp>
+        <p:nvSpPr>
+          <p:cNvPr id="5" name="TextBox 4"/>
+          <p:cNvSpPr txBox="1"/>
+          <p:nvPr/>
+        </p:nvSpPr>
+        <p:spPr>
+          <a:xfrm>
+            <a:off x="6210147" y="1755648"/>
+            <a:ext cx="5323179" cy="1828800"/>
+          </a:xfrm>
+          <a:prstGeom prst="rect">
+            <a:avLst/>
+          </a:prstGeom>
+          <a:noFill/>
+        </p:spPr>
+        <p:txBody>
+          <a:bodyPr wrap="square">
+            <a:spAutoFit/>
+          </a:bodyPr>
+          <a:lstStyle/>
+          <a:p/>
+          <a:p>
+            <a:r>
+              <a:rPr sz="1500" b="1">
+                <a:solidFill>
+                  <a:srgbClr val="16202A"/>
+                </a:solidFill>
+              </a:rPr>
+              <a:t>Inconsistency — does not decay</a:t>
+            </a:r>
+          </a:p>
+          <a:p>
+            <a:r>
+              <a:rPr sz="1200">
+                <a:solidFill>
+                  <a:srgbClr val="5C6E78"/>
+                </a:solidFill>
+              </a:rPr>
+              <a:t>A fabricated view contradicts the others. A contradiction is just as harmful at twenty views as at five — arguably worse, because it now contradicts a better-determined geometry.</a:t>
+            </a:r>
+          </a:p>
+        </p:txBody>
+      </p:sp>
+      <p:sp>
+        <p:nvSpPr>
+          <p:cNvPr id="6" name="TextBox 5"/>
+          <p:cNvSpPr txBox="1"/>
+          <p:nvPr/>
+        </p:nvSpPr>
+        <p:spPr>
+          <a:xfrm>
+            <a:off x="658368" y="3721608"/>
+            <a:ext cx="10874959" cy="2679192"/>
+          </a:xfrm>
+          <a:prstGeom prst="rect">
+            <a:avLst/>
+          </a:prstGeom>
+          <a:noFill/>
+        </p:spPr>
+        <p:txBody>
+          <a:bodyPr wrap="square">
+            <a:spAutoFit/>
+          </a:bodyPr>
+          <a:lstStyle/>
+          <a:p>
+            <a:pPr>
+              <a:spcAft>
+                <a:spcPts val="1000"/>
+              </a:spcAft>
+            </a:pPr>
+            <a:r>
+              <a:rPr sz="1400">
+                <a:solidFill>
+                  <a:srgbClr val="16202A"/>
+                </a:solidFill>
+              </a:rPr>
+              <a:t>A synthetic view supplies scene content no real camera saw. That is worth a lot at five views and very little at twenty: the per-view value of a real photograph falls by an order of magnitude across the same range.</a:t>
+            </a:r>
+          </a:p>
+          <a:p>
+            <a:pPr>
+              <a:spcAft>
+                <a:spcPts val="1000"/>
+              </a:spcAft>
+            </a:pPr>
+            <a:r>
+              <a:rPr sz="1400">
+                <a:solidFill>
+                  <a:srgbClr val="16202A"/>
+                </a:solidFill>
+              </a:rPr>
+              <a:t>A fabricated view contradicts the others. A contradiction is just as harmful at twenty views as at five — arguably worse, because it now contradicts a better-determined geometry.</a:t>
+            </a:r>
+          </a:p>
+          <a:p>
+            <a:pPr>
+              <a:spcAft>
+                <a:spcPts val="1000"/>
+              </a:spcAft>
+            </a:pPr>
+            <a:r>
+              <a:rPr sz="1400">
+                <a:solidFill>
+                  <a:srgbClr val="16202A"/>
+                </a:solidFill>
+              </a:rPr>
+              <a:t>A decaying benefit plus a roughly constant cost is sufficient to produce a sign change. That is an explanation, and explanations are cheap — so it was made to predict something that could fail.</a:t>
+            </a:r>
+          </a:p>
+        </p:txBody>
+      </p:sp>
+    </p:spTree>
+  </p:cSld>
+  <p:clrMapOvr>
+    <a:masterClrMapping/>
+  </p:clrMapOvr>
+</p:sld>
+</file>
+
+<file path=ppt/slides/slide14.xml><?xml version="1.0" encoding="utf-8"?>
 <p:sld xmlns:a="http://schemas.openxmlformats.org/drawingml/2006/main" xmlns:p="http://schemas.openxmlformats.org/presentationml/2006/main" xmlns:r="http://schemas.openxmlformats.org/officeDocument/2006/relationships">
   <p:cSld>
     <p:spTree>
@@ -5426,7 +6560,7 @@
 </p:sld>
 </file>
 
-<file path=ppt/slides/slide11.xml><?xml version="1.0" encoding="utf-8"?>
+<file path=ppt/slides/slide15.xml><?xml version="1.0" encoding="utf-8"?>
 <p:sld xmlns:a="http://schemas.openxmlformats.org/drawingml/2006/main" xmlns:p="http://schemas.openxmlformats.org/presentationml/2006/main" xmlns:r="http://schemas.openxmlformats.org/officeDocument/2006/relationships">
   <p:cSld>
     <p:spTree>
@@ -5750,7 +6884,7 @@
 </p:sld>
 </file>
 
-<file path=ppt/slides/slide12.xml><?xml version="1.0" encoding="utf-8"?>
+<file path=ppt/slides/slide16.xml><?xml version="1.0" encoding="utf-8"?>
 <p:sld xmlns:a="http://schemas.openxmlformats.org/drawingml/2006/main" xmlns:p="http://schemas.openxmlformats.org/presentationml/2006/main" xmlns:r="http://schemas.openxmlformats.org/officeDocument/2006/relationships">
   <p:cSld>
     <p:spTree>
@@ -5917,7 +7051,7 @@
 </p:sld>
 </file>
 
-<file path=ppt/slides/slide13.xml><?xml version="1.0" encoding="utf-8"?>
+<file path=ppt/slides/slide17.xml><?xml version="1.0" encoding="utf-8"?>
 <p:sld xmlns:a="http://schemas.openxmlformats.org/drawingml/2006/main" xmlns:p="http://schemas.openxmlformats.org/presentationml/2006/main" xmlns:r="http://schemas.openxmlformats.org/officeDocument/2006/relationships">
   <p:cSld>
     <p:spTree>
@@ -6099,7 +7233,7 @@
 </p:sld>
 </file>
 
-<file path=ppt/slides/slide14.xml><?xml version="1.0" encoding="utf-8"?>
+<file path=ppt/slides/slide18.xml><?xml version="1.0" encoding="utf-8"?>
 <p:sld xmlns:a="http://schemas.openxmlformats.org/drawingml/2006/main" xmlns:p="http://schemas.openxmlformats.org/presentationml/2006/main" xmlns:r="http://schemas.openxmlformats.org/officeDocument/2006/relationships">
   <p:cSld>
     <p:spTree>
@@ -6224,6 +7358,272 @@
                 </a:solidFill>
               </a:rPr>
               <a:t>242 runs · 2 scenes · every held-out set hash-verified identical within its scene · code and full report in the repository.</a:t>
+            </a:r>
+          </a:p>
+        </p:txBody>
+      </p:sp>
+    </p:spTree>
+  </p:cSld>
+  <p:clrMapOvr>
+    <a:masterClrMapping/>
+  </p:clrMapOvr>
+</p:sld>
+</file>
+
+<file path=ppt/slides/slide19.xml><?xml version="1.0" encoding="utf-8"?>
+<p:sld xmlns:a="http://schemas.openxmlformats.org/drawingml/2006/main" xmlns:p="http://schemas.openxmlformats.org/presentationml/2006/main" xmlns:r="http://schemas.openxmlformats.org/officeDocument/2006/relationships">
+  <p:cSld>
+    <p:spTree>
+      <p:nvGrpSpPr>
+        <p:cNvPr id="1" name=""/>
+        <p:cNvGrpSpPr/>
+        <p:nvPr/>
+      </p:nvGrpSpPr>
+      <p:grpSpPr/>
+      <p:sp>
+        <p:nvSpPr>
+          <p:cNvPr id="2" name="TextBox 1"/>
+          <p:cNvSpPr txBox="1"/>
+          <p:nvPr/>
+        </p:nvSpPr>
+        <p:spPr>
+          <a:xfrm>
+            <a:off x="658368" y="502920"/>
+            <a:ext cx="10874959" cy="292608"/>
+          </a:xfrm>
+          <a:prstGeom prst="rect">
+            <a:avLst/>
+          </a:prstGeom>
+          <a:noFill/>
+        </p:spPr>
+        <p:txBody>
+          <a:bodyPr wrap="square">
+            <a:spAutoFit/>
+          </a:bodyPr>
+          <a:lstStyle/>
+          <a:p>
+            <a:r>
+              <a:rPr sz="1100" b="1">
+                <a:solidFill>
+                  <a:srgbClr val="0B6E7F"/>
+                </a:solidFill>
+              </a:rPr>
+              <a:t>THANK YOU</a:t>
+            </a:r>
+          </a:p>
+        </p:txBody>
+      </p:sp>
+      <p:sp>
+        <p:nvSpPr>
+          <p:cNvPr id="3" name="TextBox 2"/>
+          <p:cNvSpPr txBox="1"/>
+          <p:nvPr/>
+        </p:nvSpPr>
+        <p:spPr>
+          <a:xfrm>
+            <a:off x="658368" y="886968"/>
+            <a:ext cx="10874959" cy="1371600"/>
+          </a:xfrm>
+          <a:prstGeom prst="rect">
+            <a:avLst/>
+          </a:prstGeom>
+          <a:noFill/>
+        </p:spPr>
+        <p:txBody>
+          <a:bodyPr wrap="square">
+            <a:spAutoFit/>
+          </a:bodyPr>
+          <a:lstStyle/>
+          <a:p>
+            <a:r>
+              <a:rPr sz="3400" b="1">
+                <a:solidFill>
+                  <a:srgbClr val="16202A"/>
+                </a:solidFill>
+              </a:rPr>
+              <a:t>Thank you</a:t>
+            </a:r>
+          </a:p>
+        </p:txBody>
+      </p:sp>
+      <p:sp>
+        <p:nvSpPr>
+          <p:cNvPr id="4" name="TextBox 3"/>
+          <p:cNvSpPr txBox="1"/>
+          <p:nvPr/>
+        </p:nvSpPr>
+        <p:spPr>
+          <a:xfrm>
+            <a:off x="658368" y="2029968"/>
+            <a:ext cx="3472586" cy="1828800"/>
+          </a:xfrm>
+          <a:prstGeom prst="rect">
+            <a:avLst/>
+          </a:prstGeom>
+          <a:noFill/>
+        </p:spPr>
+        <p:txBody>
+          <a:bodyPr wrap="square">
+            <a:spAutoFit/>
+          </a:bodyPr>
+          <a:lstStyle/>
+          <a:p>
+            <a:r>
+              <a:rPr sz="3000" b="1">
+                <a:solidFill>
+                  <a:srgbClr val="16202A"/>
+                </a:solidFill>
+              </a:rPr>
+              <a:t>242</a:t>
+            </a:r>
+          </a:p>
+          <a:p>
+            <a:r>
+              <a:rPr sz="1200">
+                <a:solidFill>
+                  <a:srgbClr val="5C6E78"/>
+                </a:solidFill>
+              </a:rPr>
+              <a:t>training runs, every number read programmatically from runs/*/results.json</a:t>
+            </a:r>
+          </a:p>
+        </p:txBody>
+      </p:sp>
+      <p:sp>
+        <p:nvSpPr>
+          <p:cNvPr id="5" name="TextBox 4"/>
+          <p:cNvSpPr txBox="1"/>
+          <p:nvPr/>
+        </p:nvSpPr>
+        <p:spPr>
+          <a:xfrm>
+            <a:off x="4359554" y="2029968"/>
+            <a:ext cx="3472586" cy="1828800"/>
+          </a:xfrm>
+          <a:prstGeom prst="rect">
+            <a:avLst/>
+          </a:prstGeom>
+          <a:noFill/>
+        </p:spPr>
+        <p:txBody>
+          <a:bodyPr wrap="square">
+            <a:spAutoFit/>
+          </a:bodyPr>
+          <a:lstStyle/>
+          <a:p>
+            <a:r>
+              <a:rPr sz="3000" b="1">
+                <a:solidFill>
+                  <a:srgbClr val="16202A"/>
+                </a:solidFill>
+              </a:rPr>
+              <a:t>2</a:t>
+            </a:r>
+          </a:p>
+          <a:p>
+            <a:r>
+              <a:rPr sz="1200">
+                <a:solidFill>
+                  <a:srgbClr val="5C6E78"/>
+                </a:solidFill>
+              </a:rPr>
+              <a:t>scenes, an outdoor object and an indoor room</a:t>
+            </a:r>
+          </a:p>
+        </p:txBody>
+      </p:sp>
+      <p:sp>
+        <p:nvSpPr>
+          <p:cNvPr id="6" name="TextBox 5"/>
+          <p:cNvSpPr txBox="1"/>
+          <p:nvPr/>
+        </p:nvSpPr>
+        <p:spPr>
+          <a:xfrm>
+            <a:off x="8060740" y="2029968"/>
+            <a:ext cx="3472586" cy="1828800"/>
+          </a:xfrm>
+          <a:prstGeom prst="rect">
+            <a:avLst/>
+          </a:prstGeom>
+          <a:noFill/>
+        </p:spPr>
+        <p:txBody>
+          <a:bodyPr wrap="square">
+            <a:spAutoFit/>
+          </a:bodyPr>
+          <a:lstStyle/>
+          <a:p>
+            <a:r>
+              <a:rPr sz="3000" b="1">
+                <a:solidFill>
+                  <a:srgbClr val="16202A"/>
+                </a:solidFill>
+              </a:rPr>
+              <a:t>4</a:t>
+            </a:r>
+          </a:p>
+          <a:p>
+            <a:r>
+              <a:rPr sz="1200">
+                <a:solidFill>
+                  <a:srgbClr val="5C6E78"/>
+                </a:solidFill>
+              </a:rPr>
+              <a:t>controls, plus a depth prior that tests the mechanism</a:t>
+            </a:r>
+          </a:p>
+        </p:txBody>
+      </p:sp>
+      <p:sp>
+        <p:nvSpPr>
+          <p:cNvPr id="7" name="TextBox 6"/>
+          <p:cNvSpPr txBox="1"/>
+          <p:nvPr/>
+        </p:nvSpPr>
+        <p:spPr>
+          <a:xfrm>
+            <a:off x="658368" y="3995928"/>
+            <a:ext cx="10874959" cy="2404872"/>
+          </a:xfrm>
+          <a:prstGeom prst="rect">
+            <a:avLst/>
+          </a:prstGeom>
+          <a:noFill/>
+        </p:spPr>
+        <p:txBody>
+          <a:bodyPr wrap="square">
+            <a:spAutoFit/>
+          </a:bodyPr>
+          <a:lstStyle/>
+          <a:p>
+            <a:pPr>
+              <a:spcAft>
+                <a:spcPts val="1000"/>
+              </a:spcAft>
+            </a:pPr>
+            <a:r>
+              <a:rPr sz="1600">
+                <a:solidFill>
+                  <a:srgbClr val="5C6E78"/>
+                </a:solidFill>
+              </a:rPr>
+              <a:t>Questions welcome.</a:t>
+            </a:r>
+          </a:p>
+          <a:p>
+            <a:pPr>
+              <a:spcAft>
+                <a:spcPts val="1000"/>
+              </a:spcAft>
+            </a:pPr>
+            <a:r>
+              <a:rPr sz="1400">
+                <a:solidFill>
+                  <a:srgbClr val="5C6E78"/>
+                </a:solidFill>
+              </a:rPr>
+              <a:t>Mohamed Eyad · code, runs and write-up: github.com/mohamedeyaad/fewshot-gaussian-splatting</a:t>
             </a:r>
           </a:p>
         </p:txBody>
@@ -6274,7 +7674,7 @@
                   <a:srgbClr val="0B6E7F"/>
                 </a:solidFill>
               </a:rPr>
-              <a:t>THE PROBLEM</a:t>
+              <a:t>CONTENTS</a:t>
             </a:r>
           </a:p>
         </p:txBody>
@@ -6307,7 +7707,7 @@
                   <a:srgbClr val="16202A"/>
                 </a:solidFill>
               </a:rPr>
-              <a:t>3D Gaussian Splatting is excellent — given enough photographs</a:t>
+              <a:t>Where this goes</a:t>
             </a:r>
           </a:p>
         </p:txBody>
@@ -6321,7 +7721,7 @@
         <p:spPr>
           <a:xfrm>
             <a:off x="658368" y="1755648"/>
-            <a:ext cx="2547289" cy="1828800"/>
+            <a:ext cx="10874959" cy="4645152"/>
           </a:xfrm>
           <a:prstGeom prst="rect">
             <a:avLst/>
@@ -6334,205 +7734,108 @@
           </a:bodyPr>
           <a:lstStyle/>
           <a:p>
-            <a:r>
-              <a:rPr sz="3000" b="1">
-                <a:solidFill>
-                  <a:srgbClr val="16202A"/>
-                </a:solidFill>
-              </a:rPr>
-              <a:t>15.20</a:t>
-            </a:r>
-          </a:p>
-          <a:p>
-            <a:r>
-              <a:rPr sz="1200">
-                <a:solidFill>
-                  <a:srgbClr val="5C6E78"/>
-                </a:solidFill>
-              </a:rPr>
-              <a:t>dB · 5 views</a:t>
-            </a:r>
-          </a:p>
-        </p:txBody>
-      </p:sp>
-      <p:sp>
-        <p:nvSpPr>
-          <p:cNvPr id="5" name="TextBox 4"/>
-          <p:cNvSpPr txBox="1"/>
-          <p:nvPr/>
-        </p:nvSpPr>
-        <p:spPr>
-          <a:xfrm>
-            <a:off x="3434257" y="1755648"/>
-            <a:ext cx="2547289" cy="1828800"/>
-          </a:xfrm>
-          <a:prstGeom prst="rect">
-            <a:avLst/>
-          </a:prstGeom>
-          <a:noFill/>
-        </p:spPr>
-        <p:txBody>
-          <a:bodyPr wrap="square">
-            <a:spAutoFit/>
-          </a:bodyPr>
-          <a:lstStyle/>
-          <a:p>
-            <a:r>
-              <a:rPr sz="3000" b="1">
-                <a:solidFill>
-                  <a:srgbClr val="16202A"/>
-                </a:solidFill>
-              </a:rPr>
-              <a:t>17.11</a:t>
-            </a:r>
-          </a:p>
-          <a:p>
-            <a:r>
-              <a:rPr sz="1200">
-                <a:solidFill>
-                  <a:srgbClr val="5C6E78"/>
-                </a:solidFill>
-              </a:rPr>
-              <a:t>dB · 10 views</a:t>
-            </a:r>
-          </a:p>
-        </p:txBody>
-      </p:sp>
-      <p:sp>
-        <p:nvSpPr>
-          <p:cNvPr id="6" name="TextBox 5"/>
-          <p:cNvSpPr txBox="1"/>
-          <p:nvPr/>
-        </p:nvSpPr>
-        <p:spPr>
-          <a:xfrm>
-            <a:off x="6210146" y="1755648"/>
-            <a:ext cx="2547289" cy="1828800"/>
-          </a:xfrm>
-          <a:prstGeom prst="rect">
-            <a:avLst/>
-          </a:prstGeom>
-          <a:noFill/>
-        </p:spPr>
-        <p:txBody>
-          <a:bodyPr wrap="square">
-            <a:spAutoFit/>
-          </a:bodyPr>
-          <a:lstStyle/>
-          <a:p>
-            <a:r>
-              <a:rPr sz="3000" b="1">
-                <a:solidFill>
-                  <a:srgbClr val="16202A"/>
-                </a:solidFill>
-              </a:rPr>
-              <a:t>19.74</a:t>
-            </a:r>
-          </a:p>
-          <a:p>
-            <a:r>
-              <a:rPr sz="1200">
-                <a:solidFill>
-                  <a:srgbClr val="5C6E78"/>
-                </a:solidFill>
-              </a:rPr>
-              <a:t>dB · 20 views</a:t>
-            </a:r>
-          </a:p>
-        </p:txBody>
-      </p:sp>
-      <p:sp>
-        <p:nvSpPr>
-          <p:cNvPr id="7" name="TextBox 6"/>
-          <p:cNvSpPr txBox="1"/>
-          <p:nvPr/>
-        </p:nvSpPr>
-        <p:spPr>
-          <a:xfrm>
-            <a:off x="8986035" y="1755648"/>
-            <a:ext cx="2547289" cy="1828800"/>
-          </a:xfrm>
-          <a:prstGeom prst="rect">
-            <a:avLst/>
-          </a:prstGeom>
-          <a:noFill/>
-        </p:spPr>
-        <p:txBody>
-          <a:bodyPr wrap="square">
-            <a:spAutoFit/>
-          </a:bodyPr>
-          <a:lstStyle/>
-          <a:p>
-            <a:r>
-              <a:rPr sz="3000" b="1">
-                <a:solidFill>
-                  <a:srgbClr val="16202A"/>
-                </a:solidFill>
-              </a:rPr>
-              <a:t>25.23</a:t>
-            </a:r>
-          </a:p>
-          <a:p>
-            <a:r>
-              <a:rPr sz="1200">
-                <a:solidFill>
-                  <a:srgbClr val="5C6E78"/>
-                </a:solidFill>
-              </a:rPr>
-              <a:t>dB · 219 views (ceiling)</a:t>
-            </a:r>
-          </a:p>
-        </p:txBody>
-      </p:sp>
-      <p:sp>
-        <p:nvSpPr>
-          <p:cNvPr id="8" name="TextBox 7"/>
-          <p:cNvSpPr txBox="1"/>
-          <p:nvPr/>
-        </p:nvSpPr>
-        <p:spPr>
-          <a:xfrm>
-            <a:off x="658368" y="3721608"/>
-            <a:ext cx="10874959" cy="2679192"/>
-          </a:xfrm>
-          <a:prstGeom prst="rect">
-            <a:avLst/>
-          </a:prstGeom>
-          <a:noFill/>
-        </p:spPr>
-        <p:txBody>
-          <a:bodyPr wrap="square">
-            <a:spAutoFit/>
-          </a:bodyPr>
-          <a:lstStyle/>
-          <a:p>
             <a:pPr>
               <a:spcAft>
-                <a:spcPts val="1000"/>
+                <a:spcPts val="900"/>
               </a:spcAft>
             </a:pPr>
             <a:r>
-              <a:rPr sz="1600">
+              <a:rPr sz="1500">
                 <a:solidFill>
                   <a:srgbClr val="16202A"/>
                 </a:solidFill>
               </a:rPr>
-              <a:t>On truck (Tanks &amp; Temples), the full 219-view reconstruction reaches 25.23 dB. Cut to five photographs and it falls to 15.20 dB.</a:t>
+              <a:t>•  The problem. What splatting does when photographs run out.</a:t>
             </a:r>
           </a:p>
           <a:p>
             <a:pPr>
               <a:spcAft>
-                <a:spcPts val="1000"/>
+                <a:spcPts val="900"/>
               </a:spcAft>
             </a:pPr>
             <a:r>
-              <a:rPr sz="1400">
+              <a:rPr sz="1500">
                 <a:solidFill>
                   <a:srgbClr val="16202A"/>
                 </a:solidFill>
               </a:rPr>
-              <a:t>A 10.04 dB gap. Photographs are expensive; a diffusion model generates images for free. Can generated views substitute for photographs that were never taken?</a:t>
+              <a:t>•  The method. Three ways to manufacture a training view, and the pipeline that evaluates them.</a:t>
+            </a:r>
+          </a:p>
+          <a:p>
+            <a:pPr>
+              <a:spcAft>
+                <a:spcPts val="900"/>
+              </a:spcAft>
+            </a:pPr>
+            <a:r>
+              <a:rPr sz="1500">
+                <a:solidFill>
+                  <a:srgbClr val="16202A"/>
+                </a:solidFill>
+              </a:rPr>
+              <a:t>•  The grid. 3 strategies × 4 ratios × 3 subset sizes × 3 seeds.</a:t>
+            </a:r>
+          </a:p>
+          <a:p>
+            <a:pPr>
+              <a:spcAft>
+                <a:spcPts val="900"/>
+              </a:spcAft>
+            </a:pPr>
+            <a:r>
+              <a:rPr sz="1500">
+                <a:solidFill>
+                  <a:srgbClr val="16202A"/>
+                </a:solidFill>
+              </a:rPr>
+              <a:t>•  The result. The same treatment helps at five real views and harms at twenty.</a:t>
+            </a:r>
+          </a:p>
+          <a:p>
+            <a:pPr>
+              <a:spcAft>
+                <a:spcPts val="900"/>
+              </a:spcAft>
+            </a:pPr>
+            <a:r>
+              <a:rPr sz="1500">
+                <a:solidFill>
+                  <a:srgbClr val="16202A"/>
+                </a:solidFill>
+              </a:rPr>
+              <a:t>•  Why. Coverage decays, inconsistency does not — and four controls that rule out the alternatives.</a:t>
+            </a:r>
+          </a:p>
+          <a:p>
+            <a:pPr>
+              <a:spcAft>
+                <a:spcPts val="900"/>
+              </a:spcAft>
+            </a:pPr>
+            <a:r>
+              <a:rPr sz="1500">
+                <a:solidFill>
+                  <a:srgbClr val="16202A"/>
+                </a:solidFill>
+              </a:rPr>
+              <a:t>•  A prediction, tested. Constraint without a viewpoint never crosses over.</a:t>
+            </a:r>
+          </a:p>
+          <a:p>
+            <a:pPr>
+              <a:spcAft>
+                <a:spcPts val="900"/>
+              </a:spcAft>
+            </a:pPr>
+            <a:r>
+              <a:rPr sz="1500">
+                <a:solidFill>
+                  <a:srgbClr val="16202A"/>
+                </a:solidFill>
+              </a:rPr>
+              <a:t>•  Limits. What this does not show.</a:t>
             </a:r>
           </a:p>
         </p:txBody>
@@ -6583,35 +7886,269 @@
                   <a:srgbClr val="0B6E7F"/>
                 </a:solidFill>
               </a:rPr>
-              <a:t>THE PROBLEM · WHAT IT LOOKS LIKE</a:t>
-            </a:r>
-          </a:p>
-        </p:txBody>
-      </p:sp>
-      <p:pic>
-        <p:nvPicPr>
-          <p:cNvPr id="3" name="Picture 2" descr="image.jpg"/>
-          <p:cNvPicPr>
-            <a:picLocks noChangeAspect="1"/>
-          </p:cNvPicPr>
+              <a:t>THE PROBLEM</a:t>
+            </a:r>
+          </a:p>
+        </p:txBody>
+      </p:sp>
+      <p:sp>
+        <p:nvSpPr>
+          <p:cNvPr id="3" name="TextBox 2"/>
+          <p:cNvSpPr txBox="1"/>
           <p:nvPr/>
-        </p:nvPicPr>
-        <p:blipFill>
-          <a:blip r:embed="rId2"/>
-          <a:stretch>
-            <a:fillRect/>
-          </a:stretch>
-        </p:blipFill>
+        </p:nvSpPr>
         <p:spPr>
           <a:xfrm>
             <a:off x="658368" y="886968"/>
-            <a:ext cx="10874959" cy="4164470"/>
-          </a:xfrm>
-          <a:prstGeom prst="rect">
-            <a:avLst/>
-          </a:prstGeom>
-        </p:spPr>
-      </p:pic>
+            <a:ext cx="10874959" cy="914400"/>
+          </a:xfrm>
+          <a:prstGeom prst="rect">
+            <a:avLst/>
+          </a:prstGeom>
+          <a:noFill/>
+        </p:spPr>
+        <p:txBody>
+          <a:bodyPr wrap="square">
+            <a:spAutoFit/>
+          </a:bodyPr>
+          <a:lstStyle/>
+          <a:p>
+            <a:r>
+              <a:rPr sz="2600" b="1">
+                <a:solidFill>
+                  <a:srgbClr val="16202A"/>
+                </a:solidFill>
+              </a:rPr>
+              <a:t>3D Gaussian Splatting is excellent — given enough photographs</a:t>
+            </a:r>
+          </a:p>
+        </p:txBody>
+      </p:sp>
+      <p:sp>
+        <p:nvSpPr>
+          <p:cNvPr id="4" name="TextBox 3"/>
+          <p:cNvSpPr txBox="1"/>
+          <p:nvPr/>
+        </p:nvSpPr>
+        <p:spPr>
+          <a:xfrm>
+            <a:off x="658368" y="1755648"/>
+            <a:ext cx="2547289" cy="1828800"/>
+          </a:xfrm>
+          <a:prstGeom prst="rect">
+            <a:avLst/>
+          </a:prstGeom>
+          <a:noFill/>
+        </p:spPr>
+        <p:txBody>
+          <a:bodyPr wrap="square">
+            <a:spAutoFit/>
+          </a:bodyPr>
+          <a:lstStyle/>
+          <a:p>
+            <a:r>
+              <a:rPr sz="3000" b="1">
+                <a:solidFill>
+                  <a:srgbClr val="16202A"/>
+                </a:solidFill>
+              </a:rPr>
+              <a:t>15.20</a:t>
+            </a:r>
+          </a:p>
+          <a:p>
+            <a:r>
+              <a:rPr sz="1200">
+                <a:solidFill>
+                  <a:srgbClr val="5C6E78"/>
+                </a:solidFill>
+              </a:rPr>
+              <a:t>dB · 5 views</a:t>
+            </a:r>
+          </a:p>
+        </p:txBody>
+      </p:sp>
+      <p:sp>
+        <p:nvSpPr>
+          <p:cNvPr id="5" name="TextBox 4"/>
+          <p:cNvSpPr txBox="1"/>
+          <p:nvPr/>
+        </p:nvSpPr>
+        <p:spPr>
+          <a:xfrm>
+            <a:off x="3434257" y="1755648"/>
+            <a:ext cx="2547289" cy="1828800"/>
+          </a:xfrm>
+          <a:prstGeom prst="rect">
+            <a:avLst/>
+          </a:prstGeom>
+          <a:noFill/>
+        </p:spPr>
+        <p:txBody>
+          <a:bodyPr wrap="square">
+            <a:spAutoFit/>
+          </a:bodyPr>
+          <a:lstStyle/>
+          <a:p>
+            <a:r>
+              <a:rPr sz="3000" b="1">
+                <a:solidFill>
+                  <a:srgbClr val="16202A"/>
+                </a:solidFill>
+              </a:rPr>
+              <a:t>17.11</a:t>
+            </a:r>
+          </a:p>
+          <a:p>
+            <a:r>
+              <a:rPr sz="1200">
+                <a:solidFill>
+                  <a:srgbClr val="5C6E78"/>
+                </a:solidFill>
+              </a:rPr>
+              <a:t>dB · 10 views</a:t>
+            </a:r>
+          </a:p>
+        </p:txBody>
+      </p:sp>
+      <p:sp>
+        <p:nvSpPr>
+          <p:cNvPr id="6" name="TextBox 5"/>
+          <p:cNvSpPr txBox="1"/>
+          <p:nvPr/>
+        </p:nvSpPr>
+        <p:spPr>
+          <a:xfrm>
+            <a:off x="6210146" y="1755648"/>
+            <a:ext cx="2547289" cy="1828800"/>
+          </a:xfrm>
+          <a:prstGeom prst="rect">
+            <a:avLst/>
+          </a:prstGeom>
+          <a:noFill/>
+        </p:spPr>
+        <p:txBody>
+          <a:bodyPr wrap="square">
+            <a:spAutoFit/>
+          </a:bodyPr>
+          <a:lstStyle/>
+          <a:p>
+            <a:r>
+              <a:rPr sz="3000" b="1">
+                <a:solidFill>
+                  <a:srgbClr val="16202A"/>
+                </a:solidFill>
+              </a:rPr>
+              <a:t>19.74</a:t>
+            </a:r>
+          </a:p>
+          <a:p>
+            <a:r>
+              <a:rPr sz="1200">
+                <a:solidFill>
+                  <a:srgbClr val="5C6E78"/>
+                </a:solidFill>
+              </a:rPr>
+              <a:t>dB · 20 views</a:t>
+            </a:r>
+          </a:p>
+        </p:txBody>
+      </p:sp>
+      <p:sp>
+        <p:nvSpPr>
+          <p:cNvPr id="7" name="TextBox 6"/>
+          <p:cNvSpPr txBox="1"/>
+          <p:nvPr/>
+        </p:nvSpPr>
+        <p:spPr>
+          <a:xfrm>
+            <a:off x="8986035" y="1755648"/>
+            <a:ext cx="2547289" cy="1828800"/>
+          </a:xfrm>
+          <a:prstGeom prst="rect">
+            <a:avLst/>
+          </a:prstGeom>
+          <a:noFill/>
+        </p:spPr>
+        <p:txBody>
+          <a:bodyPr wrap="square">
+            <a:spAutoFit/>
+          </a:bodyPr>
+          <a:lstStyle/>
+          <a:p>
+            <a:r>
+              <a:rPr sz="3000" b="1">
+                <a:solidFill>
+                  <a:srgbClr val="16202A"/>
+                </a:solidFill>
+              </a:rPr>
+              <a:t>25.23</a:t>
+            </a:r>
+          </a:p>
+          <a:p>
+            <a:r>
+              <a:rPr sz="1200">
+                <a:solidFill>
+                  <a:srgbClr val="5C6E78"/>
+                </a:solidFill>
+              </a:rPr>
+              <a:t>dB · 219 views (ceiling)</a:t>
+            </a:r>
+          </a:p>
+        </p:txBody>
+      </p:sp>
+      <p:sp>
+        <p:nvSpPr>
+          <p:cNvPr id="8" name="TextBox 7"/>
+          <p:cNvSpPr txBox="1"/>
+          <p:nvPr/>
+        </p:nvSpPr>
+        <p:spPr>
+          <a:xfrm>
+            <a:off x="658368" y="3721608"/>
+            <a:ext cx="10874959" cy="2679192"/>
+          </a:xfrm>
+          <a:prstGeom prst="rect">
+            <a:avLst/>
+          </a:prstGeom>
+          <a:noFill/>
+        </p:spPr>
+        <p:txBody>
+          <a:bodyPr wrap="square">
+            <a:spAutoFit/>
+          </a:bodyPr>
+          <a:lstStyle/>
+          <a:p>
+            <a:pPr>
+              <a:spcAft>
+                <a:spcPts val="1000"/>
+              </a:spcAft>
+            </a:pPr>
+            <a:r>
+              <a:rPr sz="1600">
+                <a:solidFill>
+                  <a:srgbClr val="16202A"/>
+                </a:solidFill>
+              </a:rPr>
+              <a:t>On truck (Tanks &amp; Temples), the full 219-view reconstruction reaches 25.23 dB. Cut to five photographs and it falls to 15.20 dB.</a:t>
+            </a:r>
+          </a:p>
+          <a:p>
+            <a:pPr>
+              <a:spcAft>
+                <a:spcPts val="1000"/>
+              </a:spcAft>
+            </a:pPr>
+            <a:r>
+              <a:rPr sz="1400">
+                <a:solidFill>
+                  <a:srgbClr val="16202A"/>
+                </a:solidFill>
+              </a:rPr>
+              <a:t>A 10.04 dB gap. Photographs are expensive; a diffusion model generates images for free. Can generated views substitute for photographs that were never taken?</a:t>
+            </a:r>
+          </a:p>
+        </p:txBody>
+      </p:sp>
     </p:spTree>
   </p:cSld>
   <p:clrMapOvr>
@@ -6658,244 +8195,35 @@
                   <a:srgbClr val="0B6E7F"/>
                 </a:solidFill>
               </a:rPr>
-              <a:t>METHOD</a:t>
-            </a:r>
-          </a:p>
-        </p:txBody>
-      </p:sp>
-      <p:sp>
-        <p:nvSpPr>
-          <p:cNvPr id="3" name="TextBox 2"/>
-          <p:cNvSpPr txBox="1"/>
+              <a:t>THE PROBLEM · WHAT IT LOOKS LIKE</a:t>
+            </a:r>
+          </a:p>
+        </p:txBody>
+      </p:sp>
+      <p:pic>
+        <p:nvPicPr>
+          <p:cNvPr id="3" name="Picture 2" descr="image.jpg"/>
+          <p:cNvPicPr>
+            <a:picLocks noChangeAspect="1"/>
+          </p:cNvPicPr>
           <p:nvPr/>
-        </p:nvSpPr>
+        </p:nvPicPr>
+        <p:blipFill>
+          <a:blip r:embed="rId2"/>
+          <a:stretch>
+            <a:fillRect/>
+          </a:stretch>
+        </p:blipFill>
         <p:spPr>
           <a:xfrm>
             <a:off x="658368" y="886968"/>
-            <a:ext cx="10874959" cy="914400"/>
-          </a:xfrm>
-          <a:prstGeom prst="rect">
-            <a:avLst/>
-          </a:prstGeom>
-          <a:noFill/>
-        </p:spPr>
-        <p:txBody>
-          <a:bodyPr wrap="square">
-            <a:spAutoFit/>
-          </a:bodyPr>
-          <a:lstStyle/>
-          <a:p>
-            <a:r>
-              <a:rPr sz="2600" b="1">
-                <a:solidFill>
-                  <a:srgbClr val="16202A"/>
-                </a:solidFill>
-              </a:rPr>
-              <a:t>Three ways to manufacture a training view</a:t>
-            </a:r>
-          </a:p>
-        </p:txBody>
-      </p:sp>
-      <p:sp>
-        <p:nvSpPr>
-          <p:cNvPr id="4" name="TextBox 3"/>
-          <p:cNvSpPr txBox="1"/>
-          <p:nvPr/>
-        </p:nvSpPr>
-        <p:spPr>
-          <a:xfrm>
-            <a:off x="658368" y="1755648"/>
-            <a:ext cx="3472586" cy="1828800"/>
-          </a:xfrm>
-          <a:prstGeom prst="rect">
-            <a:avLst/>
-          </a:prstGeom>
-          <a:noFill/>
-        </p:spPr>
-        <p:txBody>
-          <a:bodyPr wrap="square">
-            <a:spAutoFit/>
-          </a:bodyPr>
-          <a:lstStyle/>
-          <a:p/>
-          <a:p>
-            <a:r>
-              <a:rPr sz="1500" b="1">
-                <a:solidFill>
-                  <a:srgbClr val="16202A"/>
-                </a:solidFill>
-              </a:rPr>
-              <a:t>Inpainting</a:t>
-            </a:r>
-          </a:p>
-          <a:p>
-            <a:r>
-              <a:rPr sz="1200">
-                <a:solidFill>
-                  <a:srgbClr val="5C6E78"/>
-                </a:solidFill>
-              </a:rPr>
-              <a:t>Mask a region of a real photograph and let the model refill it. Same camera, same framing — no new geometry at all.</a:t>
-            </a:r>
-          </a:p>
-        </p:txBody>
-      </p:sp>
-      <p:sp>
-        <p:nvSpPr>
-          <p:cNvPr id="5" name="TextBox 4"/>
-          <p:cNvSpPr txBox="1"/>
-          <p:nvPr/>
-        </p:nvSpPr>
-        <p:spPr>
-          <a:xfrm>
-            <a:off x="4359554" y="1755648"/>
-            <a:ext cx="3472586" cy="1828800"/>
-          </a:xfrm>
-          <a:prstGeom prst="rect">
-            <a:avLst/>
-          </a:prstGeom>
-          <a:noFill/>
-        </p:spPr>
-        <p:txBody>
-          <a:bodyPr wrap="square">
-            <a:spAutoFit/>
-          </a:bodyPr>
-          <a:lstStyle/>
-          <a:p/>
-          <a:p>
-            <a:r>
-              <a:rPr sz="1500" b="1">
-                <a:solidFill>
-                  <a:srgbClr val="16202A"/>
-                </a:solidFill>
-              </a:rPr>
-              <a:t>Outpainting</a:t>
-            </a:r>
-          </a:p>
-          <a:p>
-            <a:r>
-              <a:rPr sz="1200">
-                <a:solidFill>
-                  <a:srgbClr val="5C6E78"/>
-                </a:solidFill>
-              </a:rPr>
-              <a:t>Keep the focal length, enlarge the canvas. The camera does not move; the lens gets wider. Supplies peripheral content.</a:t>
-            </a:r>
-          </a:p>
-        </p:txBody>
-      </p:sp>
-      <p:sp>
-        <p:nvSpPr>
-          <p:cNvPr id="6" name="TextBox 5"/>
-          <p:cNvSpPr txBox="1"/>
-          <p:nvPr/>
-        </p:nvSpPr>
-        <p:spPr>
-          <a:xfrm>
-            <a:off x="8060740" y="1755648"/>
-            <a:ext cx="3472586" cy="1828800"/>
-          </a:xfrm>
-          <a:prstGeom prst="rect">
-            <a:avLst/>
-          </a:prstGeom>
-          <a:noFill/>
-        </p:spPr>
-        <p:txBody>
-          <a:bodyPr wrap="square">
-            <a:spAutoFit/>
-          </a:bodyPr>
-          <a:lstStyle/>
-          <a:p/>
-          <a:p>
-            <a:r>
-              <a:rPr sz="1500" b="1">
-                <a:solidFill>
-                  <a:srgbClr val="16202A"/>
-                </a:solidFill>
-              </a:rPr>
-              <a:t>Pose-guided</a:t>
-            </a:r>
-          </a:p>
-          <a:p>
-            <a:r>
-              <a:rPr sz="1200">
-                <a:solidFill>
-                  <a:srgbClr val="5C6E78"/>
-                </a:solidFill>
-              </a:rPr>
-              <a:t>Estimate depth, anchor it to the sparse SfM points, warp to a chosen new camera, and let diffusion fill the disocclusions. The only one supplying a genuinely new viewpoint.</a:t>
-            </a:r>
-          </a:p>
-        </p:txBody>
-      </p:sp>
-      <p:sp>
-        <p:nvSpPr>
-          <p:cNvPr id="7" name="TextBox 6"/>
-          <p:cNvSpPr txBox="1"/>
-          <p:nvPr/>
-        </p:nvSpPr>
-        <p:spPr>
-          <a:xfrm>
-            <a:off x="658368" y="3721608"/>
-            <a:ext cx="10874959" cy="2679192"/>
-          </a:xfrm>
-          <a:prstGeom prst="rect">
-            <a:avLst/>
-          </a:prstGeom>
-          <a:noFill/>
-        </p:spPr>
-        <p:txBody>
-          <a:bodyPr wrap="square">
-            <a:spAutoFit/>
-          </a:bodyPr>
-          <a:lstStyle/>
-          <a:p>
-            <a:pPr>
-              <a:spcAft>
-                <a:spcPts val="1000"/>
-              </a:spcAft>
-            </a:pPr>
-            <a:r>
-              <a:rPr sz="1400">
-                <a:solidFill>
-                  <a:srgbClr val="16202A"/>
-                </a:solidFill>
-              </a:rPr>
-              <a:t>Mask a region of a real photograph and let the model refill it. Same camera, same framing — no new geometry at all.</a:t>
-            </a:r>
-          </a:p>
-          <a:p>
-            <a:pPr>
-              <a:spcAft>
-                <a:spcPts val="1000"/>
-              </a:spcAft>
-            </a:pPr>
-            <a:r>
-              <a:rPr sz="1400">
-                <a:solidFill>
-                  <a:srgbClr val="16202A"/>
-                </a:solidFill>
-              </a:rPr>
-              <a:t>Keep the focal length, enlarge the canvas. The camera does not move; the lens gets wider. Supplies peripheral content.</a:t>
-            </a:r>
-          </a:p>
-          <a:p>
-            <a:pPr>
-              <a:spcAft>
-                <a:spcPts val="1000"/>
-              </a:spcAft>
-            </a:pPr>
-            <a:r>
-              <a:rPr sz="1400">
-                <a:solidFill>
-                  <a:srgbClr val="16202A"/>
-                </a:solidFill>
-              </a:rPr>
-              <a:t>Estimate depth, anchor it to the sparse SfM points, warp to a chosen new camera, and let diffusion fill the disocclusions. The only one supplying a genuinely new viewpoint.</a:t>
-            </a:r>
-          </a:p>
-        </p:txBody>
-      </p:sp>
+            <a:ext cx="10874959" cy="4164470"/>
+          </a:xfrm>
+          <a:prstGeom prst="rect">
+            <a:avLst/>
+          </a:prstGeom>
+        </p:spPr>
+      </p:pic>
     </p:spTree>
   </p:cSld>
   <p:clrMapOvr>
@@ -6942,7 +8270,7 @@
                   <a:srgbClr val="0B6E7F"/>
                 </a:solidFill>
               </a:rPr>
-              <a:t>DESIGN</a:t>
+              <a:t>METHOD</a:t>
             </a:r>
           </a:p>
         </p:txBody>
@@ -6975,7 +8303,7 @@
                   <a:srgbClr val="16202A"/>
                 </a:solidFill>
               </a:rPr>
-              <a:t>The measurement has to survive a 0.2 dB effect</a:t>
+              <a:t>Three ways to manufacture a training view</a:t>
             </a:r>
           </a:p>
         </p:txBody>
@@ -6989,7 +8317,7 @@
         <p:spPr>
           <a:xfrm>
             <a:off x="658368" y="1755648"/>
-            <a:ext cx="10874959" cy="4645152"/>
+            <a:ext cx="3472586" cy="1828800"/>
           </a:xfrm>
           <a:prstGeom prst="rect">
             <a:avLst/>
@@ -7001,64 +8329,181 @@
             <a:spAutoFit/>
           </a:bodyPr>
           <a:lstStyle/>
+          <a:p/>
+          <a:p>
+            <a:r>
+              <a:rPr sz="1500" b="1">
+                <a:solidFill>
+                  <a:srgbClr val="16202A"/>
+                </a:solidFill>
+              </a:rPr>
+              <a:t>Inpainting</a:t>
+            </a:r>
+          </a:p>
+          <a:p>
+            <a:r>
+              <a:rPr sz="1200">
+                <a:solidFill>
+                  <a:srgbClr val="5C6E78"/>
+                </a:solidFill>
+              </a:rPr>
+              <a:t>Mask a region of a real photograph and let the model refill it. Same camera, same framing — no new geometry at all.</a:t>
+            </a:r>
+          </a:p>
+        </p:txBody>
+      </p:sp>
+      <p:sp>
+        <p:nvSpPr>
+          <p:cNvPr id="5" name="TextBox 4"/>
+          <p:cNvSpPr txBox="1"/>
+          <p:nvPr/>
+        </p:nvSpPr>
+        <p:spPr>
+          <a:xfrm>
+            <a:off x="4359554" y="1755648"/>
+            <a:ext cx="3472586" cy="1828800"/>
+          </a:xfrm>
+          <a:prstGeom prst="rect">
+            <a:avLst/>
+          </a:prstGeom>
+          <a:noFill/>
+        </p:spPr>
+        <p:txBody>
+          <a:bodyPr wrap="square">
+            <a:spAutoFit/>
+          </a:bodyPr>
+          <a:lstStyle/>
+          <a:p/>
+          <a:p>
+            <a:r>
+              <a:rPr sz="1500" b="1">
+                <a:solidFill>
+                  <a:srgbClr val="16202A"/>
+                </a:solidFill>
+              </a:rPr>
+              <a:t>Outpainting</a:t>
+            </a:r>
+          </a:p>
+          <a:p>
+            <a:r>
+              <a:rPr sz="1200">
+                <a:solidFill>
+                  <a:srgbClr val="5C6E78"/>
+                </a:solidFill>
+              </a:rPr>
+              <a:t>Keep the focal length, enlarge the canvas. The camera does not move; the lens gets wider. Supplies peripheral content.</a:t>
+            </a:r>
+          </a:p>
+        </p:txBody>
+      </p:sp>
+      <p:sp>
+        <p:nvSpPr>
+          <p:cNvPr id="6" name="TextBox 5"/>
+          <p:cNvSpPr txBox="1"/>
+          <p:nvPr/>
+        </p:nvSpPr>
+        <p:spPr>
+          <a:xfrm>
+            <a:off x="8060740" y="1755648"/>
+            <a:ext cx="3472586" cy="1828800"/>
+          </a:xfrm>
+          <a:prstGeom prst="rect">
+            <a:avLst/>
+          </a:prstGeom>
+          <a:noFill/>
+        </p:spPr>
+        <p:txBody>
+          <a:bodyPr wrap="square">
+            <a:spAutoFit/>
+          </a:bodyPr>
+          <a:lstStyle/>
+          <a:p/>
+          <a:p>
+            <a:r>
+              <a:rPr sz="1500" b="1">
+                <a:solidFill>
+                  <a:srgbClr val="16202A"/>
+                </a:solidFill>
+              </a:rPr>
+              <a:t>Pose-guided</a:t>
+            </a:r>
+          </a:p>
+          <a:p>
+            <a:r>
+              <a:rPr sz="1200">
+                <a:solidFill>
+                  <a:srgbClr val="5C6E78"/>
+                </a:solidFill>
+              </a:rPr>
+              <a:t>Estimate depth, anchor it to the sparse SfM points, warp to a chosen new camera, and let diffusion fill the disocclusions. The only one supplying a genuinely new viewpoint.</a:t>
+            </a:r>
+          </a:p>
+        </p:txBody>
+      </p:sp>
+      <p:sp>
+        <p:nvSpPr>
+          <p:cNvPr id="7" name="TextBox 6"/>
+          <p:cNvSpPr txBox="1"/>
+          <p:nvPr/>
+        </p:nvSpPr>
+        <p:spPr>
+          <a:xfrm>
+            <a:off x="658368" y="3721608"/>
+            <a:ext cx="10874959" cy="2679192"/>
+          </a:xfrm>
+          <a:prstGeom prst="rect">
+            <a:avLst/>
+          </a:prstGeom>
+          <a:noFill/>
+        </p:spPr>
+        <p:txBody>
+          <a:bodyPr wrap="square">
+            <a:spAutoFit/>
+          </a:bodyPr>
+          <a:lstStyle/>
           <a:p>
             <a:pPr>
               <a:spcAft>
-                <a:spcPts val="900"/>
+                <a:spcPts val="1000"/>
               </a:spcAft>
             </a:pPr>
             <a:r>
-              <a:rPr sz="1500">
+              <a:rPr sz="1400">
                 <a:solidFill>
                   <a:srgbClr val="16202A"/>
                 </a:solidFill>
               </a:rPr>
-              <a:t>•  Frozen held-out split. Every run of a scene is scored against byte-identical test images — verified by hash across all 242 runs.</a:t>
+              <a:t>Mask a region of a real photograph and let the model refill it. Same camera, same framing — no new geometry at all.</a:t>
             </a:r>
           </a:p>
           <a:p>
             <a:pPr>
               <a:spcAft>
-                <a:spcPts val="900"/>
+                <a:spcPts val="1000"/>
               </a:spcAft>
             </a:pPr>
             <a:r>
-              <a:rPr sz="1500">
+              <a:rPr sz="1400">
                 <a:solidFill>
                   <a:srgbClr val="16202A"/>
                 </a:solidFill>
               </a:rPr>
-              <a:t>•  Paired within seed. Each augmented run is compared to its own seed's baseline, so the luck of which five views were drawn cancels instead of adding noise.</a:t>
+              <a:t>Keep the focal length, enlarge the canvas. The camera does not move; the lens gets wider. Supplies peripheral content.</a:t>
             </a:r>
           </a:p>
           <a:p>
             <a:pPr>
               <a:spcAft>
-                <a:spcPts val="900"/>
+                <a:spcPts val="1000"/>
               </a:spcAft>
             </a:pPr>
             <a:r>
-              <a:rPr sz="1500">
+              <a:rPr sz="1400">
                 <a:solidFill>
                   <a:srgbClr val="16202A"/>
                 </a:solidFill>
               </a:rPr>
-              <a:t>•  Measured noise floor. The identical configuration re-run three times varies by 0.039 dB, so an effect of 0.2 dB is resolvable and one of 0.03 dB is not.</a:t>
-            </a:r>
-          </a:p>
-          <a:p>
-            <a:pPr>
-              <a:spcAft>
-                <a:spcPts val="900"/>
-              </a:spcAft>
-            </a:pPr>
-            <a:r>
-              <a:rPr sz="1500">
-                <a:solidFill>
-                  <a:srgbClr val="16202A"/>
-                </a:solidFill>
-              </a:rPr>
-              <a:t>•  Farthest-point sampling. Subsets are spread over the camera trajectory rather than drawn at random; the seed picks only the starting camera.</a:t>
+              <a:t>Estimate depth, anchor it to the sparse SfM points, warp to a chosen new camera, and let diffusion fill the disocclusions. The only one supplying a genuinely new viewpoint.</a:t>
             </a:r>
           </a:p>
         </p:txBody>
@@ -7109,7 +8554,7 @@
                   <a:srgbClr val="0B6E7F"/>
                 </a:solidFill>
               </a:rPr>
-              <a:t>RESULT</a:t>
+              <a:t>METHOD · THE PIPELINE</a:t>
             </a:r>
           </a:p>
         </p:txBody>
@@ -7142,667 +8587,35 @@
                   <a:srgbClr val="16202A"/>
                 </a:solidFill>
               </a:rPr>
-              <a:t>The same augmentation helps at five views and harms at twenty</a:t>
-            </a:r>
-          </a:p>
-        </p:txBody>
-      </p:sp>
-      <p:sp>
-        <p:nvSpPr>
-          <p:cNvPr id="4" name="TextBox 3"/>
-          <p:cNvSpPr txBox="1"/>
+              <a:t>One condition, end to end</a:t>
+            </a:r>
+          </a:p>
+        </p:txBody>
+      </p:sp>
+      <p:pic>
+        <p:nvPicPr>
+          <p:cNvPr id="4" name="Picture 3" descr="image.jpg"/>
+          <p:cNvPicPr>
+            <a:picLocks noChangeAspect="1"/>
+          </p:cNvPicPr>
           <p:nvPr/>
-        </p:nvSpPr>
+        </p:nvPicPr>
+        <p:blipFill>
+          <a:blip r:embed="rId2"/>
+          <a:stretch>
+            <a:fillRect/>
+          </a:stretch>
+        </p:blipFill>
         <p:spPr>
           <a:xfrm>
             <a:off x="658368" y="1755648"/>
-            <a:ext cx="1691640" cy="420624"/>
-          </a:xfrm>
-          <a:prstGeom prst="rect">
-            <a:avLst/>
-          </a:prstGeom>
-          <a:noFill/>
-        </p:spPr>
-        <p:txBody>
-          <a:bodyPr wrap="square">
-            <a:spAutoFit/>
-          </a:bodyPr>
-          <a:lstStyle/>
-          <a:p>
-            <a:r>
-              <a:rPr sz="1400">
-                <a:solidFill>
-                  <a:srgbClr val="5C6E78"/>
-                </a:solidFill>
-              </a:rPr>
-              <a:t>k = 5</a:t>
-            </a:r>
-          </a:p>
-        </p:txBody>
-      </p:sp>
-      <p:sp>
-        <p:nvSpPr>
-          <p:cNvPr id="5" name="Rectangle 4"/>
-          <p:cNvSpPr/>
-          <p:nvPr/>
-        </p:nvSpPr>
-        <p:spPr>
-          <a:xfrm>
-            <a:off x="2487168" y="1819656"/>
-            <a:ext cx="7857439" cy="274320"/>
-          </a:xfrm>
-          <a:prstGeom prst="rect">
-            <a:avLst/>
-          </a:prstGeom>
-          <a:solidFill>
-            <a:srgbClr val="F2F5F6"/>
-          </a:solidFill>
-          <a:ln>
-            <a:solidFill>
-              <a:srgbClr val="D2DDE1"/>
-            </a:solidFill>
-          </a:ln>
-          <a:effectLst/>
-        </p:spPr>
-        <p:style>
-          <a:lnRef idx="1">
-            <a:schemeClr val="accent1"/>
-          </a:lnRef>
-          <a:fillRef idx="3">
-            <a:schemeClr val="accent1"/>
-          </a:fillRef>
-          <a:effectRef idx="2">
-            <a:schemeClr val="accent1"/>
-          </a:effectRef>
-          <a:fontRef idx="minor">
-            <a:schemeClr val="lt1"/>
-          </a:fontRef>
-        </p:style>
-        <p:txBody>
-          <a:bodyPr rtlCol="0" anchor="ctr"/>
-          <a:lstStyle/>
-          <a:p>
-            <a:pPr algn="ctr"/>
-          </a:p>
-        </p:txBody>
-      </p:sp>
-      <p:sp>
-        <p:nvSpPr>
-          <p:cNvPr id="6" name="Rectangle 5"/>
-          <p:cNvSpPr/>
-          <p:nvPr/>
-        </p:nvSpPr>
-        <p:spPr>
-          <a:xfrm>
-            <a:off x="6415887" y="1783080"/>
-            <a:ext cx="9144" cy="347472"/>
-          </a:xfrm>
-          <a:prstGeom prst="rect">
-            <a:avLst/>
-          </a:prstGeom>
-          <a:solidFill>
-            <a:srgbClr val="5C6E78"/>
-          </a:solidFill>
-          <a:ln>
-            <a:noFill/>
-          </a:ln>
-          <a:effectLst/>
-        </p:spPr>
-        <p:style>
-          <a:lnRef idx="1">
-            <a:schemeClr val="accent1"/>
-          </a:lnRef>
-          <a:fillRef idx="3">
-            <a:schemeClr val="accent1"/>
-          </a:fillRef>
-          <a:effectRef idx="2">
-            <a:schemeClr val="accent1"/>
-          </a:effectRef>
-          <a:fontRef idx="minor">
-            <a:schemeClr val="lt1"/>
-          </a:fontRef>
-        </p:style>
-        <p:txBody>
-          <a:bodyPr rtlCol="0" anchor="ctr"/>
-          <a:lstStyle/>
-          <a:p>
-            <a:pPr algn="ctr"/>
-          </a:p>
-        </p:txBody>
-      </p:sp>
-      <p:sp>
-        <p:nvSpPr>
-          <p:cNvPr id="7" name="Rectangle 6"/>
-          <p:cNvSpPr/>
-          <p:nvPr/>
-        </p:nvSpPr>
-        <p:spPr>
-          <a:xfrm>
-            <a:off x="6415887" y="1837944"/>
-            <a:ext cx="1398624" cy="237744"/>
-          </a:xfrm>
-          <a:prstGeom prst="rect">
-            <a:avLst/>
-          </a:prstGeom>
-          <a:solidFill>
-            <a:srgbClr val="1C7C54"/>
-          </a:solidFill>
-          <a:ln>
-            <a:noFill/>
-          </a:ln>
-          <a:effectLst/>
-        </p:spPr>
-        <p:style>
-          <a:lnRef idx="1">
-            <a:schemeClr val="accent1"/>
-          </a:lnRef>
-          <a:fillRef idx="3">
-            <a:schemeClr val="accent1"/>
-          </a:fillRef>
-          <a:effectRef idx="2">
-            <a:schemeClr val="accent1"/>
-          </a:effectRef>
-          <a:fontRef idx="minor">
-            <a:schemeClr val="lt1"/>
-          </a:fontRef>
-        </p:style>
-        <p:txBody>
-          <a:bodyPr rtlCol="0" anchor="ctr"/>
-          <a:lstStyle/>
-          <a:p>
-            <a:pPr algn="ctr"/>
-          </a:p>
-        </p:txBody>
-      </p:sp>
-      <p:sp>
-        <p:nvSpPr>
-          <p:cNvPr id="8" name="TextBox 7"/>
-          <p:cNvSpPr txBox="1"/>
-          <p:nvPr/>
-        </p:nvSpPr>
-        <p:spPr>
-          <a:xfrm>
-            <a:off x="10481767" y="1755648"/>
-            <a:ext cx="1051560" cy="420624"/>
-          </a:xfrm>
-          <a:prstGeom prst="rect">
-            <a:avLst/>
-          </a:prstGeom>
-          <a:noFill/>
-        </p:spPr>
-        <p:txBody>
-          <a:bodyPr wrap="square">
-            <a:spAutoFit/>
-          </a:bodyPr>
-          <a:lstStyle/>
-          <a:p>
-            <a:pPr algn="ctr"/>
-            <a:r>
-              <a:rPr sz="1400" b="1">
-                <a:solidFill>
-                  <a:srgbClr val="1C7C54"/>
-                </a:solidFill>
-              </a:rPr>
-              <a:t>+0.285</a:t>
-            </a:r>
-          </a:p>
-        </p:txBody>
-      </p:sp>
-      <p:sp>
-        <p:nvSpPr>
-          <p:cNvPr id="9" name="TextBox 8"/>
-          <p:cNvSpPr txBox="1"/>
-          <p:nvPr/>
-        </p:nvSpPr>
-        <p:spPr>
-          <a:xfrm>
-            <a:off x="658368" y="2176272"/>
-            <a:ext cx="1691640" cy="420624"/>
-          </a:xfrm>
-          <a:prstGeom prst="rect">
-            <a:avLst/>
-          </a:prstGeom>
-          <a:noFill/>
-        </p:spPr>
-        <p:txBody>
-          <a:bodyPr wrap="square">
-            <a:spAutoFit/>
-          </a:bodyPr>
-          <a:lstStyle/>
-          <a:p>
-            <a:r>
-              <a:rPr sz="1400">
-                <a:solidFill>
-                  <a:srgbClr val="5C6E78"/>
-                </a:solidFill>
-              </a:rPr>
-              <a:t>k = 10</a:t>
-            </a:r>
-          </a:p>
-        </p:txBody>
-      </p:sp>
-      <p:sp>
-        <p:nvSpPr>
-          <p:cNvPr id="10" name="Rectangle 9"/>
-          <p:cNvSpPr/>
-          <p:nvPr/>
-        </p:nvSpPr>
-        <p:spPr>
-          <a:xfrm>
-            <a:off x="2487168" y="2240280"/>
-            <a:ext cx="7857439" cy="274320"/>
-          </a:xfrm>
-          <a:prstGeom prst="rect">
-            <a:avLst/>
-          </a:prstGeom>
-          <a:solidFill>
-            <a:srgbClr val="F2F5F6"/>
-          </a:solidFill>
-          <a:ln>
-            <a:solidFill>
-              <a:srgbClr val="D2DDE1"/>
-            </a:solidFill>
-          </a:ln>
-          <a:effectLst/>
-        </p:spPr>
-        <p:style>
-          <a:lnRef idx="1">
-            <a:schemeClr val="accent1"/>
-          </a:lnRef>
-          <a:fillRef idx="3">
-            <a:schemeClr val="accent1"/>
-          </a:fillRef>
-          <a:effectRef idx="2">
-            <a:schemeClr val="accent1"/>
-          </a:effectRef>
-          <a:fontRef idx="minor">
-            <a:schemeClr val="lt1"/>
-          </a:fontRef>
-        </p:style>
-        <p:txBody>
-          <a:bodyPr rtlCol="0" anchor="ctr"/>
-          <a:lstStyle/>
-          <a:p>
-            <a:pPr algn="ctr"/>
-          </a:p>
-        </p:txBody>
-      </p:sp>
-      <p:sp>
-        <p:nvSpPr>
-          <p:cNvPr id="11" name="Rectangle 10"/>
-          <p:cNvSpPr/>
-          <p:nvPr/>
-        </p:nvSpPr>
-        <p:spPr>
-          <a:xfrm>
-            <a:off x="6415887" y="2203704"/>
-            <a:ext cx="9144" cy="347472"/>
-          </a:xfrm>
-          <a:prstGeom prst="rect">
-            <a:avLst/>
-          </a:prstGeom>
-          <a:solidFill>
-            <a:srgbClr val="5C6E78"/>
-          </a:solidFill>
-          <a:ln>
-            <a:noFill/>
-          </a:ln>
-          <a:effectLst/>
-        </p:spPr>
-        <p:style>
-          <a:lnRef idx="1">
-            <a:schemeClr val="accent1"/>
-          </a:lnRef>
-          <a:fillRef idx="3">
-            <a:schemeClr val="accent1"/>
-          </a:fillRef>
-          <a:effectRef idx="2">
-            <a:schemeClr val="accent1"/>
-          </a:effectRef>
-          <a:fontRef idx="minor">
-            <a:schemeClr val="lt1"/>
-          </a:fontRef>
-        </p:style>
-        <p:txBody>
-          <a:bodyPr rtlCol="0" anchor="ctr"/>
-          <a:lstStyle/>
-          <a:p>
-            <a:pPr algn="ctr"/>
-          </a:p>
-        </p:txBody>
-      </p:sp>
-      <p:sp>
-        <p:nvSpPr>
-          <p:cNvPr id="12" name="Rectangle 11"/>
-          <p:cNvSpPr/>
-          <p:nvPr/>
-        </p:nvSpPr>
-        <p:spPr>
-          <a:xfrm>
-            <a:off x="6400173" y="2258568"/>
-            <a:ext cx="15714" cy="237744"/>
-          </a:xfrm>
-          <a:prstGeom prst="rect">
-            <a:avLst/>
-          </a:prstGeom>
-          <a:solidFill>
-            <a:srgbClr val="B3452C"/>
-          </a:solidFill>
-          <a:ln>
-            <a:noFill/>
-          </a:ln>
-          <a:effectLst/>
-        </p:spPr>
-        <p:style>
-          <a:lnRef idx="1">
-            <a:schemeClr val="accent1"/>
-          </a:lnRef>
-          <a:fillRef idx="3">
-            <a:schemeClr val="accent1"/>
-          </a:fillRef>
-          <a:effectRef idx="2">
-            <a:schemeClr val="accent1"/>
-          </a:effectRef>
-          <a:fontRef idx="minor">
-            <a:schemeClr val="lt1"/>
-          </a:fontRef>
-        </p:style>
-        <p:txBody>
-          <a:bodyPr rtlCol="0" anchor="ctr"/>
-          <a:lstStyle/>
-          <a:p>
-            <a:pPr algn="ctr"/>
-          </a:p>
-        </p:txBody>
-      </p:sp>
-      <p:sp>
-        <p:nvSpPr>
-          <p:cNvPr id="13" name="TextBox 12"/>
-          <p:cNvSpPr txBox="1"/>
-          <p:nvPr/>
-        </p:nvSpPr>
-        <p:spPr>
-          <a:xfrm>
-            <a:off x="10481767" y="2176272"/>
-            <a:ext cx="1051560" cy="420624"/>
-          </a:xfrm>
-          <a:prstGeom prst="rect">
-            <a:avLst/>
-          </a:prstGeom>
-          <a:noFill/>
-        </p:spPr>
-        <p:txBody>
-          <a:bodyPr wrap="square">
-            <a:spAutoFit/>
-          </a:bodyPr>
-          <a:lstStyle/>
-          <a:p>
-            <a:pPr algn="ctr"/>
-            <a:r>
-              <a:rPr sz="1400" b="1">
-                <a:solidFill>
-                  <a:srgbClr val="B3452C"/>
-                </a:solidFill>
-              </a:rPr>
-              <a:t>-0.003</a:t>
-            </a:r>
-          </a:p>
-        </p:txBody>
-      </p:sp>
-      <p:sp>
-        <p:nvSpPr>
-          <p:cNvPr id="14" name="TextBox 13"/>
-          <p:cNvSpPr txBox="1"/>
-          <p:nvPr/>
-        </p:nvSpPr>
-        <p:spPr>
-          <a:xfrm>
-            <a:off x="658368" y="2596896"/>
-            <a:ext cx="1691640" cy="420624"/>
-          </a:xfrm>
-          <a:prstGeom prst="rect">
-            <a:avLst/>
-          </a:prstGeom>
-          <a:noFill/>
-        </p:spPr>
-        <p:txBody>
-          <a:bodyPr wrap="square">
-            <a:spAutoFit/>
-          </a:bodyPr>
-          <a:lstStyle/>
-          <a:p>
-            <a:r>
-              <a:rPr sz="1400">
-                <a:solidFill>
-                  <a:srgbClr val="5C6E78"/>
-                </a:solidFill>
-              </a:rPr>
-              <a:t>k = 20</a:t>
-            </a:r>
-          </a:p>
-        </p:txBody>
-      </p:sp>
-      <p:sp>
-        <p:nvSpPr>
-          <p:cNvPr id="15" name="Rectangle 14"/>
-          <p:cNvSpPr/>
-          <p:nvPr/>
-        </p:nvSpPr>
-        <p:spPr>
-          <a:xfrm>
-            <a:off x="2487168" y="2660904"/>
-            <a:ext cx="7857439" cy="274320"/>
-          </a:xfrm>
-          <a:prstGeom prst="rect">
-            <a:avLst/>
-          </a:prstGeom>
-          <a:solidFill>
-            <a:srgbClr val="F2F5F6"/>
-          </a:solidFill>
-          <a:ln>
-            <a:solidFill>
-              <a:srgbClr val="D2DDE1"/>
-            </a:solidFill>
-          </a:ln>
-          <a:effectLst/>
-        </p:spPr>
-        <p:style>
-          <a:lnRef idx="1">
-            <a:schemeClr val="accent1"/>
-          </a:lnRef>
-          <a:fillRef idx="3">
-            <a:schemeClr val="accent1"/>
-          </a:fillRef>
-          <a:effectRef idx="2">
-            <a:schemeClr val="accent1"/>
-          </a:effectRef>
-          <a:fontRef idx="minor">
-            <a:schemeClr val="lt1"/>
-          </a:fontRef>
-        </p:style>
-        <p:txBody>
-          <a:bodyPr rtlCol="0" anchor="ctr"/>
-          <a:lstStyle/>
-          <a:p>
-            <a:pPr algn="ctr"/>
-          </a:p>
-        </p:txBody>
-      </p:sp>
-      <p:sp>
-        <p:nvSpPr>
-          <p:cNvPr id="16" name="Rectangle 15"/>
-          <p:cNvSpPr/>
-          <p:nvPr/>
-        </p:nvSpPr>
-        <p:spPr>
-          <a:xfrm>
-            <a:off x="6415887" y="2624328"/>
-            <a:ext cx="9144" cy="347472"/>
-          </a:xfrm>
-          <a:prstGeom prst="rect">
-            <a:avLst/>
-          </a:prstGeom>
-          <a:solidFill>
-            <a:srgbClr val="5C6E78"/>
-          </a:solidFill>
-          <a:ln>
-            <a:noFill/>
-          </a:ln>
-          <a:effectLst/>
-        </p:spPr>
-        <p:style>
-          <a:lnRef idx="1">
-            <a:schemeClr val="accent1"/>
-          </a:lnRef>
-          <a:fillRef idx="3">
-            <a:schemeClr val="accent1"/>
-          </a:fillRef>
-          <a:effectRef idx="2">
-            <a:schemeClr val="accent1"/>
-          </a:effectRef>
-          <a:fontRef idx="minor">
-            <a:schemeClr val="lt1"/>
-          </a:fontRef>
-        </p:style>
-        <p:txBody>
-          <a:bodyPr rtlCol="0" anchor="ctr"/>
-          <a:lstStyle/>
-          <a:p>
-            <a:pPr algn="ctr"/>
-          </a:p>
-        </p:txBody>
-      </p:sp>
-      <p:sp>
-        <p:nvSpPr>
-          <p:cNvPr id="17" name="Rectangle 16"/>
-          <p:cNvSpPr/>
-          <p:nvPr/>
-        </p:nvSpPr>
-        <p:spPr>
-          <a:xfrm>
-            <a:off x="3382916" y="2679192"/>
-            <a:ext cx="3032971" cy="237744"/>
-          </a:xfrm>
-          <a:prstGeom prst="rect">
-            <a:avLst/>
-          </a:prstGeom>
-          <a:solidFill>
-            <a:srgbClr val="B3452C"/>
-          </a:solidFill>
-          <a:ln>
-            <a:noFill/>
-          </a:ln>
-          <a:effectLst/>
-        </p:spPr>
-        <p:style>
-          <a:lnRef idx="1">
-            <a:schemeClr val="accent1"/>
-          </a:lnRef>
-          <a:fillRef idx="3">
-            <a:schemeClr val="accent1"/>
-          </a:fillRef>
-          <a:effectRef idx="2">
-            <a:schemeClr val="accent1"/>
-          </a:effectRef>
-          <a:fontRef idx="minor">
-            <a:schemeClr val="lt1"/>
-          </a:fontRef>
-        </p:style>
-        <p:txBody>
-          <a:bodyPr rtlCol="0" anchor="ctr"/>
-          <a:lstStyle/>
-          <a:p>
-            <a:pPr algn="ctr"/>
-          </a:p>
-        </p:txBody>
-      </p:sp>
-      <p:sp>
-        <p:nvSpPr>
-          <p:cNvPr id="18" name="TextBox 17"/>
-          <p:cNvSpPr txBox="1"/>
-          <p:nvPr/>
-        </p:nvSpPr>
-        <p:spPr>
-          <a:xfrm>
-            <a:off x="10481767" y="2596896"/>
-            <a:ext cx="1051560" cy="420624"/>
-          </a:xfrm>
-          <a:prstGeom prst="rect">
-            <a:avLst/>
-          </a:prstGeom>
-          <a:noFill/>
-        </p:spPr>
-        <p:txBody>
-          <a:bodyPr wrap="square">
-            <a:spAutoFit/>
-          </a:bodyPr>
-          <a:lstStyle/>
-          <a:p>
-            <a:pPr algn="ctr"/>
-            <a:r>
-              <a:rPr sz="1400" b="1">
-                <a:solidFill>
-                  <a:srgbClr val="B3452C"/>
-                </a:solidFill>
-              </a:rPr>
-              <a:t>-0.618</a:t>
-            </a:r>
-          </a:p>
-        </p:txBody>
-      </p:sp>
-      <p:sp>
-        <p:nvSpPr>
-          <p:cNvPr id="19" name="TextBox 18"/>
-          <p:cNvSpPr txBox="1"/>
-          <p:nvPr/>
-        </p:nvSpPr>
-        <p:spPr>
-          <a:xfrm>
-            <a:off x="658368" y="3200400"/>
-            <a:ext cx="10874959" cy="3200400"/>
-          </a:xfrm>
-          <a:prstGeom prst="rect">
-            <a:avLst/>
-          </a:prstGeom>
-          <a:noFill/>
-        </p:spPr>
-        <p:txBody>
-          <a:bodyPr wrap="square">
-            <a:spAutoFit/>
-          </a:bodyPr>
-          <a:lstStyle/>
-          <a:p>
-            <a:pPr>
-              <a:spcAft>
-                <a:spcPts val="1000"/>
-              </a:spcAft>
-            </a:pPr>
-            <a:r>
-              <a:rPr sz="1400">
-                <a:solidFill>
-                  <a:srgbClr val="16202A"/>
-                </a:solidFill>
-              </a:rPr>
-              <a:t>Outpainting at the 200% ratio, on truck, paired within seed. The treatment is identical at every subset size — only the number of real photographs changes. Best single condition anywhere in the study: +0.285 dB.</a:t>
-            </a:r>
-          </a:p>
-          <a:p>
-            <a:pPr>
-              <a:spcAft>
-                <a:spcPts val="1000"/>
-              </a:spcAft>
-            </a:pPr>
-            <a:r>
-              <a:rPr sz="1400">
-                <a:solidFill>
-                  <a:srgbClr val="5C6E78"/>
-                </a:solidFill>
-              </a:rPr>
-              <a:t>For scale: one extra real photograph between k = 5 and k = 10 is worth +1.91 dB total. Augmentation buys a fraction of a photograph, and only while photographs are scarce.</a:t>
-            </a:r>
-          </a:p>
-        </p:txBody>
-      </p:sp>
+            <a:ext cx="10874959" cy="3520053"/>
+          </a:xfrm>
+          <a:prstGeom prst="rect">
+            <a:avLst/>
+          </a:prstGeom>
+        </p:spPr>
+      </p:pic>
     </p:spTree>
   </p:cSld>
   <p:clrMapOvr>
@@ -7849,14 +8662,47 @@
                   <a:srgbClr val="0B6E7F"/>
                 </a:solidFill>
               </a:rPr>
-              <a:t>RESULT · WHAT IT LOOKS LIKE</a:t>
+              <a:t>DESIGN · THE GRID</a:t>
+            </a:r>
+          </a:p>
+        </p:txBody>
+      </p:sp>
+      <p:sp>
+        <p:nvSpPr>
+          <p:cNvPr id="3" name="TextBox 2"/>
+          <p:cNvSpPr txBox="1"/>
+          <p:nvPr/>
+        </p:nvSpPr>
+        <p:spPr>
+          <a:xfrm>
+            <a:off x="658368" y="886968"/>
+            <a:ext cx="10874959" cy="914400"/>
+          </a:xfrm>
+          <a:prstGeom prst="rect">
+            <a:avLst/>
+          </a:prstGeom>
+          <a:noFill/>
+        </p:spPr>
+        <p:txBody>
+          <a:bodyPr wrap="square">
+            <a:spAutoFit/>
+          </a:bodyPr>
+          <a:lstStyle/>
+          <a:p>
+            <a:r>
+              <a:rPr sz="2600" b="1">
+                <a:solidFill>
+                  <a:srgbClr val="16202A"/>
+                </a:solidFill>
+              </a:rPr>
+              <a:t>What was actually run</a:t>
             </a:r>
           </a:p>
         </p:txBody>
       </p:sp>
       <p:pic>
         <p:nvPicPr>
-          <p:cNvPr id="3" name="Picture 2" descr="image.jpg"/>
+          <p:cNvPr id="4" name="Picture 3" descr="image.jpg"/>
           <p:cNvPicPr>
             <a:picLocks noChangeAspect="1"/>
           </p:cNvPicPr>
@@ -7870,8 +8716,8 @@
         </p:blipFill>
         <p:spPr>
           <a:xfrm>
-            <a:off x="658368" y="886968"/>
-            <a:ext cx="10874959" cy="4164470"/>
+            <a:off x="658368" y="1755648"/>
+            <a:ext cx="10874959" cy="4155379"/>
           </a:xfrm>
           <a:prstGeom prst="rect">
             <a:avLst/>
@@ -7924,7 +8770,7 @@
                   <a:srgbClr val="0B6E7F"/>
                 </a:solidFill>
               </a:rPr>
-              <a:t>GENERALISATION</a:t>
+              <a:t>DESIGN · RIGOUR</a:t>
             </a:r>
           </a:p>
         </p:txBody>
@@ -7957,7 +8803,7 @@
                   <a:srgbClr val="16202A"/>
                 </a:solidFill>
               </a:rPr>
-              <a:t>It reproduces indoors</a:t>
+              <a:t>The measurement has to survive a 0.2 dB effect</a:t>
             </a:r>
           </a:p>
         </p:txBody>
@@ -7971,7 +8817,7 @@
         <p:spPr>
           <a:xfrm>
             <a:off x="658368" y="1755648"/>
-            <a:ext cx="3472586" cy="1828800"/>
+            <a:ext cx="10874959" cy="4645152"/>
           </a:xfrm>
           <a:prstGeom prst="rect">
             <a:avLst/>
@@ -7984,162 +8830,48 @@
           </a:bodyPr>
           <a:lstStyle/>
           <a:p>
-            <a:r>
-              <a:rPr sz="3000" b="1">
-                <a:solidFill>
-                  <a:srgbClr val="16202A"/>
-                </a:solidFill>
-              </a:rPr>
-              <a:t>+0.989</a:t>
-            </a:r>
-          </a:p>
-          <a:p>
-            <a:r>
-              <a:rPr sz="1200">
-                <a:solidFill>
-                  <a:srgbClr val="5C6E78"/>
-                </a:solidFill>
-              </a:rPr>
-              <a:t>dB at k = 5 — stronger than outdoors</a:t>
-            </a:r>
-          </a:p>
-        </p:txBody>
-      </p:sp>
-      <p:sp>
-        <p:nvSpPr>
-          <p:cNvPr id="5" name="TextBox 4"/>
-          <p:cNvSpPr txBox="1"/>
-          <p:nvPr/>
-        </p:nvSpPr>
-        <p:spPr>
-          <a:xfrm>
-            <a:off x="4359554" y="1755648"/>
-            <a:ext cx="3472586" cy="1828800"/>
-          </a:xfrm>
-          <a:prstGeom prst="rect">
-            <a:avLst/>
-          </a:prstGeom>
-          <a:noFill/>
-        </p:spPr>
-        <p:txBody>
-          <a:bodyPr wrap="square">
-            <a:spAutoFit/>
-          </a:bodyPr>
-          <a:lstStyle/>
-          <a:p>
-            <a:r>
-              <a:rPr sz="3000" b="1">
-                <a:solidFill>
-                  <a:srgbClr val="16202A"/>
-                </a:solidFill>
-              </a:rPr>
-              <a:t>-0.242</a:t>
-            </a:r>
-          </a:p>
-          <a:p>
-            <a:r>
-              <a:rPr sz="1200">
-                <a:solidFill>
-                  <a:srgbClr val="5C6E78"/>
-                </a:solidFill>
-              </a:rPr>
-              <a:t>dB at k = 20 — the sign flip repeats</a:t>
-            </a:r>
-          </a:p>
-        </p:txBody>
-      </p:sp>
-      <p:sp>
-        <p:nvSpPr>
-          <p:cNvPr id="6" name="TextBox 5"/>
-          <p:cNvSpPr txBox="1"/>
-          <p:nvPr/>
-        </p:nvSpPr>
-        <p:spPr>
-          <a:xfrm>
-            <a:off x="8060740" y="1755648"/>
-            <a:ext cx="3472586" cy="1828800"/>
-          </a:xfrm>
-          <a:prstGeom prst="rect">
-            <a:avLst/>
-          </a:prstGeom>
-          <a:noFill/>
-        </p:spPr>
-        <p:txBody>
-          <a:bodyPr wrap="square">
-            <a:spAutoFit/>
-          </a:bodyPr>
-          <a:lstStyle/>
-          <a:p>
-            <a:r>
-              <a:rPr sz="3000" b="1">
-                <a:solidFill>
-                  <a:srgbClr val="16202A"/>
-                </a:solidFill>
-              </a:rPr>
-              <a:t>1.68</a:t>
-            </a:r>
-          </a:p>
-          <a:p>
-            <a:r>
-              <a:rPr sz="1200">
-                <a:solidFill>
-                  <a:srgbClr val="5C6E78"/>
-                </a:solidFill>
-              </a:rPr>
-              <a:t>dB baseline scatter between seeds — which five views you draw matters far more in a room</a:t>
-            </a:r>
-          </a:p>
-        </p:txBody>
-      </p:sp>
-      <p:sp>
-        <p:nvSpPr>
-          <p:cNvPr id="7" name="TextBox 6"/>
-          <p:cNvSpPr txBox="1"/>
-          <p:nvPr/>
-        </p:nvSpPr>
-        <p:spPr>
-          <a:xfrm>
-            <a:off x="658368" y="3721608"/>
-            <a:ext cx="10874959" cy="2679192"/>
-          </a:xfrm>
-          <a:prstGeom prst="rect">
-            <a:avLst/>
-          </a:prstGeom>
-          <a:noFill/>
-        </p:spPr>
-        <p:txBody>
-          <a:bodyPr wrap="square">
-            <a:spAutoFit/>
-          </a:bodyPr>
-          <a:lstStyle/>
-          <a:p>
             <a:pPr>
               <a:spcAft>
-                <a:spcPts val="1000"/>
+                <a:spcPts val="900"/>
               </a:spcAft>
             </a:pPr>
             <a:r>
-              <a:rPr sz="1600">
+              <a:rPr sz="1500">
                 <a:solidFill>
                   <a:srgbClr val="16202A"/>
                 </a:solidFill>
               </a:rPr>
-              <a:t>34 further runs repeat the outpainting sweep on drjohnson (Deep Blending, 230 views, an indoor room) — a different capture regime, a different scene scale.</a:t>
+              <a:t>•  Frozen held-out split. Byte-identical test images in every run — verified by hash across all 242 of them.</a:t>
             </a:r>
           </a:p>
           <a:p>
             <a:pPr>
               <a:spcAft>
-                <a:spcPts val="1000"/>
+                <a:spcPts val="900"/>
               </a:spcAft>
             </a:pPr>
             <a:r>
-              <a:rPr sz="1400">
+              <a:rPr sz="1500">
                 <a:solidFill>
                   <a:srgbClr val="16202A"/>
                 </a:solidFill>
               </a:rPr>
-              <a:t>Indoors all three metrics move together, where on truck outpainting bought PSNR while SSIM stayed flat. Agreement across three metrics with different failure modes is much harder to get by chance than agreement in one.</a:t>
+              <a:t>•  Measured noise floor. The identical configuration re-run three times varies by 0.039 dB, so a 0.2 dB effect is resolvable and a 0.03 dB one is not.</a:t>
+            </a:r>
+          </a:p>
+          <a:p>
+            <a:pPr>
+              <a:spcAft>
+                <a:spcPts val="900"/>
+              </a:spcAft>
+            </a:pPr>
+            <a:r>
+              <a:rPr sz="1500">
+                <a:solidFill>
+                  <a:srgbClr val="16202A"/>
+                </a:solidFill>
+              </a:rPr>
+              <a:t>•  Farthest-point sampling. Subsets are spread over the camera trajectory rather than drawn at random; the seed picks only the starting camera.</a:t>
             </a:r>
           </a:p>
         </p:txBody>
@@ -8190,7 +8922,7 @@
                   <a:srgbClr val="0B6E7F"/>
                 </a:solidFill>
               </a:rPr>
-              <a:t>EXPLANATION</a:t>
+              <a:t>RESULT</a:t>
             </a:r>
           </a:p>
         </p:txBody>
@@ -8223,7 +8955,7 @@
                   <a:srgbClr val="16202A"/>
                 </a:solidFill>
               </a:rPr>
-              <a:t>Two terms, one decaying and one constant</a:t>
+              <a:t>The same augmentation helps at five views and harms at twenty</a:t>
             </a:r>
           </a:p>
         </p:txBody>
@@ -8237,7 +8969,7 @@
         <p:spPr>
           <a:xfrm>
             <a:off x="658368" y="1755648"/>
-            <a:ext cx="5323179" cy="1828800"/>
+            <a:ext cx="1691640" cy="420624"/>
           </a:xfrm>
           <a:prstGeom prst="rect">
             <a:avLst/>
@@ -8249,39 +8981,162 @@
             <a:spAutoFit/>
           </a:bodyPr>
           <a:lstStyle/>
-          <a:p/>
-          <a:p>
-            <a:r>
-              <a:rPr sz="1500" b="1">
-                <a:solidFill>
-                  <a:srgbClr val="16202A"/>
-                </a:solidFill>
-              </a:rPr>
-              <a:t>Coverage — decays</a:t>
-            </a:r>
-          </a:p>
-          <a:p>
-            <a:r>
-              <a:rPr sz="1200">
+          <a:p>
+            <a:r>
+              <a:rPr sz="1400">
                 <a:solidFill>
                   <a:srgbClr val="5C6E78"/>
                 </a:solidFill>
               </a:rPr>
-              <a:t>A synthetic view supplies scene content no real camera saw. That is worth a lot at five views and very little at twenty: the per-view value of a real photograph falls by an order of magnitude across the same range.</a:t>
-            </a:r>
-          </a:p>
-        </p:txBody>
-      </p:sp>
-      <p:sp>
-        <p:nvSpPr>
-          <p:cNvPr id="5" name="TextBox 4"/>
+              <a:t>k = 5</a:t>
+            </a:r>
+          </a:p>
+        </p:txBody>
+      </p:sp>
+      <p:sp>
+        <p:nvSpPr>
+          <p:cNvPr id="5" name="Rectangle 4"/>
+          <p:cNvSpPr/>
+          <p:nvPr/>
+        </p:nvSpPr>
+        <p:spPr>
+          <a:xfrm>
+            <a:off x="2487168" y="1819656"/>
+            <a:ext cx="7857439" cy="274320"/>
+          </a:xfrm>
+          <a:prstGeom prst="rect">
+            <a:avLst/>
+          </a:prstGeom>
+          <a:solidFill>
+            <a:srgbClr val="F2F5F6"/>
+          </a:solidFill>
+          <a:ln>
+            <a:solidFill>
+              <a:srgbClr val="D2DDE1"/>
+            </a:solidFill>
+          </a:ln>
+          <a:effectLst/>
+        </p:spPr>
+        <p:style>
+          <a:lnRef idx="1">
+            <a:schemeClr val="accent1"/>
+          </a:lnRef>
+          <a:fillRef idx="3">
+            <a:schemeClr val="accent1"/>
+          </a:fillRef>
+          <a:effectRef idx="2">
+            <a:schemeClr val="accent1"/>
+          </a:effectRef>
+          <a:fontRef idx="minor">
+            <a:schemeClr val="lt1"/>
+          </a:fontRef>
+        </p:style>
+        <p:txBody>
+          <a:bodyPr rtlCol="0" anchor="ctr"/>
+          <a:lstStyle/>
+          <a:p>
+            <a:pPr algn="ctr"/>
+          </a:p>
+        </p:txBody>
+      </p:sp>
+      <p:sp>
+        <p:nvSpPr>
+          <p:cNvPr id="6" name="Rectangle 5"/>
+          <p:cNvSpPr/>
+          <p:nvPr/>
+        </p:nvSpPr>
+        <p:spPr>
+          <a:xfrm>
+            <a:off x="6415887" y="1783080"/>
+            <a:ext cx="9144" cy="347472"/>
+          </a:xfrm>
+          <a:prstGeom prst="rect">
+            <a:avLst/>
+          </a:prstGeom>
+          <a:solidFill>
+            <a:srgbClr val="5C6E78"/>
+          </a:solidFill>
+          <a:ln>
+            <a:noFill/>
+          </a:ln>
+          <a:effectLst/>
+        </p:spPr>
+        <p:style>
+          <a:lnRef idx="1">
+            <a:schemeClr val="accent1"/>
+          </a:lnRef>
+          <a:fillRef idx="3">
+            <a:schemeClr val="accent1"/>
+          </a:fillRef>
+          <a:effectRef idx="2">
+            <a:schemeClr val="accent1"/>
+          </a:effectRef>
+          <a:fontRef idx="minor">
+            <a:schemeClr val="lt1"/>
+          </a:fontRef>
+        </p:style>
+        <p:txBody>
+          <a:bodyPr rtlCol="0" anchor="ctr"/>
+          <a:lstStyle/>
+          <a:p>
+            <a:pPr algn="ctr"/>
+          </a:p>
+        </p:txBody>
+      </p:sp>
+      <p:sp>
+        <p:nvSpPr>
+          <p:cNvPr id="7" name="Rectangle 6"/>
+          <p:cNvSpPr/>
+          <p:nvPr/>
+        </p:nvSpPr>
+        <p:spPr>
+          <a:xfrm>
+            <a:off x="6415887" y="1837944"/>
+            <a:ext cx="1398624" cy="237744"/>
+          </a:xfrm>
+          <a:prstGeom prst="rect">
+            <a:avLst/>
+          </a:prstGeom>
+          <a:solidFill>
+            <a:srgbClr val="1C7C54"/>
+          </a:solidFill>
+          <a:ln>
+            <a:noFill/>
+          </a:ln>
+          <a:effectLst/>
+        </p:spPr>
+        <p:style>
+          <a:lnRef idx="1">
+            <a:schemeClr val="accent1"/>
+          </a:lnRef>
+          <a:fillRef idx="3">
+            <a:schemeClr val="accent1"/>
+          </a:fillRef>
+          <a:effectRef idx="2">
+            <a:schemeClr val="accent1"/>
+          </a:effectRef>
+          <a:fontRef idx="minor">
+            <a:schemeClr val="lt1"/>
+          </a:fontRef>
+        </p:style>
+        <p:txBody>
+          <a:bodyPr rtlCol="0" anchor="ctr"/>
+          <a:lstStyle/>
+          <a:p>
+            <a:pPr algn="ctr"/>
+          </a:p>
+        </p:txBody>
+      </p:sp>
+      <p:sp>
+        <p:nvSpPr>
+          <p:cNvPr id="8" name="TextBox 7"/>
           <p:cNvSpPr txBox="1"/>
           <p:nvPr/>
         </p:nvSpPr>
         <p:spPr>
           <a:xfrm>
-            <a:off x="6210147" y="1755648"/>
-            <a:ext cx="5323179" cy="1828800"/>
+            <a:off x="10481767" y="1755648"/>
+            <a:ext cx="1051560" cy="420624"/>
           </a:xfrm>
           <a:prstGeom prst="rect">
             <a:avLst/>
@@ -8293,39 +9148,431 @@
             <a:spAutoFit/>
           </a:bodyPr>
           <a:lstStyle/>
-          <a:p/>
-          <a:p>
-            <a:r>
-              <a:rPr sz="1500" b="1">
-                <a:solidFill>
-                  <a:srgbClr val="16202A"/>
-                </a:solidFill>
-              </a:rPr>
-              <a:t>Inconsistency — does not decay</a:t>
-            </a:r>
-          </a:p>
-          <a:p>
-            <a:r>
-              <a:rPr sz="1200">
-                <a:solidFill>
-                  <a:srgbClr val="5C6E78"/>
-                </a:solidFill>
-              </a:rPr>
-              <a:t>A fabricated view contradicts the others. A contradiction is just as harmful at twenty views as at five — arguably worse, because it now contradicts a better-determined geometry.</a:t>
-            </a:r>
-          </a:p>
-        </p:txBody>
-      </p:sp>
-      <p:sp>
-        <p:nvSpPr>
-          <p:cNvPr id="6" name="TextBox 5"/>
+          <a:p>
+            <a:pPr algn="ctr"/>
+            <a:r>
+              <a:rPr sz="1400" b="1">
+                <a:solidFill>
+                  <a:srgbClr val="1C7C54"/>
+                </a:solidFill>
+              </a:rPr>
+              <a:t>+0.285</a:t>
+            </a:r>
+          </a:p>
+        </p:txBody>
+      </p:sp>
+      <p:sp>
+        <p:nvSpPr>
+          <p:cNvPr id="9" name="TextBox 8"/>
           <p:cNvSpPr txBox="1"/>
           <p:nvPr/>
         </p:nvSpPr>
         <p:spPr>
           <a:xfrm>
-            <a:off x="658368" y="3721608"/>
-            <a:ext cx="10874959" cy="2679192"/>
+            <a:off x="658368" y="2176272"/>
+            <a:ext cx="1691640" cy="420624"/>
+          </a:xfrm>
+          <a:prstGeom prst="rect">
+            <a:avLst/>
+          </a:prstGeom>
+          <a:noFill/>
+        </p:spPr>
+        <p:txBody>
+          <a:bodyPr wrap="square">
+            <a:spAutoFit/>
+          </a:bodyPr>
+          <a:lstStyle/>
+          <a:p>
+            <a:r>
+              <a:rPr sz="1400">
+                <a:solidFill>
+                  <a:srgbClr val="5C6E78"/>
+                </a:solidFill>
+              </a:rPr>
+              <a:t>k = 10</a:t>
+            </a:r>
+          </a:p>
+        </p:txBody>
+      </p:sp>
+      <p:sp>
+        <p:nvSpPr>
+          <p:cNvPr id="10" name="Rectangle 9"/>
+          <p:cNvSpPr/>
+          <p:nvPr/>
+        </p:nvSpPr>
+        <p:spPr>
+          <a:xfrm>
+            <a:off x="2487168" y="2240280"/>
+            <a:ext cx="7857439" cy="274320"/>
+          </a:xfrm>
+          <a:prstGeom prst="rect">
+            <a:avLst/>
+          </a:prstGeom>
+          <a:solidFill>
+            <a:srgbClr val="F2F5F6"/>
+          </a:solidFill>
+          <a:ln>
+            <a:solidFill>
+              <a:srgbClr val="D2DDE1"/>
+            </a:solidFill>
+          </a:ln>
+          <a:effectLst/>
+        </p:spPr>
+        <p:style>
+          <a:lnRef idx="1">
+            <a:schemeClr val="accent1"/>
+          </a:lnRef>
+          <a:fillRef idx="3">
+            <a:schemeClr val="accent1"/>
+          </a:fillRef>
+          <a:effectRef idx="2">
+            <a:schemeClr val="accent1"/>
+          </a:effectRef>
+          <a:fontRef idx="minor">
+            <a:schemeClr val="lt1"/>
+          </a:fontRef>
+        </p:style>
+        <p:txBody>
+          <a:bodyPr rtlCol="0" anchor="ctr"/>
+          <a:lstStyle/>
+          <a:p>
+            <a:pPr algn="ctr"/>
+          </a:p>
+        </p:txBody>
+      </p:sp>
+      <p:sp>
+        <p:nvSpPr>
+          <p:cNvPr id="11" name="Rectangle 10"/>
+          <p:cNvSpPr/>
+          <p:nvPr/>
+        </p:nvSpPr>
+        <p:spPr>
+          <a:xfrm>
+            <a:off x="6415887" y="2203704"/>
+            <a:ext cx="9144" cy="347472"/>
+          </a:xfrm>
+          <a:prstGeom prst="rect">
+            <a:avLst/>
+          </a:prstGeom>
+          <a:solidFill>
+            <a:srgbClr val="5C6E78"/>
+          </a:solidFill>
+          <a:ln>
+            <a:noFill/>
+          </a:ln>
+          <a:effectLst/>
+        </p:spPr>
+        <p:style>
+          <a:lnRef idx="1">
+            <a:schemeClr val="accent1"/>
+          </a:lnRef>
+          <a:fillRef idx="3">
+            <a:schemeClr val="accent1"/>
+          </a:fillRef>
+          <a:effectRef idx="2">
+            <a:schemeClr val="accent1"/>
+          </a:effectRef>
+          <a:fontRef idx="minor">
+            <a:schemeClr val="lt1"/>
+          </a:fontRef>
+        </p:style>
+        <p:txBody>
+          <a:bodyPr rtlCol="0" anchor="ctr"/>
+          <a:lstStyle/>
+          <a:p>
+            <a:pPr algn="ctr"/>
+          </a:p>
+        </p:txBody>
+      </p:sp>
+      <p:sp>
+        <p:nvSpPr>
+          <p:cNvPr id="12" name="Rectangle 11"/>
+          <p:cNvSpPr/>
+          <p:nvPr/>
+        </p:nvSpPr>
+        <p:spPr>
+          <a:xfrm>
+            <a:off x="6400173" y="2258568"/>
+            <a:ext cx="15714" cy="237744"/>
+          </a:xfrm>
+          <a:prstGeom prst="rect">
+            <a:avLst/>
+          </a:prstGeom>
+          <a:solidFill>
+            <a:srgbClr val="B3452C"/>
+          </a:solidFill>
+          <a:ln>
+            <a:noFill/>
+          </a:ln>
+          <a:effectLst/>
+        </p:spPr>
+        <p:style>
+          <a:lnRef idx="1">
+            <a:schemeClr val="accent1"/>
+          </a:lnRef>
+          <a:fillRef idx="3">
+            <a:schemeClr val="accent1"/>
+          </a:fillRef>
+          <a:effectRef idx="2">
+            <a:schemeClr val="accent1"/>
+          </a:effectRef>
+          <a:fontRef idx="minor">
+            <a:schemeClr val="lt1"/>
+          </a:fontRef>
+        </p:style>
+        <p:txBody>
+          <a:bodyPr rtlCol="0" anchor="ctr"/>
+          <a:lstStyle/>
+          <a:p>
+            <a:pPr algn="ctr"/>
+          </a:p>
+        </p:txBody>
+      </p:sp>
+      <p:sp>
+        <p:nvSpPr>
+          <p:cNvPr id="13" name="TextBox 12"/>
+          <p:cNvSpPr txBox="1"/>
+          <p:nvPr/>
+        </p:nvSpPr>
+        <p:spPr>
+          <a:xfrm>
+            <a:off x="10481767" y="2176272"/>
+            <a:ext cx="1051560" cy="420624"/>
+          </a:xfrm>
+          <a:prstGeom prst="rect">
+            <a:avLst/>
+          </a:prstGeom>
+          <a:noFill/>
+        </p:spPr>
+        <p:txBody>
+          <a:bodyPr wrap="square">
+            <a:spAutoFit/>
+          </a:bodyPr>
+          <a:lstStyle/>
+          <a:p>
+            <a:pPr algn="ctr"/>
+            <a:r>
+              <a:rPr sz="1400" b="1">
+                <a:solidFill>
+                  <a:srgbClr val="B3452C"/>
+                </a:solidFill>
+              </a:rPr>
+              <a:t>-0.003</a:t>
+            </a:r>
+          </a:p>
+        </p:txBody>
+      </p:sp>
+      <p:sp>
+        <p:nvSpPr>
+          <p:cNvPr id="14" name="TextBox 13"/>
+          <p:cNvSpPr txBox="1"/>
+          <p:nvPr/>
+        </p:nvSpPr>
+        <p:spPr>
+          <a:xfrm>
+            <a:off x="658368" y="2596896"/>
+            <a:ext cx="1691640" cy="420624"/>
+          </a:xfrm>
+          <a:prstGeom prst="rect">
+            <a:avLst/>
+          </a:prstGeom>
+          <a:noFill/>
+        </p:spPr>
+        <p:txBody>
+          <a:bodyPr wrap="square">
+            <a:spAutoFit/>
+          </a:bodyPr>
+          <a:lstStyle/>
+          <a:p>
+            <a:r>
+              <a:rPr sz="1400">
+                <a:solidFill>
+                  <a:srgbClr val="5C6E78"/>
+                </a:solidFill>
+              </a:rPr>
+              <a:t>k = 20</a:t>
+            </a:r>
+          </a:p>
+        </p:txBody>
+      </p:sp>
+      <p:sp>
+        <p:nvSpPr>
+          <p:cNvPr id="15" name="Rectangle 14"/>
+          <p:cNvSpPr/>
+          <p:nvPr/>
+        </p:nvSpPr>
+        <p:spPr>
+          <a:xfrm>
+            <a:off x="2487168" y="2660904"/>
+            <a:ext cx="7857439" cy="274320"/>
+          </a:xfrm>
+          <a:prstGeom prst="rect">
+            <a:avLst/>
+          </a:prstGeom>
+          <a:solidFill>
+            <a:srgbClr val="F2F5F6"/>
+          </a:solidFill>
+          <a:ln>
+            <a:solidFill>
+              <a:srgbClr val="D2DDE1"/>
+            </a:solidFill>
+          </a:ln>
+          <a:effectLst/>
+        </p:spPr>
+        <p:style>
+          <a:lnRef idx="1">
+            <a:schemeClr val="accent1"/>
+          </a:lnRef>
+          <a:fillRef idx="3">
+            <a:schemeClr val="accent1"/>
+          </a:fillRef>
+          <a:effectRef idx="2">
+            <a:schemeClr val="accent1"/>
+          </a:effectRef>
+          <a:fontRef idx="minor">
+            <a:schemeClr val="lt1"/>
+          </a:fontRef>
+        </p:style>
+        <p:txBody>
+          <a:bodyPr rtlCol="0" anchor="ctr"/>
+          <a:lstStyle/>
+          <a:p>
+            <a:pPr algn="ctr"/>
+          </a:p>
+        </p:txBody>
+      </p:sp>
+      <p:sp>
+        <p:nvSpPr>
+          <p:cNvPr id="16" name="Rectangle 15"/>
+          <p:cNvSpPr/>
+          <p:nvPr/>
+        </p:nvSpPr>
+        <p:spPr>
+          <a:xfrm>
+            <a:off x="6415887" y="2624328"/>
+            <a:ext cx="9144" cy="347472"/>
+          </a:xfrm>
+          <a:prstGeom prst="rect">
+            <a:avLst/>
+          </a:prstGeom>
+          <a:solidFill>
+            <a:srgbClr val="5C6E78"/>
+          </a:solidFill>
+          <a:ln>
+            <a:noFill/>
+          </a:ln>
+          <a:effectLst/>
+        </p:spPr>
+        <p:style>
+          <a:lnRef idx="1">
+            <a:schemeClr val="accent1"/>
+          </a:lnRef>
+          <a:fillRef idx="3">
+            <a:schemeClr val="accent1"/>
+          </a:fillRef>
+          <a:effectRef idx="2">
+            <a:schemeClr val="accent1"/>
+          </a:effectRef>
+          <a:fontRef idx="minor">
+            <a:schemeClr val="lt1"/>
+          </a:fontRef>
+        </p:style>
+        <p:txBody>
+          <a:bodyPr rtlCol="0" anchor="ctr"/>
+          <a:lstStyle/>
+          <a:p>
+            <a:pPr algn="ctr"/>
+          </a:p>
+        </p:txBody>
+      </p:sp>
+      <p:sp>
+        <p:nvSpPr>
+          <p:cNvPr id="17" name="Rectangle 16"/>
+          <p:cNvSpPr/>
+          <p:nvPr/>
+        </p:nvSpPr>
+        <p:spPr>
+          <a:xfrm>
+            <a:off x="3382916" y="2679192"/>
+            <a:ext cx="3032971" cy="237744"/>
+          </a:xfrm>
+          <a:prstGeom prst="rect">
+            <a:avLst/>
+          </a:prstGeom>
+          <a:solidFill>
+            <a:srgbClr val="B3452C"/>
+          </a:solidFill>
+          <a:ln>
+            <a:noFill/>
+          </a:ln>
+          <a:effectLst/>
+        </p:spPr>
+        <p:style>
+          <a:lnRef idx="1">
+            <a:schemeClr val="accent1"/>
+          </a:lnRef>
+          <a:fillRef idx="3">
+            <a:schemeClr val="accent1"/>
+          </a:fillRef>
+          <a:effectRef idx="2">
+            <a:schemeClr val="accent1"/>
+          </a:effectRef>
+          <a:fontRef idx="minor">
+            <a:schemeClr val="lt1"/>
+          </a:fontRef>
+        </p:style>
+        <p:txBody>
+          <a:bodyPr rtlCol="0" anchor="ctr"/>
+          <a:lstStyle/>
+          <a:p>
+            <a:pPr algn="ctr"/>
+          </a:p>
+        </p:txBody>
+      </p:sp>
+      <p:sp>
+        <p:nvSpPr>
+          <p:cNvPr id="18" name="TextBox 17"/>
+          <p:cNvSpPr txBox="1"/>
+          <p:nvPr/>
+        </p:nvSpPr>
+        <p:spPr>
+          <a:xfrm>
+            <a:off x="10481767" y="2596896"/>
+            <a:ext cx="1051560" cy="420624"/>
+          </a:xfrm>
+          <a:prstGeom prst="rect">
+            <a:avLst/>
+          </a:prstGeom>
+          <a:noFill/>
+        </p:spPr>
+        <p:txBody>
+          <a:bodyPr wrap="square">
+            <a:spAutoFit/>
+          </a:bodyPr>
+          <a:lstStyle/>
+          <a:p>
+            <a:pPr algn="ctr"/>
+            <a:r>
+              <a:rPr sz="1400" b="1">
+                <a:solidFill>
+                  <a:srgbClr val="B3452C"/>
+                </a:solidFill>
+              </a:rPr>
+              <a:t>-0.618</a:t>
+            </a:r>
+          </a:p>
+        </p:txBody>
+      </p:sp>
+      <p:sp>
+        <p:nvSpPr>
+          <p:cNvPr id="19" name="TextBox 18"/>
+          <p:cNvSpPr txBox="1"/>
+          <p:nvPr/>
+        </p:nvSpPr>
+        <p:spPr>
+          <a:xfrm>
+            <a:off x="658368" y="3200400"/>
+            <a:ext cx="10874959" cy="3200400"/>
           </a:xfrm>
           <a:prstGeom prst="rect">
             <a:avLst/>
@@ -8349,7 +9596,7 @@
                   <a:srgbClr val="16202A"/>
                 </a:solidFill>
               </a:rPr>
-              <a:t>A synthetic view supplies scene content no real camera saw. That is worth a lot at five views and very little at twenty: the per-view value of a real photograph falls by an order of magnitude across the same range.</a:t>
+              <a:t>Outpainting at the 200% ratio, on truck, paired within seed. The treatment is identical at every subset size — only the number of real photographs changes. Best single condition anywhere in the study: +0.285 dB.</a:t>
             </a:r>
           </a:p>
           <a:p>
@@ -8361,25 +9608,10 @@
             <a:r>
               <a:rPr sz="1400">
                 <a:solidFill>
-                  <a:srgbClr val="16202A"/>
-                </a:solidFill>
-              </a:rPr>
-              <a:t>A fabricated view contradicts the others. A contradiction is just as harmful at twenty views as at five — arguably worse, because it now contradicts a better-determined geometry.</a:t>
-            </a:r>
-          </a:p>
-          <a:p>
-            <a:pPr>
-              <a:spcAft>
-                <a:spcPts val="1000"/>
-              </a:spcAft>
-            </a:pPr>
-            <a:r>
-              <a:rPr sz="1400">
-                <a:solidFill>
-                  <a:srgbClr val="16202A"/>
-                </a:solidFill>
-              </a:rPr>
-              <a:t>A decaying benefit plus a roughly constant cost is sufficient to produce a sign change. That is an explanation, and explanations are cheap — so it was made to predict something that could fail.</a:t>
+                  <a:srgbClr val="5C6E78"/>
+                </a:solidFill>
+              </a:rPr>
+              <a:t>For scale: one extra real photograph between k = 5 and k = 10 is worth +1.91 dB total. Augmentation buys a fraction of a photograph, and only while photographs are scarce.</a:t>
             </a:r>
           </a:p>
         </p:txBody>

--- a/results/presentation.pptx
+++ b/results/presentation.pptx
@@ -5863,7 +5863,7 @@
                   <a:srgbClr val="5C6E78"/>
                 </a:solidFill>
               </a:rPr>
-              <a:t>dB baseline scatter between seeds — which five views you draw matters far more in a room</a:t>
+              <a:t>dB baseline scatter between seeds — the draw matters far more in a room</a:t>
             </a:r>
           </a:p>
         </p:txBody>
@@ -5901,7 +5901,7 @@
                   <a:srgbClr val="16202A"/>
                 </a:solidFill>
               </a:rPr>
-              <a:t>34 further runs repeat the outpainting sweep on drjohnson (Deep Blending, 230 views, an indoor room) — a different capture regime, a different scene scale.</a:t>
+              <a:t>34 runs repeat the outpainting sweep on drjohnson — an indoor room, a different capture regime.</a:t>
             </a:r>
           </a:p>
           <a:p>
@@ -5916,7 +5916,7 @@
                   <a:srgbClr val="16202A"/>
                 </a:solidFill>
               </a:rPr>
-              <a:t>Indoors all three metrics move together, where on truck outpainting bought PSNR while SSIM stayed flat. Agreement across three metrics with different failure modes is much harder to get by chance than agreement in one.</a:t>
+              <a:t>Indoors all three metrics move together; on truck SSIM moved slightly the other way. Three metrics agreeing is harder to get by chance than one.</a:t>
             </a:r>
           </a:p>
         </p:txBody>
@@ -6044,7 +6044,7 @@
                   <a:srgbClr val="5C6E78"/>
                 </a:solidFill>
               </a:rPr>
-              <a:t>A synthetic view supplies scene content no real camera saw. That is worth a lot at five views and very little at twenty: the per-view value of a real photograph falls by an order of magnitude across the same range.</a:t>
+              <a:t>Scene content no real camera saw. Worth a lot at five views, very little at twenty — the value of a real photograph falls tenfold across that range.</a:t>
             </a:r>
           </a:p>
         </p:txBody>
@@ -6088,7 +6088,7 @@
                   <a:srgbClr val="5C6E78"/>
                 </a:solidFill>
               </a:rPr>
-              <a:t>A fabricated view contradicts the others. A contradiction is just as harmful at twenty views as at five — arguably worse, because it now contradicts a better-determined geometry.</a:t>
+              <a:t>A fabricated view contradicts the others — just as harmful at twenty views as at five, arguably worse against a better-determined geometry.</a:t>
             </a:r>
           </a:p>
         </p:txBody>
@@ -6126,7 +6126,7 @@
                   <a:srgbClr val="16202A"/>
                 </a:solidFill>
               </a:rPr>
-              <a:t>A synthetic view supplies scene content no real camera saw. That is worth a lot at five views and very little at twenty: the per-view value of a real photograph falls by an order of magnitude across the same range.</a:t>
+              <a:t>Scene content no real camera saw. Worth a lot at five views, very little at twenty — the value of a real photograph falls tenfold across that range.</a:t>
             </a:r>
           </a:p>
           <a:p>
@@ -6141,7 +6141,7 @@
                   <a:srgbClr val="16202A"/>
                 </a:solidFill>
               </a:rPr>
-              <a:t>A fabricated view contradicts the others. A contradiction is just as harmful at twenty views as at five — arguably worse, because it now contradicts a better-determined geometry.</a:t>
+              <a:t>A fabricated view contradicts the others — just as harmful at twenty views as at five, arguably worse against a better-determined geometry.</a:t>
             </a:r>
           </a:p>
           <a:p>
@@ -6156,7 +6156,7 @@
                   <a:srgbClr val="16202A"/>
                 </a:solidFill>
               </a:rPr>
-              <a:t>A decaying benefit plus a roughly constant cost is sufficient to produce a sign change. That is an explanation, and explanations are cheap — so it was made to predict something that could fail.</a:t>
+              <a:t>A decaying benefit plus a constant cost produces a sign change. Explanations are cheap — so this one was made to predict something that could fail.</a:t>
             </a:r>
           </a:p>
         </p:txBody>
@@ -6512,12 +6512,12 @@
               </a:spcAft>
             </a:pPr>
             <a:r>
-              <a:rPr sz="1600">
+              <a:rPr sz="1400">
                 <a:solidFill>
                   <a:srgbClr val="16202A"/>
                 </a:solidFill>
               </a:rPr>
-              <a:t>The obvious objection: perhaps the crossover is a property of Stable Diffusion 1.5 rather than of augmentation. Dreamshaper-8 — same architecture, same VRAM budget, better photorealism — answers it.</a:t>
+              <a:t>Is the crossover a property of SD 1.5 rather than of augmentation? Dreamshaper-8 — same architecture, better photorealism — answers it.</a:t>
             </a:r>
           </a:p>
           <a:p>
@@ -6532,7 +6532,7 @@
                   <a:srgbClr val="16202A"/>
                 </a:solidFill>
               </a:rPr>
-              <a:t>Same reversal, different checkpoint. And the better-looking model is worse at every subset size — it even crosses over earlier, turning negative at k = 10 where SD 1.5 is still at zero.</a:t>
+              <a:t>Same reversal — and the better-looking model is worse everywhere, crossing over earlier.</a:t>
             </a:r>
           </a:p>
           <a:p>
@@ -6547,7 +6547,7 @@
                   <a:srgbClr val="5C6E78"/>
                 </a:solidFill>
               </a:rPr>
-              <a:t>A model finetuned to make each image individually more convincing has no reason to be more consistent between images. Photorealism is not what a synthetic view contributes.</a:t>
+              <a:t>A model finetuned to make each image more convincing has no reason to be more consistent between images.</a:t>
             </a:r>
           </a:p>
         </p:txBody>
@@ -6841,7 +6841,7 @@
                   <a:srgbClr val="16202A"/>
                 </a:solidFill>
               </a:rPr>
-              <a:t>If the harm is inconsistency, an intervention that supplies geometric constraint without inventing a camera has no contradictory geometry to accumulate — so it should stay positive at every subset size.</a:t>
+              <a:t>If the harm is inconsistency, constraint without a new camera has no contradiction to accumulate — so it should never turn negative.</a:t>
             </a:r>
           </a:p>
           <a:p>
@@ -6856,7 +6856,7 @@
                   <a:srgbClr val="16202A"/>
                 </a:solidFill>
               </a:rPr>
-              <a:t>Monocular depth regularisation is that intervention: a depth map per real photograph, anchored to true scale against the sparse SfM points that view observes (median R² 0.964). Synthetic views receive no depth supervision — estimating depth from a fabricated image would be circular.</a:t>
+              <a:t>Monocular depth regularisation — a depth map per real photograph, scale-anchored to the sparse SfM points. Prior work (Chung et al. 2023), used here as a control.</a:t>
             </a:r>
           </a:p>
           <a:p>
@@ -6868,10 +6868,10 @@
             <a:r>
               <a:rPr sz="1400">
                 <a:solidFill>
-                  <a:srgbClr val="5C6E78"/>
-                </a:solidFill>
-              </a:rPr>
-              <a:t>Coverage crosses over; constraint does not. The two interventions differ in exactly one respect — whether a camera that never existed is invented.</a:t>
+                  <a:srgbClr val="16202A"/>
+                </a:solidFill>
+              </a:rPr>
+              <a:t>Coverage crosses over; constraint does not. The two differ in exactly one respect — whether a camera is invented.</a:t>
             </a:r>
           </a:p>
         </p:txBody>
@@ -6993,7 +6993,7 @@
                   <a:srgbClr val="16202A"/>
                 </a:solidFill>
               </a:rPr>
-              <a:t>•  Diffusion augmentation is not free coverage. It helps only while real views are in the single digits, and the crossover reproduces outdoors and indoors.</a:t>
+              <a:t>•  Augmentation is not free coverage. It helps only in the single digits, outdoors and indoors alike.</a:t>
             </a:r>
           </a:p>
           <a:p>
@@ -7008,7 +7008,7 @@
                   <a:srgbClr val="16202A"/>
                 </a:solidFill>
               </a:rPr>
-              <a:t>•  The mechanism is pose novelty. Four controls exclude image quality, hallucinated hole content, warping artifacts, and mere view repetition.</a:t>
+              <a:t>•  The mechanism is invented camera pose. Four controls exclude image quality, hole content, warping and repetition.</a:t>
             </a:r>
           </a:p>
           <a:p>
@@ -7023,7 +7023,7 @@
                   <a:srgbClr val="16202A"/>
                 </a:solidFill>
               </a:rPr>
-              <a:t>•  Constraint beats invention. A depth prior is positive at every subset size and compounds with augmentation; anything that invents a camera eventually reverses sign. It also outlasts it: at 30,000 iterations outpainting is worth -0.078 dB and the prior still +0.208.</a:t>
+              <a:t>•  Constraint beats invention. A depth prior never crosses over, and still returns +0.208 dB at 30,000 iterations where outpainting is -0.078.</a:t>
             </a:r>
           </a:p>
           <a:p>
@@ -7038,7 +7038,7 @@
                   <a:srgbClr val="16202A"/>
                 </a:solidFill>
               </a:rPr>
-              <a:t>•  The two effects are separable. Outpainting supplies peripheral content, the depth prior supplies constraint — and combining them exceeds the sum of the parts at every subset size.</a:t>
+              <a:t>•  The two are separable — and combining them beats either alone.</a:t>
             </a:r>
           </a:p>
         </p:txBody>
@@ -7160,7 +7160,7 @@
                   <a:srgbClr val="16202A"/>
                 </a:solidFill>
               </a:rPr>
-              <a:t>•  The 7,000-iteration setting is load-bearing. The benefit decays monotonically with training length — outpainting at k = 5 goes +0.285 → +0.045 → -0.078 dB at 7k, 15k and 30k. The baseline is flat from 7k to 15k (15.20 → 15.22) and lower by 30k (15.04), so the setting is not mis-chosen: 30,000 is past this regime's optimum, not better converged. The augmentation gain is conditional on early stopping; the depth prior is not.</a:t>
+              <a:t>•  Early stopping is load-bearing. The gain decays with training length: +0.285 → +0.045 → -0.078 dB at 7k, 15k, 30k. The depth prior does not.</a:t>
             </a:r>
           </a:p>
           <a:p>
@@ -7175,7 +7175,7 @@
                   <a:srgbClr val="16202A"/>
                 </a:solidFill>
               </a:rPr>
-              <a:t>•  Two checkpoints, one architecture. Dreamshaper-8 is an SD 1.5 finetune, so the swap varies image quality, not architecture. SDXL needs ~6.5 GB and FLUX ~54 GB against this card's 4 GB.</a:t>
+              <a:t>•  Two checkpoints, one architecture. SDXL needs ~6.5 GB and FLUX ~54 GB against this card's 4 GB.</a:t>
             </a:r>
           </a:p>
           <a:p>
@@ -7190,7 +7190,7 @@
                   <a:srgbClr val="16202A"/>
                 </a:solidFill>
               </a:rPr>
-              <a:t>•  Three seeds. A consistency check, not statistical significance.</a:t>
+              <a:t>•  Three seeds, two scenes. A consistency check, not significance.</a:t>
             </a:r>
           </a:p>
           <a:p>
@@ -7205,22 +7205,7 @@
                   <a:srgbClr val="16202A"/>
                 </a:solidFill>
               </a:rPr>
-              <a:t>•  Two scenes, one partially swept. The second scene was swept for outpainting only, at k = 5 and k = 20. "Inpainting is flat" and "pose-guided always hurts" remain single-scene claims.</a:t>
-            </a:r>
-          </a:p>
-          <a:p>
-            <a:pPr>
-              <a:spcAft>
-                <a:spcPts val="900"/>
-              </a:spcAft>
-            </a:pPr>
-            <a:r>
-              <a:rPr sz="1500">
-                <a:solidFill>
-                  <a:srgbClr val="16202A"/>
-                </a:solidFill>
-              </a:rPr>
-              <a:t>•  The depth prior's compounding is single-scene. It reproduces on drjohnson as a gain, but the interaction there is +0.075 ± 0.672 dB — additive, not super-additive. And at k = 20 after 30,000 iterations it is +0.130 dB, no longer clear of the noise floor.</a:t>
+              <a:t>•  The compounding is single-scene. On drjohnson the interaction is +0.075 ± 0.672 dB — additive, not super-additive.</a:t>
             </a:r>
           </a:p>
         </p:txBody>
@@ -7342,7 +7327,7 @@
                   <a:srgbClr val="16202A"/>
                 </a:solidFill>
               </a:rPr>
-              <a:t>Whether that trade is worth taking depends on how scarce the real photographs are. At five views the coverage is worth the inconsistency. By twenty it is not — and the same treatment that helped now harms.</a:t>
+              <a:t>At five views the coverage is worth the inconsistency. By twenty it is not.</a:t>
             </a:r>
           </a:p>
           <a:p>
@@ -7745,7 +7730,7 @@
                   <a:srgbClr val="16202A"/>
                 </a:solidFill>
               </a:rPr>
-              <a:t>•  The problem. What splatting does when photographs run out.</a:t>
+              <a:t>•  The problem — splatting without enough photographs</a:t>
             </a:r>
           </a:p>
           <a:p>
@@ -7760,7 +7745,7 @@
                   <a:srgbClr val="16202A"/>
                 </a:solidFill>
               </a:rPr>
-              <a:t>•  The method. Three ways to manufacture a training view, and the pipeline that evaluates them.</a:t>
+              <a:t>•  The method — three ways to manufacture a view</a:t>
             </a:r>
           </a:p>
           <a:p>
@@ -7775,7 +7760,7 @@
                   <a:srgbClr val="16202A"/>
                 </a:solidFill>
               </a:rPr>
-              <a:t>•  The grid. 3 strategies × 4 ratios × 3 subset sizes × 3 seeds.</a:t>
+              <a:t>•  The grid — what was run</a:t>
             </a:r>
           </a:p>
           <a:p>
@@ -7790,7 +7775,7 @@
                   <a:srgbClr val="16202A"/>
                 </a:solidFill>
               </a:rPr>
-              <a:t>•  The result. The same treatment helps at five real views and harms at twenty.</a:t>
+              <a:t>•  The result — a sign change</a:t>
             </a:r>
           </a:p>
           <a:p>
@@ -7805,7 +7790,7 @@
                   <a:srgbClr val="16202A"/>
                 </a:solidFill>
               </a:rPr>
-              <a:t>•  Why. Coverage decays, inconsistency does not — and four controls that rule out the alternatives.</a:t>
+              <a:t>•  Why — and four controls</a:t>
             </a:r>
           </a:p>
           <a:p>
@@ -7820,7 +7805,7 @@
                   <a:srgbClr val="16202A"/>
                 </a:solidFill>
               </a:rPr>
-              <a:t>•  A prediction, tested. Constraint without a viewpoint never crosses over.</a:t>
+              <a:t>•  A prediction, tested</a:t>
             </a:r>
           </a:p>
           <a:p>
@@ -7835,7 +7820,7 @@
                   <a:srgbClr val="16202A"/>
                 </a:solidFill>
               </a:rPr>
-              <a:t>•  Limits. What this does not show.</a:t>
+              <a:t>•  Limits</a:t>
             </a:r>
           </a:p>
         </p:txBody>
@@ -8129,7 +8114,7 @@
                   <a:srgbClr val="16202A"/>
                 </a:solidFill>
               </a:rPr>
-              <a:t>On truck (Tanks &amp; Temples), the full 219-view reconstruction reaches 25.23 dB. Cut to five photographs and it falls to 15.20 dB.</a:t>
+              <a:t>Cut truck from 219 photographs to five and held-out quality collapses.</a:t>
             </a:r>
           </a:p>
           <a:p>
@@ -8856,7 +8841,7 @@
                   <a:srgbClr val="16202A"/>
                 </a:solidFill>
               </a:rPr>
-              <a:t>•  Measured noise floor. The identical configuration re-run three times varies by 0.039 dB, so a 0.2 dB effect is resolvable and a 0.03 dB one is not.</a:t>
+              <a:t>•  Measured noise floor. An identical configuration re-run three times varies by 0.039 dB.</a:t>
             </a:r>
           </a:p>
           <a:p>
@@ -8871,7 +8856,7 @@
                   <a:srgbClr val="16202A"/>
                 </a:solidFill>
               </a:rPr>
-              <a:t>•  Farthest-point sampling. Subsets are spread over the camera trajectory rather than drawn at random; the seed picks only the starting camera.</a:t>
+              <a:t>•  Farthest-point sampling. Subsets spread over the camera trajectory, not drawn at random.</a:t>
             </a:r>
           </a:p>
         </p:txBody>
@@ -9596,7 +9581,7 @@
                   <a:srgbClr val="16202A"/>
                 </a:solidFill>
               </a:rPr>
-              <a:t>Outpainting at the 200% ratio, on truck, paired within seed. The treatment is identical at every subset size — only the number of real photographs changes. Best single condition anywhere in the study: +0.285 dB.</a:t>
+              <a:t>Outpainting at 200%, paired within seed. The treatment is identical at every subset size — only the number of real photographs changes.</a:t>
             </a:r>
           </a:p>
           <a:p>
